--- a/exports/pptx/lessons/middle-module-14-magic-squares/day-03-counting-and-symmetry.pptx
+++ b/exports/pptx/lessons/middle-module-14-magic-squares/day-03-counting-and-symmetry.pptx
@@ -18,9 +18,15 @@
     <p:sldId id="266" r:id="rId12"/>
     <p:sldId id="267" r:id="rId13"/>
     <p:sldId id="268" r:id="rId14"/>
+    <p:sldId id="269" r:id="rId15"/>
+    <p:sldId id="270" r:id="rId16"/>
+    <p:sldId id="271" r:id="rId17"/>
+    <p:sldId id="272" r:id="rId18"/>
+    <p:sldId id="273" r:id="rId19"/>
+    <p:sldId id="274" r:id="rId20"/>
   </p:sldIdLst>
   <p:notesMasterIdLst>
-    <p:notesMasterId r:id="rId15"/>
+    <p:notesMasterId r:id="rId21"/>
   </p:notesMasterIdLst>
   <p:sldSz cx="9144000" cy="5143500"/>
   <p:notesSz cx="5143500" cy="9144000"/>
@@ -890,6 +896,534 @@
             <a:fld id="{F7021451-1387-4CA6-816F-3879F97B5CBC}" type="slidenum">
               <a:rPr lang="en-US"/>
               <a:t>13</a:t>
+            </a:fld>
+            <a:endParaRPr lang="en-US"/>
+          </a:p>
+        </p:txBody>
+      </p:sp>
+    </p:spTree>
+    <p:extLst>
+      <p:ext uri="{BB962C8B-B14F-4D97-AF65-F5344CB8AC3E}">
+        <p14:creationId xmlns:p14="http://schemas.microsoft.com/office/powerpoint/2010/main" val="1024086991"/>
+      </p:ext>
+    </p:extLst>
+  </p:cSld>
+  <p:clrMapOvr>
+    <a:masterClrMapping/>
+  </p:clrMapOvr>
+</p:notes>
+</file>
+
+<file path=ppt/notesSlides/notesSlide14.xml><?xml version="1.0" encoding="utf-8"?>
+<p:notes xmlns:a="http://schemas.openxmlformats.org/drawingml/2006/main" xmlns:r="http://schemas.openxmlformats.org/officeDocument/2006/relationships" xmlns:p="http://schemas.openxmlformats.org/presentationml/2006/main">
+  <p:cSld>
+    <p:spTree>
+      <p:nvGrpSpPr>
+        <p:cNvPr id="1" name=""/>
+        <p:cNvGrpSpPr/>
+        <p:nvPr/>
+      </p:nvGrpSpPr>
+      <p:grpSpPr>
+        <a:xfrm>
+          <a:off x="0" y="0"/>
+          <a:ext cx="0" cy="0"/>
+          <a:chOff x="0" y="0"/>
+          <a:chExt cx="0" cy="0"/>
+        </a:xfrm>
+      </p:grpSpPr>
+      <p:sp>
+        <p:nvSpPr>
+          <p:cNvPr id="2" name="Slide Image Placeholder 1"/>
+          <p:cNvSpPr>
+            <a:spLocks noGrp="1" noRot="1" noChangeAspect="1"/>
+          </p:cNvSpPr>
+          <p:nvPr>
+            <p:ph type="sldImg"/>
+          </p:nvPr>
+        </p:nvSpPr>
+        <p:spPr/>
+      </p:sp>
+      <p:sp>
+        <p:nvSpPr>
+          <p:cNvPr id="3" name="Notes Placeholder 2"/>
+          <p:cNvSpPr>
+            <a:spLocks noGrp="1"/>
+          </p:cNvSpPr>
+          <p:nvPr>
+            <p:ph type="body" idx="1"/>
+          </p:nvPr>
+        </p:nvSpPr>
+        <p:spPr/>
+        <p:txBody>
+          <a:bodyPr/>
+          <a:lstStyle/>
+          <a:p>
+            <a:r>
+              <a:rPr lang="en-US" dirty="0"/>
+              <a:t/>
+            </a:r>
+            <a:endParaRPr lang="en-US" dirty="0"/>
+          </a:p>
+        </p:txBody>
+      </p:sp>
+      <p:sp>
+        <p:nvSpPr>
+          <p:cNvPr id="4" name="Slide Number Placeholder 3"/>
+          <p:cNvSpPr>
+            <a:spLocks noGrp="1"/>
+          </p:cNvSpPr>
+          <p:nvPr>
+            <p:ph type="sldNum" sz="quarter" idx="10"/>
+          </p:nvPr>
+        </p:nvSpPr>
+        <p:spPr/>
+        <p:txBody>
+          <a:bodyPr/>
+          <a:lstStyle/>
+          <a:p>
+            <a:fld id="{F7021451-1387-4CA6-816F-3879F97B5CBC}" type="slidenum">
+              <a:rPr lang="en-US"/>
+              <a:t>14</a:t>
+            </a:fld>
+            <a:endParaRPr lang="en-US"/>
+          </a:p>
+        </p:txBody>
+      </p:sp>
+    </p:spTree>
+    <p:extLst>
+      <p:ext uri="{BB962C8B-B14F-4D97-AF65-F5344CB8AC3E}">
+        <p14:creationId xmlns:p14="http://schemas.microsoft.com/office/powerpoint/2010/main" val="1024086991"/>
+      </p:ext>
+    </p:extLst>
+  </p:cSld>
+  <p:clrMapOvr>
+    <a:masterClrMapping/>
+  </p:clrMapOvr>
+</p:notes>
+</file>
+
+<file path=ppt/notesSlides/notesSlide15.xml><?xml version="1.0" encoding="utf-8"?>
+<p:notes xmlns:a="http://schemas.openxmlformats.org/drawingml/2006/main" xmlns:r="http://schemas.openxmlformats.org/officeDocument/2006/relationships" xmlns:p="http://schemas.openxmlformats.org/presentationml/2006/main">
+  <p:cSld>
+    <p:spTree>
+      <p:nvGrpSpPr>
+        <p:cNvPr id="1" name=""/>
+        <p:cNvGrpSpPr/>
+        <p:nvPr/>
+      </p:nvGrpSpPr>
+      <p:grpSpPr>
+        <a:xfrm>
+          <a:off x="0" y="0"/>
+          <a:ext cx="0" cy="0"/>
+          <a:chOff x="0" y="0"/>
+          <a:chExt cx="0" cy="0"/>
+        </a:xfrm>
+      </p:grpSpPr>
+      <p:sp>
+        <p:nvSpPr>
+          <p:cNvPr id="2" name="Slide Image Placeholder 1"/>
+          <p:cNvSpPr>
+            <a:spLocks noGrp="1" noRot="1" noChangeAspect="1"/>
+          </p:cNvSpPr>
+          <p:nvPr>
+            <p:ph type="sldImg"/>
+          </p:nvPr>
+        </p:nvSpPr>
+        <p:spPr/>
+      </p:sp>
+      <p:sp>
+        <p:nvSpPr>
+          <p:cNvPr id="3" name="Notes Placeholder 2"/>
+          <p:cNvSpPr>
+            <a:spLocks noGrp="1"/>
+          </p:cNvSpPr>
+          <p:nvPr>
+            <p:ph type="body" idx="1"/>
+          </p:nvPr>
+        </p:nvSpPr>
+        <p:spPr/>
+        <p:txBody>
+          <a:bodyPr/>
+          <a:lstStyle/>
+          <a:p>
+            <a:r>
+              <a:rPr lang="en-US" dirty="0"/>
+              <a:t/>
+            </a:r>
+            <a:endParaRPr lang="en-US" dirty="0"/>
+          </a:p>
+        </p:txBody>
+      </p:sp>
+      <p:sp>
+        <p:nvSpPr>
+          <p:cNvPr id="4" name="Slide Number Placeholder 3"/>
+          <p:cNvSpPr>
+            <a:spLocks noGrp="1"/>
+          </p:cNvSpPr>
+          <p:nvPr>
+            <p:ph type="sldNum" sz="quarter" idx="10"/>
+          </p:nvPr>
+        </p:nvSpPr>
+        <p:spPr/>
+        <p:txBody>
+          <a:bodyPr/>
+          <a:lstStyle/>
+          <a:p>
+            <a:fld id="{F7021451-1387-4CA6-816F-3879F97B5CBC}" type="slidenum">
+              <a:rPr lang="en-US"/>
+              <a:t>15</a:t>
+            </a:fld>
+            <a:endParaRPr lang="en-US"/>
+          </a:p>
+        </p:txBody>
+      </p:sp>
+    </p:spTree>
+    <p:extLst>
+      <p:ext uri="{BB962C8B-B14F-4D97-AF65-F5344CB8AC3E}">
+        <p14:creationId xmlns:p14="http://schemas.microsoft.com/office/powerpoint/2010/main" val="1024086991"/>
+      </p:ext>
+    </p:extLst>
+  </p:cSld>
+  <p:clrMapOvr>
+    <a:masterClrMapping/>
+  </p:clrMapOvr>
+</p:notes>
+</file>
+
+<file path=ppt/notesSlides/notesSlide16.xml><?xml version="1.0" encoding="utf-8"?>
+<p:notes xmlns:a="http://schemas.openxmlformats.org/drawingml/2006/main" xmlns:r="http://schemas.openxmlformats.org/officeDocument/2006/relationships" xmlns:p="http://schemas.openxmlformats.org/presentationml/2006/main">
+  <p:cSld>
+    <p:spTree>
+      <p:nvGrpSpPr>
+        <p:cNvPr id="1" name=""/>
+        <p:cNvGrpSpPr/>
+        <p:nvPr/>
+      </p:nvGrpSpPr>
+      <p:grpSpPr>
+        <a:xfrm>
+          <a:off x="0" y="0"/>
+          <a:ext cx="0" cy="0"/>
+          <a:chOff x="0" y="0"/>
+          <a:chExt cx="0" cy="0"/>
+        </a:xfrm>
+      </p:grpSpPr>
+      <p:sp>
+        <p:nvSpPr>
+          <p:cNvPr id="2" name="Slide Image Placeholder 1"/>
+          <p:cNvSpPr>
+            <a:spLocks noGrp="1" noRot="1" noChangeAspect="1"/>
+          </p:cNvSpPr>
+          <p:nvPr>
+            <p:ph type="sldImg"/>
+          </p:nvPr>
+        </p:nvSpPr>
+        <p:spPr/>
+      </p:sp>
+      <p:sp>
+        <p:nvSpPr>
+          <p:cNvPr id="3" name="Notes Placeholder 2"/>
+          <p:cNvSpPr>
+            <a:spLocks noGrp="1"/>
+          </p:cNvSpPr>
+          <p:nvPr>
+            <p:ph type="body" idx="1"/>
+          </p:nvPr>
+        </p:nvSpPr>
+        <p:spPr/>
+        <p:txBody>
+          <a:bodyPr/>
+          <a:lstStyle/>
+          <a:p>
+            <a:r>
+              <a:rPr lang="en-US" dirty="0"/>
+              <a:t/>
+            </a:r>
+            <a:endParaRPr lang="en-US" dirty="0"/>
+          </a:p>
+        </p:txBody>
+      </p:sp>
+      <p:sp>
+        <p:nvSpPr>
+          <p:cNvPr id="4" name="Slide Number Placeholder 3"/>
+          <p:cNvSpPr>
+            <a:spLocks noGrp="1"/>
+          </p:cNvSpPr>
+          <p:nvPr>
+            <p:ph type="sldNum" sz="quarter" idx="10"/>
+          </p:nvPr>
+        </p:nvSpPr>
+        <p:spPr/>
+        <p:txBody>
+          <a:bodyPr/>
+          <a:lstStyle/>
+          <a:p>
+            <a:fld id="{F7021451-1387-4CA6-816F-3879F97B5CBC}" type="slidenum">
+              <a:rPr lang="en-US"/>
+              <a:t>16</a:t>
+            </a:fld>
+            <a:endParaRPr lang="en-US"/>
+          </a:p>
+        </p:txBody>
+      </p:sp>
+    </p:spTree>
+    <p:extLst>
+      <p:ext uri="{BB962C8B-B14F-4D97-AF65-F5344CB8AC3E}">
+        <p14:creationId xmlns:p14="http://schemas.microsoft.com/office/powerpoint/2010/main" val="1024086991"/>
+      </p:ext>
+    </p:extLst>
+  </p:cSld>
+  <p:clrMapOvr>
+    <a:masterClrMapping/>
+  </p:clrMapOvr>
+</p:notes>
+</file>
+
+<file path=ppt/notesSlides/notesSlide17.xml><?xml version="1.0" encoding="utf-8"?>
+<p:notes xmlns:a="http://schemas.openxmlformats.org/drawingml/2006/main" xmlns:r="http://schemas.openxmlformats.org/officeDocument/2006/relationships" xmlns:p="http://schemas.openxmlformats.org/presentationml/2006/main">
+  <p:cSld>
+    <p:spTree>
+      <p:nvGrpSpPr>
+        <p:cNvPr id="1" name=""/>
+        <p:cNvGrpSpPr/>
+        <p:nvPr/>
+      </p:nvGrpSpPr>
+      <p:grpSpPr>
+        <a:xfrm>
+          <a:off x="0" y="0"/>
+          <a:ext cx="0" cy="0"/>
+          <a:chOff x="0" y="0"/>
+          <a:chExt cx="0" cy="0"/>
+        </a:xfrm>
+      </p:grpSpPr>
+      <p:sp>
+        <p:nvSpPr>
+          <p:cNvPr id="2" name="Slide Image Placeholder 1"/>
+          <p:cNvSpPr>
+            <a:spLocks noGrp="1" noRot="1" noChangeAspect="1"/>
+          </p:cNvSpPr>
+          <p:nvPr>
+            <p:ph type="sldImg"/>
+          </p:nvPr>
+        </p:nvSpPr>
+        <p:spPr/>
+      </p:sp>
+      <p:sp>
+        <p:nvSpPr>
+          <p:cNvPr id="3" name="Notes Placeholder 2"/>
+          <p:cNvSpPr>
+            <a:spLocks noGrp="1"/>
+          </p:cNvSpPr>
+          <p:nvPr>
+            <p:ph type="body" idx="1"/>
+          </p:nvPr>
+        </p:nvSpPr>
+        <p:spPr/>
+        <p:txBody>
+          <a:bodyPr/>
+          <a:lstStyle/>
+          <a:p>
+            <a:r>
+              <a:rPr lang="en-US" dirty="0"/>
+              <a:t/>
+            </a:r>
+            <a:endParaRPr lang="en-US" dirty="0"/>
+          </a:p>
+        </p:txBody>
+      </p:sp>
+      <p:sp>
+        <p:nvSpPr>
+          <p:cNvPr id="4" name="Slide Number Placeholder 3"/>
+          <p:cNvSpPr>
+            <a:spLocks noGrp="1"/>
+          </p:cNvSpPr>
+          <p:nvPr>
+            <p:ph type="sldNum" sz="quarter" idx="10"/>
+          </p:nvPr>
+        </p:nvSpPr>
+        <p:spPr/>
+        <p:txBody>
+          <a:bodyPr/>
+          <a:lstStyle/>
+          <a:p>
+            <a:fld id="{F7021451-1387-4CA6-816F-3879F97B5CBC}" type="slidenum">
+              <a:rPr lang="en-US"/>
+              <a:t>17</a:t>
+            </a:fld>
+            <a:endParaRPr lang="en-US"/>
+          </a:p>
+        </p:txBody>
+      </p:sp>
+    </p:spTree>
+    <p:extLst>
+      <p:ext uri="{BB962C8B-B14F-4D97-AF65-F5344CB8AC3E}">
+        <p14:creationId xmlns:p14="http://schemas.microsoft.com/office/powerpoint/2010/main" val="1024086991"/>
+      </p:ext>
+    </p:extLst>
+  </p:cSld>
+  <p:clrMapOvr>
+    <a:masterClrMapping/>
+  </p:clrMapOvr>
+</p:notes>
+</file>
+
+<file path=ppt/notesSlides/notesSlide18.xml><?xml version="1.0" encoding="utf-8"?>
+<p:notes xmlns:a="http://schemas.openxmlformats.org/drawingml/2006/main" xmlns:r="http://schemas.openxmlformats.org/officeDocument/2006/relationships" xmlns:p="http://schemas.openxmlformats.org/presentationml/2006/main">
+  <p:cSld>
+    <p:spTree>
+      <p:nvGrpSpPr>
+        <p:cNvPr id="1" name=""/>
+        <p:cNvGrpSpPr/>
+        <p:nvPr/>
+      </p:nvGrpSpPr>
+      <p:grpSpPr>
+        <a:xfrm>
+          <a:off x="0" y="0"/>
+          <a:ext cx="0" cy="0"/>
+          <a:chOff x="0" y="0"/>
+          <a:chExt cx="0" cy="0"/>
+        </a:xfrm>
+      </p:grpSpPr>
+      <p:sp>
+        <p:nvSpPr>
+          <p:cNvPr id="2" name="Slide Image Placeholder 1"/>
+          <p:cNvSpPr>
+            <a:spLocks noGrp="1" noRot="1" noChangeAspect="1"/>
+          </p:cNvSpPr>
+          <p:nvPr>
+            <p:ph type="sldImg"/>
+          </p:nvPr>
+        </p:nvSpPr>
+        <p:spPr/>
+      </p:sp>
+      <p:sp>
+        <p:nvSpPr>
+          <p:cNvPr id="3" name="Notes Placeholder 2"/>
+          <p:cNvSpPr>
+            <a:spLocks noGrp="1"/>
+          </p:cNvSpPr>
+          <p:nvPr>
+            <p:ph type="body" idx="1"/>
+          </p:nvPr>
+        </p:nvSpPr>
+        <p:spPr/>
+        <p:txBody>
+          <a:bodyPr/>
+          <a:lstStyle/>
+          <a:p>
+            <a:r>
+              <a:rPr lang="en-US" dirty="0"/>
+              <a:t/>
+            </a:r>
+            <a:endParaRPr lang="en-US" dirty="0"/>
+          </a:p>
+        </p:txBody>
+      </p:sp>
+      <p:sp>
+        <p:nvSpPr>
+          <p:cNvPr id="4" name="Slide Number Placeholder 3"/>
+          <p:cNvSpPr>
+            <a:spLocks noGrp="1"/>
+          </p:cNvSpPr>
+          <p:nvPr>
+            <p:ph type="sldNum" sz="quarter" idx="10"/>
+          </p:nvPr>
+        </p:nvSpPr>
+        <p:spPr/>
+        <p:txBody>
+          <a:bodyPr/>
+          <a:lstStyle/>
+          <a:p>
+            <a:fld id="{F7021451-1387-4CA6-816F-3879F97B5CBC}" type="slidenum">
+              <a:rPr lang="en-US"/>
+              <a:t>18</a:t>
+            </a:fld>
+            <a:endParaRPr lang="en-US"/>
+          </a:p>
+        </p:txBody>
+      </p:sp>
+    </p:spTree>
+    <p:extLst>
+      <p:ext uri="{BB962C8B-B14F-4D97-AF65-F5344CB8AC3E}">
+        <p14:creationId xmlns:p14="http://schemas.microsoft.com/office/powerpoint/2010/main" val="1024086991"/>
+      </p:ext>
+    </p:extLst>
+  </p:cSld>
+  <p:clrMapOvr>
+    <a:masterClrMapping/>
+  </p:clrMapOvr>
+</p:notes>
+</file>
+
+<file path=ppt/notesSlides/notesSlide19.xml><?xml version="1.0" encoding="utf-8"?>
+<p:notes xmlns:a="http://schemas.openxmlformats.org/drawingml/2006/main" xmlns:r="http://schemas.openxmlformats.org/officeDocument/2006/relationships" xmlns:p="http://schemas.openxmlformats.org/presentationml/2006/main">
+  <p:cSld>
+    <p:spTree>
+      <p:nvGrpSpPr>
+        <p:cNvPr id="1" name=""/>
+        <p:cNvGrpSpPr/>
+        <p:nvPr/>
+      </p:nvGrpSpPr>
+      <p:grpSpPr>
+        <a:xfrm>
+          <a:off x="0" y="0"/>
+          <a:ext cx="0" cy="0"/>
+          <a:chOff x="0" y="0"/>
+          <a:chExt cx="0" cy="0"/>
+        </a:xfrm>
+      </p:grpSpPr>
+      <p:sp>
+        <p:nvSpPr>
+          <p:cNvPr id="2" name="Slide Image Placeholder 1"/>
+          <p:cNvSpPr>
+            <a:spLocks noGrp="1" noRot="1" noChangeAspect="1"/>
+          </p:cNvSpPr>
+          <p:nvPr>
+            <p:ph type="sldImg"/>
+          </p:nvPr>
+        </p:nvSpPr>
+        <p:spPr/>
+      </p:sp>
+      <p:sp>
+        <p:nvSpPr>
+          <p:cNvPr id="3" name="Notes Placeholder 2"/>
+          <p:cNvSpPr>
+            <a:spLocks noGrp="1"/>
+          </p:cNvSpPr>
+          <p:nvPr>
+            <p:ph type="body" idx="1"/>
+          </p:nvPr>
+        </p:nvSpPr>
+        <p:spPr/>
+        <p:txBody>
+          <a:bodyPr/>
+          <a:lstStyle/>
+          <a:p>
+            <a:r>
+              <a:rPr lang="en-US" dirty="0"/>
+              <a:t/>
+            </a:r>
+            <a:endParaRPr lang="en-US" dirty="0"/>
+          </a:p>
+        </p:txBody>
+      </p:sp>
+      <p:sp>
+        <p:nvSpPr>
+          <p:cNvPr id="4" name="Slide Number Placeholder 3"/>
+          <p:cNvSpPr>
+            <a:spLocks noGrp="1"/>
+          </p:cNvSpPr>
+          <p:nvPr>
+            <p:ph type="sldNum" sz="quarter" idx="10"/>
+          </p:nvPr>
+        </p:nvSpPr>
+        <p:spPr/>
+        <p:txBody>
+          <a:bodyPr/>
+          <a:lstStyle/>
+          <a:p>
+            <a:fld id="{F7021451-1387-4CA6-816F-3879F97B5CBC}" type="slidenum">
+              <a:rPr lang="en-US"/>
+              <a:t>19</a:t>
             </a:fld>
             <a:endParaRPr lang="en-US"/>
           </a:p>
@@ -2235,148 +2769,6 @@
         </p:nvSpPr>
         <p:spPr>
           <a:xfrm>
-            <a:off x="406301" y="1223963"/>
-            <a:ext cx="8498026" cy="274290"/>
-          </a:xfrm>
-          <a:prstGeom prst="rect">
-            <a:avLst/>
-          </a:prstGeom>
-          <a:noFill/>
-          <a:ln/>
-        </p:spPr>
-        <p:txBody>
-          <a:bodyPr wrap="square" lIns="0" tIns="0" rIns="0" bIns="0" rtlCol="0" anchor="t"/>
-          <a:lstStyle/>
-          <a:p>
-            <a:pPr algn="l" indent="0" marL="0">
-              <a:lnSpc>
-                <a:spcPts val="2160"/>
-              </a:lnSpc>
-              <a:spcBef>
-                <a:spcPts val="600"/>
-              </a:spcBef>
-              <a:spcAft>
-                <a:spcPts val="800"/>
-              </a:spcAft>
-              <a:buNone/>
-            </a:pPr>
-            <a:r>
-              <a:rPr lang="en-US" sz="1800" b="1" dirty="0">
-                <a:solidFill>
-                  <a:srgbClr val="FE4447"/>
-                </a:solidFill>
-                <a:latin typeface="Georgia" pitchFamily="34" charset="0"/>
-                <a:ea typeface="Georgia" pitchFamily="34" charset="-122"/>
-                <a:cs typeface="Georgia" pitchFamily="34" charset="-120"/>
-              </a:rPr>
-              <a:t>Learning objective</a:t>
-            </a:r>
-            <a:endParaRPr lang="en-US" sz="1800" dirty="0"/>
-          </a:p>
-        </p:txBody>
-      </p:sp>
-      <p:sp>
-        <p:nvSpPr>
-          <p:cNvPr id="6" name="Text 4"/>
-          <p:cNvSpPr/>
-          <p:nvPr/>
-        </p:nvSpPr>
-        <p:spPr>
-          <a:xfrm>
-            <a:off x="406301" y="1637854"/>
-            <a:ext cx="8498026" cy="426541"/>
-          </a:xfrm>
-          <a:prstGeom prst="rect">
-            <a:avLst/>
-          </a:prstGeom>
-          <a:noFill/>
-          <a:ln/>
-        </p:spPr>
-        <p:txBody>
-          <a:bodyPr wrap="square" lIns="0" tIns="0" rIns="0" bIns="0" rtlCol="0" anchor="t"/>
-          <a:lstStyle/>
-          <a:p>
-            <a:pPr algn="l" indent="0" marL="0">
-              <a:lnSpc>
-                <a:spcPts val="1680"/>
-              </a:lnSpc>
-              <a:spcBef>
-                <a:spcPts val="300"/>
-              </a:spcBef>
-              <a:spcAft>
-                <a:spcPts val="300"/>
-              </a:spcAft>
-              <a:buNone/>
-            </a:pPr>
-            <a:r>
-              <a:rPr lang="en-US" sz="1200" dirty="0">
-                <a:solidFill>
-                  <a:srgbClr val="1C2833"/>
-                </a:solidFill>
-                <a:latin typeface="Arial" pitchFamily="34" charset="0"/>
-                <a:ea typeface="Arial" pitchFamily="34" charset="-122"/>
-                <a:cs typeface="Arial" pitchFamily="34" charset="-120"/>
-              </a:rPr>
-              <a:t>By the end of this lesson, students will (a) discover that the 3×3 magic square with 1–9 is </a:t>
-            </a:r>
-            <a:pPr algn="l" indent="0" marL="0">
-              <a:lnSpc>
-                <a:spcPts val="1680"/>
-              </a:lnSpc>
-              <a:spcBef>
-                <a:spcPts val="300"/>
-              </a:spcBef>
-              <a:spcAft>
-                <a:spcPts val="300"/>
-              </a:spcAft>
-              <a:buNone/>
-            </a:pPr>
-            <a:r>
-              <a:rPr lang="en-US" sz="1200" b="1" dirty="0">
-                <a:solidFill>
-                  <a:srgbClr val="1C2833"/>
-                </a:solidFill>
-                <a:latin typeface="Arial" pitchFamily="34" charset="0"/>
-                <a:ea typeface="Arial" pitchFamily="34" charset="-122"/>
-                <a:cs typeface="Arial" pitchFamily="34" charset="-120"/>
-              </a:rPr>
-              <a:t>unique up to symmetry</a:t>
-            </a:r>
-            <a:pPr algn="l" indent="0" marL="0">
-              <a:lnSpc>
-                <a:spcPts val="1680"/>
-              </a:lnSpc>
-              <a:spcBef>
-                <a:spcPts val="300"/>
-              </a:spcBef>
-              <a:spcAft>
-                <a:spcPts val="300"/>
-              </a:spcAft>
-              <a:buNone/>
-            </a:pPr>
-            <a:r>
-              <a:rPr lang="en-US" sz="1200" dirty="0">
-                <a:solidFill>
-                  <a:srgbClr val="1C2833"/>
-                </a:solidFill>
-                <a:latin typeface="Arial" pitchFamily="34" charset="0"/>
-                <a:ea typeface="Arial" pitchFamily="34" charset="-122"/>
-                <a:cs typeface="Arial" pitchFamily="34" charset="-120"/>
-              </a:rPr>
-              <a:t>, (b) list the 8 symmetries (4 rotations + 4 reflections), and (c) explain why 5 must occupy the centre.</a:t>
-            </a:r>
-            <a:endParaRPr lang="en-US" sz="1200" dirty="0"/>
-          </a:p>
-        </p:txBody>
-      </p:sp>
-      <p:sp>
-        <p:nvSpPr>
-          <p:cNvPr id="7" name="Text 5"/>
-          <p:cNvSpPr/>
-          <p:nvPr/>
-        </p:nvSpPr>
-        <p:spPr>
-          <a:xfrm>
             <a:off x="406301" y="4434929"/>
             <a:ext cx="8498026" cy="213271"/>
           </a:xfrm>
@@ -2521,7 +2913,7 @@
                 <a:ea typeface="Georgia" pitchFamily="34" charset="-122"/>
                 <a:cs typeface="Georgia" pitchFamily="34" charset="-120"/>
               </a:rPr>
-              <a:t>Homework</a:t>
+              <a:t>Core (20 min) (cont.)</a:t>
             </a:r>
             <a:endParaRPr lang="en-US" sz="1800" dirty="0"/>
           </a:p>
@@ -2535,8 +2927,8 @@
         </p:nvSpPr>
         <p:spPr>
           <a:xfrm>
-            <a:off x="406301" y="870942"/>
-            <a:ext cx="8498026" cy="426541"/>
+            <a:off x="634901" y="883593"/>
+            <a:ext cx="8102798" cy="1104602"/>
           </a:xfrm>
           <a:prstGeom prst="rect">
             <a:avLst/>
@@ -2548,13 +2940,31 @@
           <a:bodyPr wrap="square" lIns="0" tIns="0" rIns="0" bIns="0" rtlCol="0" anchor="t"/>
           <a:lstStyle/>
           <a:p>
-            <a:pPr algn="l" indent="0" marL="0">
-              <a:lnSpc>
-                <a:spcPts val="1680"/>
-              </a:lnSpc>
-              <a:spcBef>
-                <a:spcPts val="300"/>
-              </a:spcBef>
+            <a:pPr algn="l" marL="342900" indent="-342900">
+              <a:lnSpc>
+                <a:spcPts val="1620"/>
+              </a:lnSpc>
+              <a:spcAft>
+                <a:spcPts val="300"/>
+              </a:spcAft>
+              <a:buSzPct val="100000"/>
+              <a:buChar char="•"/>
+            </a:pPr>
+            <a:r>
+              <a:rPr lang="en-US" sz="1200" b="1" dirty="0">
+                <a:solidFill>
+                  <a:srgbClr val="1C2833"/>
+                </a:solidFill>
+                <a:latin typeface="Arial" pitchFamily="34" charset="0"/>
+                <a:ea typeface="Arial" pitchFamily="34" charset="-122"/>
+                <a:cs typeface="Arial" pitchFamily="34" charset="-120"/>
+              </a:rPr>
+              <a:t>Why 2, 4, 6, 8 must be at corners.</a:t>
+            </a:r>
+            <a:pPr algn="l" indent="0" marL="0">
+              <a:lnSpc>
+                <a:spcPts val="1620"/>
+              </a:lnSpc>
               <a:spcAft>
                 <a:spcPts val="300"/>
               </a:spcAft>
@@ -2569,7 +2979,47 @@
                 <a:ea typeface="Arial" pitchFamily="34" charset="-122"/>
                 <a:cs typeface="Arial" pitchFamily="34" charset="-120"/>
               </a:rPr>
-              <a:t>– Take the 3×3 magic square and ask: if I change every entry by adding 10 (so the square becomes 12, 17, 16, 19, 15, 11, 14, 13, 18), is it still a magic square? What's the new magic constant? Verify one row.</a:t>
+              <a:t> The four corner cells must contain the four </a:t>
+            </a:r>
+            <a:pPr algn="l" indent="0" marL="0">
+              <a:lnSpc>
+                <a:spcPts val="1620"/>
+              </a:lnSpc>
+              <a:spcAft>
+                <a:spcPts val="300"/>
+              </a:spcAft>
+              <a:buNone/>
+            </a:pPr>
+            <a:r>
+              <a:rPr lang="en-US" sz="1200" i="1" dirty="0">
+                <a:solidFill>
+                  <a:srgbClr val="1C2833"/>
+                </a:solidFill>
+                <a:latin typeface="Arial" pitchFamily="34" charset="0"/>
+                <a:ea typeface="Arial" pitchFamily="34" charset="-122"/>
+                <a:cs typeface="Arial" pitchFamily="34" charset="-120"/>
+              </a:rPr>
+              <a:t>even</a:t>
+            </a:r>
+            <a:pPr algn="l" indent="0" marL="0">
+              <a:lnSpc>
+                <a:spcPts val="1620"/>
+              </a:lnSpc>
+              <a:spcAft>
+                <a:spcPts val="300"/>
+              </a:spcAft>
+              <a:buNone/>
+            </a:pPr>
+            <a:r>
+              <a:rPr lang="en-US" sz="1200" dirty="0">
+                <a:solidFill>
+                  <a:srgbClr val="1C2833"/>
+                </a:solidFill>
+                <a:latin typeface="Arial" pitchFamily="34" charset="0"/>
+                <a:ea typeface="Arial" pitchFamily="34" charset="-122"/>
+                <a:cs typeface="Arial" pitchFamily="34" charset="-120"/>
+              </a:rPr>
+              <a:t> numbers from 1–9 (which are 2, 4, 6, 8). Reason: corners sit on diagonals — and the diagonals also sum to 15. With 5 in the centre, each diagonal pair must sum to 10. Pairs from 1–9 (excluding 5) summing to 10 are (1,9), (2,8), (3,7), (4,6). The two diagonals use four of these — pick any two pairs. The remaining four numbers (the odd or even ones, depending on the pair choice) end up at the edges. Most cleanly: even numbers at corners.</a:t>
             </a:r>
             <a:endParaRPr lang="en-US" sz="1200" dirty="0"/>
           </a:p>
@@ -2727,7 +3177,7 @@
                 <a:ea typeface="Georgia" pitchFamily="34" charset="-122"/>
                 <a:cs typeface="Georgia" pitchFamily="34" charset="-120"/>
               </a:rPr>
-              <a:t>Differentiation</a:t>
+              <a:t>Core (20 min) (cont.)</a:t>
             </a:r>
             <a:endParaRPr lang="en-US" sz="1800" dirty="0"/>
           </a:p>
@@ -2742,7 +3192,7 @@
         <p:spPr>
           <a:xfrm>
             <a:off x="634901" y="883593"/>
-            <a:ext cx="8102798" cy="937022"/>
+            <a:ext cx="8102798" cy="281880"/>
           </a:xfrm>
           <a:prstGeom prst="rect">
             <a:avLst/>
@@ -2773,7 +3223,7 @@
                 <a:ea typeface="Arial" pitchFamily="34" charset="-122"/>
                 <a:cs typeface="Arial" pitchFamily="34" charset="-120"/>
               </a:rPr>
-              <a:t>One tier up:</a:t>
+              <a:t>The 8 symmetries.</a:t>
             </a:r>
             <a:pPr algn="l" indent="0" marL="0">
               <a:lnSpc>
@@ -2793,10 +3243,32 @@
                 <a:ea typeface="Arial" pitchFamily="34" charset="-122"/>
                 <a:cs typeface="Arial" pitchFamily="34" charset="-120"/>
               </a:rPr>
-              <a:t> Try the same question for 4×4 magic squares — how many are there? Look it up (or estimate). The answer is 880 distinct 4×4 squares up to symmetry; that's a surprise.</a:t>
+              <a:t> Demonstrate on the board. Take the Day-1 square and:</a:t>
             </a:r>
             <a:endParaRPr lang="en-US" sz="1200" dirty="0"/>
           </a:p>
+        </p:txBody>
+      </p:sp>
+      <p:sp>
+        <p:nvSpPr>
+          <p:cNvPr id="5" name="Text 3"/>
+          <p:cNvSpPr/>
+          <p:nvPr/>
+        </p:nvSpPr>
+        <p:spPr>
+          <a:xfrm>
+            <a:off x="634901" y="1266974"/>
+            <a:ext cx="8102798" cy="769441"/>
+          </a:xfrm>
+          <a:prstGeom prst="rect">
+            <a:avLst/>
+          </a:prstGeom>
+          <a:noFill/>
+          <a:ln/>
+        </p:spPr>
+        <p:txBody>
+          <a:bodyPr wrap="square" lIns="0" tIns="0" rIns="0" bIns="0" rtlCol="0" anchor="t"/>
+          <a:lstStyle/>
           <a:p>
             <a:pPr algn="l" marL="342900" indent="-342900">
               <a:lnSpc>
@@ -2809,24 +3281,28 @@
               <a:buChar char="•"/>
             </a:pPr>
             <a:r>
-              <a:rPr lang="en-US" sz="1200" b="1" dirty="0">
-                <a:solidFill>
-                  <a:srgbClr val="1C2833"/>
-                </a:solidFill>
-                <a:latin typeface="Arial" pitchFamily="34" charset="0"/>
-                <a:ea typeface="Arial" pitchFamily="34" charset="-122"/>
-                <a:cs typeface="Arial" pitchFamily="34" charset="-120"/>
-              </a:rPr>
-              <a:t>One tier down:</a:t>
-            </a:r>
-            <a:pPr algn="l" indent="0" marL="0">
+              <a:rPr lang="en-US" sz="1200" dirty="0">
+                <a:solidFill>
+                  <a:srgbClr val="1C2833"/>
+                </a:solidFill>
+                <a:latin typeface="Arial" pitchFamily="34" charset="0"/>
+                <a:ea typeface="Arial" pitchFamily="34" charset="-122"/>
+                <a:cs typeface="Arial" pitchFamily="34" charset="-120"/>
+              </a:rPr>
+              <a:t>Rotate 90°, 180°, 270° — three new arrangements.</a:t>
+            </a:r>
+            <a:endParaRPr lang="en-US" sz="1200" dirty="0"/>
+          </a:p>
+          <a:p>
+            <a:pPr algn="l" marL="342900" indent="-342900">
               <a:lnSpc>
                 <a:spcPts val="1620"/>
               </a:lnSpc>
               <a:spcAft>
                 <a:spcPts val="300"/>
               </a:spcAft>
-              <a:buNone/>
+              <a:buSzPct val="100000"/>
+              <a:buChar char="•"/>
             </a:pPr>
             <a:r>
               <a:rPr lang="en-US" sz="1200" dirty="0">
@@ -2837,15 +3313,79 @@
                 <a:ea typeface="Arial" pitchFamily="34" charset="-122"/>
                 <a:cs typeface="Arial" pitchFamily="34" charset="-120"/>
               </a:rPr>
-              <a:t> Just memorise: 5 in the centre, even at corners. Use coloured pencils to highlight the pattern in the Day-1 square.</a:t>
+              <a:t>Reflect horizontally, vertically, and across each diagonal — four more.</a:t>
             </a:r>
             <a:endParaRPr lang="en-US" sz="1200" dirty="0"/>
           </a:p>
-        </p:txBody>
-      </p:sp>
-      <p:sp>
-        <p:nvSpPr>
-          <p:cNvPr id="5" name="Text 3"/>
+          <a:p>
+            <a:pPr algn="l" marL="342900" indent="-342900">
+              <a:lnSpc>
+                <a:spcPts val="1620"/>
+              </a:lnSpc>
+              <a:spcAft>
+                <a:spcPts val="300"/>
+              </a:spcAft>
+              <a:buSzPct val="100000"/>
+              <a:buChar char="•"/>
+            </a:pPr>
+            <a:r>
+              <a:rPr lang="en-US" sz="1200" dirty="0">
+                <a:solidFill>
+                  <a:srgbClr val="1C2833"/>
+                </a:solidFill>
+                <a:latin typeface="Arial" pitchFamily="34" charset="0"/>
+                <a:ea typeface="Arial" pitchFamily="34" charset="-122"/>
+                <a:cs typeface="Arial" pitchFamily="34" charset="-120"/>
+              </a:rPr>
+              <a:t>Total: 8 different-looking arrangements, all the </a:t>
+            </a:r>
+            <a:pPr algn="l" indent="0" marL="0">
+              <a:lnSpc>
+                <a:spcPts val="1620"/>
+              </a:lnSpc>
+              <a:spcAft>
+                <a:spcPts val="300"/>
+              </a:spcAft>
+              <a:buNone/>
+            </a:pPr>
+            <a:r>
+              <a:rPr lang="en-US" sz="1200" i="1" dirty="0">
+                <a:solidFill>
+                  <a:srgbClr val="1C2833"/>
+                </a:solidFill>
+                <a:latin typeface="Arial" pitchFamily="34" charset="0"/>
+                <a:ea typeface="Arial" pitchFamily="34" charset="-122"/>
+                <a:cs typeface="Arial" pitchFamily="34" charset="-120"/>
+              </a:rPr>
+              <a:t>same</a:t>
+            </a:r>
+            <a:pPr algn="l" indent="0" marL="0">
+              <a:lnSpc>
+                <a:spcPts val="1620"/>
+              </a:lnSpc>
+              <a:spcAft>
+                <a:spcPts val="300"/>
+              </a:spcAft>
+              <a:buNone/>
+            </a:pPr>
+            <a:r>
+              <a:rPr lang="en-US" sz="1200" dirty="0">
+                <a:solidFill>
+                  <a:srgbClr val="1C2833"/>
+                </a:solidFill>
+                <a:latin typeface="Arial" pitchFamily="34" charset="0"/>
+                <a:ea typeface="Arial" pitchFamily="34" charset="-122"/>
+                <a:cs typeface="Arial" pitchFamily="34" charset="-120"/>
+              </a:rPr>
+              <a:t> magic square up to symmetry.</a:t>
+            </a:r>
+            <a:endParaRPr lang="en-US" sz="1200" dirty="0"/>
+          </a:p>
+        </p:txBody>
+      </p:sp>
+      <p:sp>
+        <p:nvSpPr>
+          <p:cNvPr id="6" name="Text 4"/>
           <p:cNvSpPr/>
           <p:nvPr/>
         </p:nvSpPr>
@@ -2995,7 +3535,7 @@
                 <a:ea typeface="Georgia" pitchFamily="34" charset="-122"/>
                 <a:cs typeface="Georgia" pitchFamily="34" charset="-120"/>
               </a:rPr>
-              <a:t>Teacher notes</a:t>
+              <a:t>Core (20 min) (cont.)</a:t>
             </a:r>
             <a:endParaRPr lang="en-US" sz="1800" dirty="0"/>
           </a:p>
@@ -3009,8 +3549,61 @@
         </p:nvSpPr>
         <p:spPr>
           <a:xfrm>
-            <a:off x="406301" y="870942"/>
-            <a:ext cx="8498026" cy="1066354"/>
+            <a:off x="406301" y="883593"/>
+            <a:ext cx="8331398" cy="842963"/>
+          </a:xfrm>
+          <a:prstGeom prst="rect">
+            <a:avLst/>
+          </a:prstGeom>
+          <a:solidFill>
+            <a:srgbClr val="F4F8F9"/>
+          </a:solidFill>
+          <a:ln/>
+        </p:spPr>
+        <p:txBody>
+          <a:bodyPr wrap="square" rtlCol="0" anchor="ctr"/>
+          <a:lstStyle/>
+          <a:p>
+            <a:pPr indent="0" marL="0">
+              <a:buNone/>
+            </a:pPr>
+            <a:endParaRPr lang="en-US" dirty="0"/>
+          </a:p>
+        </p:txBody>
+      </p:sp>
+      <p:sp>
+        <p:nvSpPr>
+          <p:cNvPr id="5" name="Shape 3"/>
+          <p:cNvSpPr/>
+          <p:nvPr/>
+        </p:nvSpPr>
+        <p:spPr>
+          <a:xfrm>
+            <a:off x="434876" y="883593"/>
+            <a:ext cx="0" cy="842963"/>
+          </a:xfrm>
+          <a:prstGeom prst="line">
+            <a:avLst/>
+          </a:prstGeom>
+          <a:noFill/>
+          <a:ln w="57150">
+            <a:solidFill>
+              <a:srgbClr val="FE4447"/>
+            </a:solidFill>
+            <a:prstDash val="solid"/>
+          </a:ln>
+        </p:spPr>
+      </p:sp>
+      <p:sp>
+        <p:nvSpPr>
+          <p:cNvPr id="6" name="Text 4"/>
+          <p:cNvSpPr/>
+          <p:nvPr/>
+        </p:nvSpPr>
+        <p:spPr>
+          <a:xfrm>
+            <a:off x="692051" y="1074093"/>
+            <a:ext cx="7973389" cy="461963"/>
           </a:xfrm>
           <a:prstGeom prst="rect">
             <a:avLst/>
@@ -3024,7 +3617,7 @@
           <a:p>
             <a:pPr algn="l" indent="0" marL="0">
               <a:lnSpc>
-                <a:spcPts val="1680"/>
+                <a:spcPts val="1820"/>
               </a:lnSpc>
               <a:spcBef>
                 <a:spcPts val="300"/>
@@ -3035,19 +3628,19 @@
               <a:buNone/>
             </a:pPr>
             <a:r>
-              <a:rPr lang="en-US" sz="1200" dirty="0">
-                <a:solidFill>
-                  <a:srgbClr val="1C2833"/>
-                </a:solidFill>
-                <a:latin typeface="Arial" pitchFamily="34" charset="0"/>
-                <a:ea typeface="Arial" pitchFamily="34" charset="-122"/>
-                <a:cs typeface="Arial" pitchFamily="34" charset="-120"/>
-              </a:rPr>
-              <a:t>– The full proof that 5 must be central is a beautiful counting argument but takes 10 minutes if done thoroughly. Choose: either do it well, or do it briefly with hand-waves. Don't do it half-fast — that confuses more than it clarifies. – The "eight symmetries form a group" idea is the </a:t>
-            </a:r>
-            <a:pPr algn="l" indent="0" marL="0">
-              <a:lnSpc>
-                <a:spcPts val="1680"/>
+              <a:rPr lang="en-US" sz="1300" b="1" i="1" dirty="0">
+                <a:solidFill>
+                  <a:srgbClr val="1C2833"/>
+                </a:solidFill>
+                <a:latin typeface="Georgia" pitchFamily="34" charset="0"/>
+                <a:ea typeface="Georgia" pitchFamily="34" charset="-122"/>
+                <a:cs typeface="Georgia" pitchFamily="34" charset="-120"/>
+              </a:rPr>
+              <a:t>Theorem (state, don't prove):</a:t>
+            </a:r>
+            <a:pPr algn="l" indent="0" marL="0">
+              <a:lnSpc>
+                <a:spcPts val="1820"/>
               </a:lnSpc>
               <a:spcBef>
                 <a:spcPts val="300"/>
@@ -3058,19 +3651,19 @@
               <a:buNone/>
             </a:pPr>
             <a:r>
-              <a:rPr lang="en-US" sz="1200" i="1" dirty="0">
-                <a:solidFill>
-                  <a:srgbClr val="1C2833"/>
-                </a:solidFill>
-                <a:latin typeface="Arial" pitchFamily="34" charset="0"/>
-                <a:ea typeface="Arial" pitchFamily="34" charset="-122"/>
-                <a:cs typeface="Arial" pitchFamily="34" charset="-120"/>
-              </a:rPr>
-              <a:t>dihedral group D₄</a:t>
-            </a:r>
-            <a:pPr algn="l" indent="0" marL="0">
-              <a:lnSpc>
-                <a:spcPts val="1680"/>
+              <a:rPr lang="en-US" sz="1300" dirty="0">
+                <a:solidFill>
+                  <a:srgbClr val="1C2833"/>
+                </a:solidFill>
+                <a:latin typeface="Georgia" pitchFamily="34" charset="0"/>
+                <a:ea typeface="Georgia" pitchFamily="34" charset="-122"/>
+                <a:cs typeface="Georgia" pitchFamily="34" charset="-120"/>
+              </a:rPr>
+              <a:t> There is exactly </a:t>
+            </a:r>
+            <a:pPr algn="l" indent="0" marL="0">
+              <a:lnSpc>
+                <a:spcPts val="1820"/>
               </a:lnSpc>
               <a:spcBef>
                 <a:spcPts val="300"/>
@@ -3081,23 +3674,92 @@
               <a:buNone/>
             </a:pPr>
             <a:r>
-              <a:rPr lang="en-US" sz="1200" dirty="0">
-                <a:solidFill>
-                  <a:srgbClr val="1C2833"/>
-                </a:solidFill>
-                <a:latin typeface="Arial" pitchFamily="34" charset="0"/>
-                <a:ea typeface="Arial" pitchFamily="34" charset="-122"/>
-                <a:cs typeface="Arial" pitchFamily="34" charset="-120"/>
-              </a:rPr>
-              <a:t>. Don't introduce that name at Middle band — note it for yourself; it returns at Senior band. – A few students will produce a "9th" square that turns out to be one of the 8 in disguise. Walk them through which symmetry transforms theirs into the original.</a:t>
-            </a:r>
-            <a:endParaRPr lang="en-US" sz="1200" dirty="0"/>
-          </a:p>
-        </p:txBody>
-      </p:sp>
-      <p:sp>
-        <p:nvSpPr>
-          <p:cNvPr id="5" name="Text 3"/>
+              <a:rPr lang="en-US" sz="1300" b="1" i="1" dirty="0">
+                <a:solidFill>
+                  <a:srgbClr val="1C2833"/>
+                </a:solidFill>
+                <a:latin typeface="Georgia" pitchFamily="34" charset="0"/>
+                <a:ea typeface="Georgia" pitchFamily="34" charset="-122"/>
+                <a:cs typeface="Georgia" pitchFamily="34" charset="-120"/>
+              </a:rPr>
+              <a:t>ONE</a:t>
+            </a:r>
+            <a:pPr algn="l" indent="0" marL="0">
+              <a:lnSpc>
+                <a:spcPts val="1820"/>
+              </a:lnSpc>
+              <a:spcBef>
+                <a:spcPts val="300"/>
+              </a:spcBef>
+              <a:spcAft>
+                <a:spcPts val="300"/>
+              </a:spcAft>
+              <a:buNone/>
+            </a:pPr>
+            <a:r>
+              <a:rPr lang="en-US" sz="1300" dirty="0">
+                <a:solidFill>
+                  <a:srgbClr val="1C2833"/>
+                </a:solidFill>
+                <a:latin typeface="Georgia" pitchFamily="34" charset="0"/>
+                <a:ea typeface="Georgia" pitchFamily="34" charset="-122"/>
+                <a:cs typeface="Georgia" pitchFamily="34" charset="-120"/>
+              </a:rPr>
+              <a:t> 3×3 magic square with 1–9, </a:t>
+            </a:r>
+            <a:pPr algn="l" indent="0" marL="0">
+              <a:lnSpc>
+                <a:spcPts val="1820"/>
+              </a:lnSpc>
+              <a:spcBef>
+                <a:spcPts val="300"/>
+              </a:spcBef>
+              <a:spcAft>
+                <a:spcPts val="300"/>
+              </a:spcAft>
+              <a:buNone/>
+            </a:pPr>
+            <a:r>
+              <a:rPr lang="en-US" sz="1300" i="1" dirty="0">
+                <a:solidFill>
+                  <a:srgbClr val="1C2833"/>
+                </a:solidFill>
+                <a:latin typeface="Georgia" pitchFamily="34" charset="0"/>
+                <a:ea typeface="Georgia" pitchFamily="34" charset="-122"/>
+                <a:cs typeface="Georgia" pitchFamily="34" charset="-120"/>
+              </a:rPr>
+              <a:t>up to symmetry</a:t>
+            </a:r>
+            <a:pPr algn="l" indent="0" marL="0">
+              <a:lnSpc>
+                <a:spcPts val="1820"/>
+              </a:lnSpc>
+              <a:spcBef>
+                <a:spcPts val="300"/>
+              </a:spcBef>
+              <a:spcAft>
+                <a:spcPts val="300"/>
+              </a:spcAft>
+              <a:buNone/>
+            </a:pPr>
+            <a:r>
+              <a:rPr lang="en-US" sz="1300" dirty="0">
+                <a:solidFill>
+                  <a:srgbClr val="1C2833"/>
+                </a:solidFill>
+                <a:latin typeface="Georgia" pitchFamily="34" charset="0"/>
+                <a:ea typeface="Georgia" pitchFamily="34" charset="-122"/>
+                <a:cs typeface="Georgia" pitchFamily="34" charset="-120"/>
+              </a:rPr>
+              <a:t>. Counting all 8 rotated/reflected versions, you get 8 grids that all share the same essential structure.</a:t>
+            </a:r>
+            <a:endParaRPr lang="en-US" sz="1300" dirty="0"/>
+          </a:p>
+        </p:txBody>
+      </p:sp>
+      <p:sp>
+        <p:nvSpPr>
+          <p:cNvPr id="7" name="Text 5"/>
           <p:cNvSpPr/>
           <p:nvPr/>
         </p:nvSpPr>
@@ -3247,7 +3909,7 @@
                 <a:ea typeface="Georgia" pitchFamily="34" charset="-122"/>
                 <a:cs typeface="Georgia" pitchFamily="34" charset="-120"/>
               </a:rPr>
-              <a:t>Citation(s) used in this lesson</a:t>
+              <a:t>Activity (15 min) — Find all 8</a:t>
             </a:r>
             <a:endParaRPr lang="en-US" sz="1800" dirty="0"/>
           </a:p>
@@ -3261,8 +3923,8 @@
         </p:nvSpPr>
         <p:spPr>
           <a:xfrm>
-            <a:off x="406301" y="870942"/>
-            <a:ext cx="8498026" cy="426541"/>
+            <a:off x="634901" y="883593"/>
+            <a:ext cx="8102798" cy="769441"/>
           </a:xfrm>
           <a:prstGeom prst="rect">
             <a:avLst/>
@@ -3274,6 +3936,100 @@
           <a:bodyPr wrap="square" lIns="0" tIns="0" rIns="0" bIns="0" rtlCol="0" anchor="t"/>
           <a:lstStyle/>
           <a:p>
+            <a:pPr algn="l" marL="342900" indent="-342900">
+              <a:lnSpc>
+                <a:spcPts val="1620"/>
+              </a:lnSpc>
+              <a:spcAft>
+                <a:spcPts val="300"/>
+              </a:spcAft>
+              <a:buSzPct val="100000"/>
+              <a:buChar char="•"/>
+            </a:pPr>
+            <a:r>
+              <a:rPr lang="en-US" sz="1200" dirty="0">
+                <a:solidFill>
+                  <a:srgbClr val="1C2833"/>
+                </a:solidFill>
+                <a:latin typeface="Arial" pitchFamily="34" charset="0"/>
+                <a:ea typeface="Arial" pitchFamily="34" charset="-122"/>
+                <a:cs typeface="Arial" pitchFamily="34" charset="-120"/>
+              </a:rPr>
+              <a:t>Each pair starts with the Day-1 square. They must produce all 8 rotated/reflected versions on their own paper.</a:t>
+            </a:r>
+            <a:endParaRPr lang="en-US" sz="1200" dirty="0"/>
+          </a:p>
+          <a:p>
+            <a:pPr algn="l" marL="342900" indent="-342900">
+              <a:lnSpc>
+                <a:spcPts val="1620"/>
+              </a:lnSpc>
+              <a:spcAft>
+                <a:spcPts val="300"/>
+              </a:spcAft>
+              <a:buSzPct val="100000"/>
+              <a:buChar char="•"/>
+            </a:pPr>
+            <a:r>
+              <a:rPr lang="en-US" sz="1200" dirty="0">
+                <a:solidFill>
+                  <a:srgbClr val="1C2833"/>
+                </a:solidFill>
+                <a:latin typeface="Arial" pitchFamily="34" charset="0"/>
+                <a:ea typeface="Arial" pitchFamily="34" charset="-122"/>
+                <a:cs typeface="Arial" pitchFamily="34" charset="-120"/>
+              </a:rPr>
+              <a:t>Verify each by checking one row sums to 15.</a:t>
+            </a:r>
+            <a:endParaRPr lang="en-US" sz="1200" dirty="0"/>
+          </a:p>
+          <a:p>
+            <a:pPr algn="l" marL="342900" indent="-342900">
+              <a:lnSpc>
+                <a:spcPts val="1620"/>
+              </a:lnSpc>
+              <a:spcAft>
+                <a:spcPts val="300"/>
+              </a:spcAft>
+              <a:buSzPct val="100000"/>
+              <a:buChar char="•"/>
+            </a:pPr>
+            <a:r>
+              <a:rPr lang="en-US" sz="1200" dirty="0">
+                <a:solidFill>
+                  <a:srgbClr val="1C2833"/>
+                </a:solidFill>
+                <a:latin typeface="Arial" pitchFamily="34" charset="0"/>
+                <a:ea typeface="Arial" pitchFamily="34" charset="-122"/>
+                <a:cs typeface="Arial" pitchFamily="34" charset="-120"/>
+              </a:rPr>
+              <a:t>Pair share: any two pairs swap, and compare — did they get the same 8?</a:t>
+            </a:r>
+            <a:endParaRPr lang="en-US" sz="1200" dirty="0"/>
+          </a:p>
+        </p:txBody>
+      </p:sp>
+      <p:sp>
+        <p:nvSpPr>
+          <p:cNvPr id="5" name="Text 3"/>
+          <p:cNvSpPr/>
+          <p:nvPr/>
+        </p:nvSpPr>
+        <p:spPr>
+          <a:xfrm>
+            <a:off x="406301" y="4434929"/>
+            <a:ext cx="8498026" cy="213271"/>
+          </a:xfrm>
+          <a:prstGeom prst="rect">
+            <a:avLst/>
+          </a:prstGeom>
+          <a:noFill/>
+          <a:ln/>
+        </p:spPr>
+        <p:txBody>
+          <a:bodyPr wrap="square" lIns="0" tIns="0" rIns="0" bIns="0" rtlCol="0" anchor="t"/>
+          <a:lstStyle/>
+          <a:p>
             <a:pPr algn="l" indent="0" marL="0">
               <a:lnSpc>
                 <a:spcPts val="1680"/>
@@ -3295,8 +4051,253 @@
                 <a:ea typeface="Arial" pitchFamily="34" charset="-122"/>
                 <a:cs typeface="Arial" pitchFamily="34" charset="-120"/>
               </a:rPr>
-              <a:t>– Nārāyaṇa Paṇḍita, </a:t>
-            </a:r>
+              <a:t>Middle ·  · IKS Curriculum</a:t>
+            </a:r>
+            <a:endParaRPr lang="en-US" sz="1200" dirty="0"/>
+          </a:p>
+        </p:txBody>
+      </p:sp>
+    </p:spTree>
+  </p:cSld>
+  <p:clrMapOvr>
+    <a:masterClrMapping/>
+  </p:clrMapOvr>
+</p:sld>
+</file>
+
+<file path=ppt/slides/slide14.xml><?xml version="1.0" encoding="utf-8"?>
+<p:sld xmlns:a="http://schemas.openxmlformats.org/drawingml/2006/main" xmlns:r="http://schemas.openxmlformats.org/officeDocument/2006/relationships" xmlns:p="http://schemas.openxmlformats.org/presentationml/2006/main">
+  <p:cSld name="Slide 14">
+    <p:bg>
+      <p:bgPr>
+        <a:solidFill>
+          <a:srgbClr val="FFFFFF"/>
+        </a:solidFill>
+      </p:bgPr>
+    </p:bg>
+    <p:spTree>
+      <p:nvGrpSpPr>
+        <p:cNvPr id="1" name=""/>
+        <p:cNvGrpSpPr/>
+        <p:nvPr/>
+      </p:nvGrpSpPr>
+      <p:grpSpPr>
+        <a:xfrm>
+          <a:off x="0" y="0"/>
+          <a:ext cx="0" cy="0"/>
+          <a:chOff x="0" y="0"/>
+          <a:chExt cx="0" cy="0"/>
+        </a:xfrm>
+      </p:grpSpPr>
+      <p:sp>
+        <p:nvSpPr>
+          <p:cNvPr id="2" name="Text 0"/>
+          <p:cNvSpPr/>
+          <p:nvPr/>
+        </p:nvSpPr>
+        <p:spPr>
+          <a:xfrm>
+            <a:off x="0" y="0"/>
+            <a:ext cx="9144000" cy="101501"/>
+          </a:xfrm>
+          <a:prstGeom prst="rect">
+            <a:avLst/>
+          </a:prstGeom>
+          <a:solidFill>
+            <a:srgbClr val="277884"/>
+          </a:solidFill>
+          <a:ln/>
+        </p:spPr>
+        <p:txBody>
+          <a:bodyPr wrap="square" rtlCol="0" anchor="ctr"/>
+          <a:lstStyle/>
+          <a:p>
+            <a:pPr indent="0" marL="0">
+              <a:buNone/>
+            </a:pPr>
+            <a:endParaRPr lang="en-US" dirty="0"/>
+          </a:p>
+        </p:txBody>
+      </p:sp>
+      <p:sp>
+        <p:nvSpPr>
+          <p:cNvPr id="3" name="Text 1"/>
+          <p:cNvSpPr/>
+          <p:nvPr/>
+        </p:nvSpPr>
+        <p:spPr>
+          <a:xfrm>
+            <a:off x="406301" y="457051"/>
+            <a:ext cx="8498026" cy="274290"/>
+          </a:xfrm>
+          <a:prstGeom prst="rect">
+            <a:avLst/>
+          </a:prstGeom>
+          <a:noFill/>
+          <a:ln/>
+        </p:spPr>
+        <p:txBody>
+          <a:bodyPr wrap="square" lIns="0" tIns="0" rIns="0" bIns="0" rtlCol="0" anchor="t"/>
+          <a:lstStyle/>
+          <a:p>
+            <a:pPr algn="l" indent="0" marL="0">
+              <a:lnSpc>
+                <a:spcPts val="2160"/>
+              </a:lnSpc>
+              <a:spcBef>
+                <a:spcPts val="600"/>
+              </a:spcBef>
+              <a:spcAft>
+                <a:spcPts val="800"/>
+              </a:spcAft>
+              <a:buNone/>
+            </a:pPr>
+            <a:r>
+              <a:rPr lang="en-US" sz="1800" b="1" dirty="0">
+                <a:solidFill>
+                  <a:srgbClr val="FE4447"/>
+                </a:solidFill>
+                <a:latin typeface="Georgia" pitchFamily="34" charset="0"/>
+                <a:ea typeface="Georgia" pitchFamily="34" charset="-122"/>
+                <a:cs typeface="Georgia" pitchFamily="34" charset="-120"/>
+              </a:rPr>
+              <a:t>Wrap-up (5 min)</a:t>
+            </a:r>
+            <a:endParaRPr lang="en-US" sz="1800" dirty="0"/>
+          </a:p>
+        </p:txBody>
+      </p:sp>
+      <p:sp>
+        <p:nvSpPr>
+          <p:cNvPr id="4" name="Text 2"/>
+          <p:cNvSpPr/>
+          <p:nvPr/>
+        </p:nvSpPr>
+        <p:spPr>
+          <a:xfrm>
+            <a:off x="634901" y="883593"/>
+            <a:ext cx="8102798" cy="731341"/>
+          </a:xfrm>
+          <a:prstGeom prst="rect">
+            <a:avLst/>
+          </a:prstGeom>
+          <a:noFill/>
+          <a:ln/>
+        </p:spPr>
+        <p:txBody>
+          <a:bodyPr wrap="square" lIns="0" tIns="0" rIns="0" bIns="0" rtlCol="0" anchor="t"/>
+          <a:lstStyle/>
+          <a:p>
+            <a:pPr algn="l" marL="342900" indent="-342900">
+              <a:lnSpc>
+                <a:spcPts val="1620"/>
+              </a:lnSpc>
+              <a:spcAft>
+                <a:spcPts val="300"/>
+              </a:spcAft>
+              <a:buSzPct val="100000"/>
+              <a:buChar char="•"/>
+            </a:pPr>
+            <a:r>
+              <a:rPr lang="en-US" sz="1200" i="1" dirty="0">
+                <a:solidFill>
+                  <a:srgbClr val="1C2833"/>
+                </a:solidFill>
+                <a:latin typeface="Arial" pitchFamily="34" charset="0"/>
+                <a:ea typeface="Arial" pitchFamily="34" charset="-122"/>
+                <a:cs typeface="Arial" pitchFamily="34" charset="-120"/>
+              </a:rPr>
+              <a:t>"There is essentially ONE 3×3 magic square with 1–9. Eight different orientations of the same square. Tomorrow we ask: is there a</a:t>
+            </a:r>
+            <a:pPr algn="l" indent="0" marL="0">
+              <a:lnSpc>
+                <a:spcPts val="1620"/>
+              </a:lnSpc>
+              <a:spcAft>
+                <a:spcPts val="300"/>
+              </a:spcAft>
+              <a:buNone/>
+            </a:pPr>
+            <a:r>
+              <a:rPr lang="en-US" sz="1200" dirty="0">
+                <a:solidFill>
+                  <a:srgbClr val="1C2833"/>
+                </a:solidFill>
+                <a:latin typeface="Arial" pitchFamily="34" charset="0"/>
+                <a:ea typeface="Arial" pitchFamily="34" charset="-122"/>
+                <a:cs typeface="Arial" pitchFamily="34" charset="-120"/>
+              </a:rPr>
+              <a:t>method</a:t>
+            </a:r>
+            <a:pPr algn="l" indent="0" marL="0">
+              <a:lnSpc>
+                <a:spcPts val="1620"/>
+              </a:lnSpc>
+              <a:spcAft>
+                <a:spcPts val="300"/>
+              </a:spcAft>
+              <a:buNone/>
+            </a:pPr>
+            <a:r>
+              <a:rPr lang="en-US" sz="1200" i="1" dirty="0">
+                <a:solidFill>
+                  <a:srgbClr val="1C2833"/>
+                </a:solidFill>
+                <a:latin typeface="Arial" pitchFamily="34" charset="0"/>
+                <a:ea typeface="Arial" pitchFamily="34" charset="-122"/>
+                <a:cs typeface="Arial" pitchFamily="34" charset="-120"/>
+              </a:rPr>
+              <a:t> to construct magic squares of any size — not just 3×3?"</a:t>
+            </a:r>
+            <a:endParaRPr lang="en-US" sz="1200" dirty="0"/>
+          </a:p>
+          <a:p>
+            <a:pPr algn="l" marL="342900" indent="-342900">
+              <a:lnSpc>
+                <a:spcPts val="1620"/>
+              </a:lnSpc>
+              <a:spcAft>
+                <a:spcPts val="300"/>
+              </a:spcAft>
+              <a:buSzPct val="100000"/>
+              <a:buChar char="•"/>
+            </a:pPr>
+            <a:r>
+              <a:rPr lang="en-US" sz="1200" dirty="0">
+                <a:solidFill>
+                  <a:srgbClr val="1C2833"/>
+                </a:solidFill>
+                <a:latin typeface="Arial" pitchFamily="34" charset="0"/>
+                <a:ea typeface="Arial" pitchFamily="34" charset="-122"/>
+                <a:cs typeface="Arial" pitchFamily="34" charset="-120"/>
+              </a:rPr>
+              <a:t>Preview Day 4: Nārāyaṇa's stair-step method.</a:t>
+            </a:r>
+            <a:endParaRPr lang="en-US" sz="1200" dirty="0"/>
+          </a:p>
+        </p:txBody>
+      </p:sp>
+      <p:sp>
+        <p:nvSpPr>
+          <p:cNvPr id="5" name="Text 3"/>
+          <p:cNvSpPr/>
+          <p:nvPr/>
+        </p:nvSpPr>
+        <p:spPr>
+          <a:xfrm>
+            <a:off x="406301" y="4434929"/>
+            <a:ext cx="8498026" cy="213271"/>
+          </a:xfrm>
+          <a:prstGeom prst="rect">
+            <a:avLst/>
+          </a:prstGeom>
+          <a:noFill/>
+          <a:ln/>
+        </p:spPr>
+        <p:txBody>
+          <a:bodyPr wrap="square" lIns="0" tIns="0" rIns="0" bIns="0" rtlCol="0" anchor="t"/>
+          <a:lstStyle/>
+          <a:p>
             <a:pPr algn="l" indent="0" marL="0">
               <a:lnSpc>
                 <a:spcPts val="1680"/>
@@ -3310,6 +4311,1317 @@
               <a:buNone/>
             </a:pPr>
             <a:r>
+              <a:rPr lang="en-US" sz="1200" dirty="0">
+                <a:solidFill>
+                  <a:srgbClr val="1C2833"/>
+                </a:solidFill>
+                <a:latin typeface="Arial" pitchFamily="34" charset="0"/>
+                <a:ea typeface="Arial" pitchFamily="34" charset="-122"/>
+                <a:cs typeface="Arial" pitchFamily="34" charset="-120"/>
+              </a:rPr>
+              <a:t>Middle ·  · IKS Curriculum</a:t>
+            </a:r>
+            <a:endParaRPr lang="en-US" sz="1200" dirty="0"/>
+          </a:p>
+        </p:txBody>
+      </p:sp>
+    </p:spTree>
+  </p:cSld>
+  <p:clrMapOvr>
+    <a:masterClrMapping/>
+  </p:clrMapOvr>
+</p:sld>
+</file>
+
+<file path=ppt/slides/slide15.xml><?xml version="1.0" encoding="utf-8"?>
+<p:sld xmlns:a="http://schemas.openxmlformats.org/drawingml/2006/main" xmlns:r="http://schemas.openxmlformats.org/officeDocument/2006/relationships" xmlns:p="http://schemas.openxmlformats.org/presentationml/2006/main">
+  <p:cSld name="Slide 15">
+    <p:bg>
+      <p:bgPr>
+        <a:solidFill>
+          <a:srgbClr val="FFFFFF"/>
+        </a:solidFill>
+      </p:bgPr>
+    </p:bg>
+    <p:spTree>
+      <p:nvGrpSpPr>
+        <p:cNvPr id="1" name=""/>
+        <p:cNvGrpSpPr/>
+        <p:nvPr/>
+      </p:nvGrpSpPr>
+      <p:grpSpPr>
+        <a:xfrm>
+          <a:off x="0" y="0"/>
+          <a:ext cx="0" cy="0"/>
+          <a:chOff x="0" y="0"/>
+          <a:chExt cx="0" cy="0"/>
+        </a:xfrm>
+      </p:grpSpPr>
+      <p:sp>
+        <p:nvSpPr>
+          <p:cNvPr id="2" name="Text 0"/>
+          <p:cNvSpPr/>
+          <p:nvPr/>
+        </p:nvSpPr>
+        <p:spPr>
+          <a:xfrm>
+            <a:off x="0" y="0"/>
+            <a:ext cx="9144000" cy="101501"/>
+          </a:xfrm>
+          <a:prstGeom prst="rect">
+            <a:avLst/>
+          </a:prstGeom>
+          <a:solidFill>
+            <a:srgbClr val="277884"/>
+          </a:solidFill>
+          <a:ln/>
+        </p:spPr>
+        <p:txBody>
+          <a:bodyPr wrap="square" rtlCol="0" anchor="ctr"/>
+          <a:lstStyle/>
+          <a:p>
+            <a:pPr indent="0" marL="0">
+              <a:buNone/>
+            </a:pPr>
+            <a:endParaRPr lang="en-US" dirty="0"/>
+          </a:p>
+        </p:txBody>
+      </p:sp>
+      <p:sp>
+        <p:nvSpPr>
+          <p:cNvPr id="3" name="Text 1"/>
+          <p:cNvSpPr/>
+          <p:nvPr/>
+        </p:nvSpPr>
+        <p:spPr>
+          <a:xfrm>
+            <a:off x="406301" y="457051"/>
+            <a:ext cx="8498026" cy="274290"/>
+          </a:xfrm>
+          <a:prstGeom prst="rect">
+            <a:avLst/>
+          </a:prstGeom>
+          <a:noFill/>
+          <a:ln/>
+        </p:spPr>
+        <p:txBody>
+          <a:bodyPr wrap="square" lIns="0" tIns="0" rIns="0" bIns="0" rtlCol="0" anchor="t"/>
+          <a:lstStyle/>
+          <a:p>
+            <a:pPr algn="l" indent="0" marL="0">
+              <a:lnSpc>
+                <a:spcPts val="2160"/>
+              </a:lnSpc>
+              <a:spcBef>
+                <a:spcPts val="600"/>
+              </a:spcBef>
+              <a:spcAft>
+                <a:spcPts val="800"/>
+              </a:spcAft>
+              <a:buNone/>
+            </a:pPr>
+            <a:r>
+              <a:rPr lang="en-US" sz="1800" b="1" dirty="0">
+                <a:solidFill>
+                  <a:srgbClr val="FE4447"/>
+                </a:solidFill>
+                <a:latin typeface="Georgia" pitchFamily="34" charset="0"/>
+                <a:ea typeface="Georgia" pitchFamily="34" charset="-122"/>
+                <a:cs typeface="Georgia" pitchFamily="34" charset="-120"/>
+              </a:rPr>
+              <a:t>Student-facing content</a:t>
+            </a:r>
+            <a:endParaRPr lang="en-US" sz="1800" dirty="0"/>
+          </a:p>
+        </p:txBody>
+      </p:sp>
+      <p:sp>
+        <p:nvSpPr>
+          <p:cNvPr id="4" name="Text 2"/>
+          <p:cNvSpPr/>
+          <p:nvPr/>
+        </p:nvSpPr>
+        <p:spPr>
+          <a:xfrm>
+            <a:off x="406301" y="883593"/>
+            <a:ext cx="8331398" cy="2726531"/>
+          </a:xfrm>
+          <a:prstGeom prst="rect">
+            <a:avLst/>
+          </a:prstGeom>
+          <a:solidFill>
+            <a:srgbClr val="F4F8F9"/>
+          </a:solidFill>
+          <a:ln/>
+        </p:spPr>
+        <p:txBody>
+          <a:bodyPr wrap="square" rtlCol="0" anchor="ctr"/>
+          <a:lstStyle/>
+          <a:p>
+            <a:pPr indent="0" marL="0">
+              <a:buNone/>
+            </a:pPr>
+            <a:endParaRPr lang="en-US" dirty="0"/>
+          </a:p>
+        </p:txBody>
+      </p:sp>
+      <p:sp>
+        <p:nvSpPr>
+          <p:cNvPr id="5" name="Shape 3"/>
+          <p:cNvSpPr/>
+          <p:nvPr/>
+        </p:nvSpPr>
+        <p:spPr>
+          <a:xfrm>
+            <a:off x="434876" y="883593"/>
+            <a:ext cx="0" cy="2726531"/>
+          </a:xfrm>
+          <a:prstGeom prst="line">
+            <a:avLst/>
+          </a:prstGeom>
+          <a:noFill/>
+          <a:ln w="57150">
+            <a:solidFill>
+              <a:srgbClr val="FE4447"/>
+            </a:solidFill>
+            <a:prstDash val="solid"/>
+          </a:ln>
+        </p:spPr>
+      </p:sp>
+      <p:sp>
+        <p:nvSpPr>
+          <p:cNvPr id="6" name="Text 4"/>
+          <p:cNvSpPr/>
+          <p:nvPr/>
+        </p:nvSpPr>
+        <p:spPr>
+          <a:xfrm>
+            <a:off x="692051" y="1074093"/>
+            <a:ext cx="7973389" cy="230981"/>
+          </a:xfrm>
+          <a:prstGeom prst="rect">
+            <a:avLst/>
+          </a:prstGeom>
+          <a:noFill/>
+          <a:ln/>
+        </p:spPr>
+        <p:txBody>
+          <a:bodyPr wrap="square" lIns="0" tIns="0" rIns="0" bIns="0" rtlCol="0" anchor="t"/>
+          <a:lstStyle/>
+          <a:p>
+            <a:pPr algn="l" indent="0" marL="0">
+              <a:lnSpc>
+                <a:spcPts val="1820"/>
+              </a:lnSpc>
+              <a:spcBef>
+                <a:spcPts val="300"/>
+              </a:spcBef>
+              <a:spcAft>
+                <a:spcPts val="300"/>
+              </a:spcAft>
+              <a:buNone/>
+            </a:pPr>
+            <a:r>
+              <a:rPr lang="en-US" sz="1300" b="1" i="1" dirty="0">
+                <a:solidFill>
+                  <a:srgbClr val="1C2833"/>
+                </a:solidFill>
+                <a:latin typeface="Georgia" pitchFamily="34" charset="0"/>
+                <a:ea typeface="Georgia" pitchFamily="34" charset="-122"/>
+                <a:cs typeface="Georgia" pitchFamily="34" charset="-120"/>
+              </a:rPr>
+              <a:t>There is only ONE 3×3 magic square with 1–9</a:t>
+            </a:r>
+            <a:pPr algn="l" indent="0" marL="0">
+              <a:lnSpc>
+                <a:spcPts val="1820"/>
+              </a:lnSpc>
+              <a:spcBef>
+                <a:spcPts val="300"/>
+              </a:spcBef>
+              <a:spcAft>
+                <a:spcPts val="300"/>
+              </a:spcAft>
+              <a:buNone/>
+            </a:pPr>
+            <a:r>
+              <a:rPr lang="en-US" sz="1300" dirty="0">
+                <a:solidFill>
+                  <a:srgbClr val="1C2833"/>
+                </a:solidFill>
+                <a:latin typeface="Georgia" pitchFamily="34" charset="0"/>
+                <a:ea typeface="Georgia" pitchFamily="34" charset="-122"/>
+                <a:cs typeface="Georgia" pitchFamily="34" charset="-120"/>
+              </a:rPr>
+              <a:t> — up to symmetry.</a:t>
+            </a:r>
+            <a:endParaRPr lang="en-US" sz="1300" dirty="0"/>
+          </a:p>
+        </p:txBody>
+      </p:sp>
+      <p:sp>
+        <p:nvSpPr>
+          <p:cNvPr id="7" name="Text 5"/>
+          <p:cNvSpPr/>
+          <p:nvPr/>
+        </p:nvSpPr>
+        <p:spPr>
+          <a:xfrm>
+            <a:off x="692051" y="1343174"/>
+            <a:ext cx="7973389" cy="461963"/>
+          </a:xfrm>
+          <a:prstGeom prst="rect">
+            <a:avLst/>
+          </a:prstGeom>
+          <a:noFill/>
+          <a:ln/>
+        </p:spPr>
+        <p:txBody>
+          <a:bodyPr wrap="square" lIns="0" tIns="0" rIns="0" bIns="0" rtlCol="0" anchor="t"/>
+          <a:lstStyle/>
+          <a:p>
+            <a:pPr algn="l" indent="0" marL="0">
+              <a:lnSpc>
+                <a:spcPts val="1820"/>
+              </a:lnSpc>
+              <a:spcBef>
+                <a:spcPts val="300"/>
+              </a:spcBef>
+              <a:spcAft>
+                <a:spcPts val="300"/>
+              </a:spcAft>
+              <a:buNone/>
+            </a:pPr>
+            <a:r>
+              <a:rPr lang="en-US" sz="1300" i="1" dirty="0">
+                <a:solidFill>
+                  <a:srgbClr val="1C2833"/>
+                </a:solidFill>
+                <a:latin typeface="Georgia" pitchFamily="34" charset="0"/>
+                <a:ea typeface="Georgia" pitchFamily="34" charset="-122"/>
+                <a:cs typeface="Georgia" pitchFamily="34" charset="-120"/>
+              </a:rPr>
+              <a:t>The 4 rotations and 4 reflections together produce 8 grid arrangements. They all share the same structure:</a:t>
+            </a:r>
+            <a:endParaRPr lang="en-US" sz="1300" dirty="0"/>
+          </a:p>
+        </p:txBody>
+      </p:sp>
+      <p:sp>
+        <p:nvSpPr>
+          <p:cNvPr id="8" name="Text 6"/>
+          <p:cNvSpPr/>
+          <p:nvPr/>
+        </p:nvSpPr>
+        <p:spPr>
+          <a:xfrm>
+            <a:off x="692051" y="1843236"/>
+            <a:ext cx="7973389" cy="230981"/>
+          </a:xfrm>
+          <a:prstGeom prst="rect">
+            <a:avLst/>
+          </a:prstGeom>
+          <a:noFill/>
+          <a:ln/>
+        </p:spPr>
+        <p:txBody>
+          <a:bodyPr wrap="square" lIns="0" tIns="0" rIns="0" bIns="0" rtlCol="0" anchor="t"/>
+          <a:lstStyle/>
+          <a:p>
+            <a:pPr algn="l" indent="0" marL="0">
+              <a:lnSpc>
+                <a:spcPts val="1820"/>
+              </a:lnSpc>
+              <a:spcBef>
+                <a:spcPts val="300"/>
+              </a:spcBef>
+              <a:spcAft>
+                <a:spcPts val="300"/>
+              </a:spcAft>
+              <a:buNone/>
+            </a:pPr>
+            <a:r>
+              <a:rPr lang="en-US" sz="1300" b="1" i="1" dirty="0">
+                <a:solidFill>
+                  <a:srgbClr val="1C2833"/>
+                </a:solidFill>
+                <a:latin typeface="Georgia" pitchFamily="34" charset="0"/>
+                <a:ea typeface="Georgia" pitchFamily="34" charset="-122"/>
+                <a:cs typeface="Georgia" pitchFamily="34" charset="-120"/>
+              </a:rPr>
+              <a:t>5</a:t>
+            </a:r>
+            <a:pPr algn="l" indent="0" marL="0">
+              <a:lnSpc>
+                <a:spcPts val="1820"/>
+              </a:lnSpc>
+              <a:spcBef>
+                <a:spcPts val="300"/>
+              </a:spcBef>
+              <a:spcAft>
+                <a:spcPts val="300"/>
+              </a:spcAft>
+              <a:buNone/>
+            </a:pPr>
+            <a:r>
+              <a:rPr lang="en-US" sz="1300" dirty="0">
+                <a:solidFill>
+                  <a:srgbClr val="1C2833"/>
+                </a:solidFill>
+                <a:latin typeface="Georgia" pitchFamily="34" charset="0"/>
+                <a:ea typeface="Georgia" pitchFamily="34" charset="-122"/>
+                <a:cs typeface="Georgia" pitchFamily="34" charset="-120"/>
+              </a:rPr>
+              <a:t> is in the centre.</a:t>
+            </a:r>
+            <a:endParaRPr lang="en-US" sz="1300" dirty="0"/>
+          </a:p>
+        </p:txBody>
+      </p:sp>
+      <p:sp>
+        <p:nvSpPr>
+          <p:cNvPr id="9" name="Text 7"/>
+          <p:cNvSpPr/>
+          <p:nvPr/>
+        </p:nvSpPr>
+        <p:spPr>
+          <a:xfrm>
+            <a:off x="692051" y="2112318"/>
+            <a:ext cx="7973389" cy="230981"/>
+          </a:xfrm>
+          <a:prstGeom prst="rect">
+            <a:avLst/>
+          </a:prstGeom>
+          <a:noFill/>
+          <a:ln/>
+        </p:spPr>
+        <p:txBody>
+          <a:bodyPr wrap="square" lIns="0" tIns="0" rIns="0" bIns="0" rtlCol="0" anchor="t"/>
+          <a:lstStyle/>
+          <a:p>
+            <a:pPr algn="l" indent="0" marL="0">
+              <a:lnSpc>
+                <a:spcPts val="1820"/>
+              </a:lnSpc>
+              <a:spcBef>
+                <a:spcPts val="300"/>
+              </a:spcBef>
+              <a:spcAft>
+                <a:spcPts val="300"/>
+              </a:spcAft>
+              <a:buNone/>
+            </a:pPr>
+            <a:r>
+              <a:rPr lang="en-US" sz="1300" i="1" dirty="0">
+                <a:solidFill>
+                  <a:srgbClr val="1C2833"/>
+                </a:solidFill>
+                <a:latin typeface="Georgia" pitchFamily="34" charset="0"/>
+                <a:ea typeface="Georgia" pitchFamily="34" charset="-122"/>
+                <a:cs typeface="Georgia" pitchFamily="34" charset="-120"/>
+              </a:rPr>
+              <a:t>The four even numbers (2, 4, 6, 8) are at the four corners.</a:t>
+            </a:r>
+            <a:endParaRPr lang="en-US" sz="1300" dirty="0"/>
+          </a:p>
+        </p:txBody>
+      </p:sp>
+      <p:sp>
+        <p:nvSpPr>
+          <p:cNvPr id="10" name="Text 8"/>
+          <p:cNvSpPr/>
+          <p:nvPr/>
+        </p:nvSpPr>
+        <p:spPr>
+          <a:xfrm>
+            <a:off x="692051" y="2381399"/>
+            <a:ext cx="7973389" cy="230981"/>
+          </a:xfrm>
+          <a:prstGeom prst="rect">
+            <a:avLst/>
+          </a:prstGeom>
+          <a:noFill/>
+          <a:ln/>
+        </p:spPr>
+        <p:txBody>
+          <a:bodyPr wrap="square" lIns="0" tIns="0" rIns="0" bIns="0" rtlCol="0" anchor="t"/>
+          <a:lstStyle/>
+          <a:p>
+            <a:pPr algn="l" indent="0" marL="0">
+              <a:lnSpc>
+                <a:spcPts val="1820"/>
+              </a:lnSpc>
+              <a:spcBef>
+                <a:spcPts val="300"/>
+              </a:spcBef>
+              <a:spcAft>
+                <a:spcPts val="300"/>
+              </a:spcAft>
+              <a:buNone/>
+            </a:pPr>
+            <a:r>
+              <a:rPr lang="en-US" sz="1300" i="1" dirty="0">
+                <a:solidFill>
+                  <a:srgbClr val="1C2833"/>
+                </a:solidFill>
+                <a:latin typeface="Georgia" pitchFamily="34" charset="0"/>
+                <a:ea typeface="Georgia" pitchFamily="34" charset="-122"/>
+                <a:cs typeface="Georgia" pitchFamily="34" charset="-120"/>
+              </a:rPr>
+              <a:t>The four odd numbers other than 5 (1, 3, 7, 9) are at the four edge-middles.</a:t>
+            </a:r>
+            <a:endParaRPr lang="en-US" sz="1300" dirty="0"/>
+          </a:p>
+        </p:txBody>
+      </p:sp>
+      <p:sp>
+        <p:nvSpPr>
+          <p:cNvPr id="11" name="Text 9"/>
+          <p:cNvSpPr/>
+          <p:nvPr/>
+        </p:nvSpPr>
+        <p:spPr>
+          <a:xfrm>
+            <a:off x="692051" y="2650480"/>
+            <a:ext cx="7973389" cy="500063"/>
+          </a:xfrm>
+          <a:prstGeom prst="rect">
+            <a:avLst/>
+          </a:prstGeom>
+          <a:noFill/>
+          <a:ln/>
+        </p:spPr>
+        <p:txBody>
+          <a:bodyPr wrap="square" lIns="0" tIns="0" rIns="0" bIns="0" rtlCol="0" anchor="t"/>
+          <a:lstStyle/>
+          <a:p>
+            <a:pPr algn="l" indent="0" marL="0">
+              <a:lnSpc>
+                <a:spcPts val="1820"/>
+              </a:lnSpc>
+              <a:spcBef>
+                <a:spcPts val="300"/>
+              </a:spcBef>
+              <a:spcAft>
+                <a:spcPts val="300"/>
+              </a:spcAft>
+              <a:buNone/>
+            </a:pPr>
+            <a:r>
+              <a:rPr lang="en-US" sz="1300" dirty="0">
+                <a:solidFill>
+                  <a:srgbClr val="1C2833"/>
+                </a:solidFill>
+                <a:latin typeface="Georgia" pitchFamily="34" charset="0"/>
+                <a:ea typeface="Georgia" pitchFamily="34" charset="-122"/>
+                <a:cs typeface="Georgia" pitchFamily="34" charset="-120"/>
+              </a:rPr>
+              <a:t>``</a:t>
+            </a:r>
+            <a:pPr algn="l" indent="0" marL="0">
+              <a:lnSpc>
+                <a:spcPts val="1820"/>
+              </a:lnSpc>
+              <a:spcBef>
+                <a:spcPts val="300"/>
+              </a:spcBef>
+              <a:spcAft>
+                <a:spcPts val="300"/>
+              </a:spcAft>
+              <a:buNone/>
+            </a:pPr>
+            <a:r>
+              <a:rPr lang="en-US" sz="1300" i="1" dirty="0">
+                <a:solidFill>
+                  <a:srgbClr val="1C2833"/>
+                </a:solidFill>
+                <a:latin typeface="Georgia" pitchFamily="34" charset="0"/>
+                <a:ea typeface="Georgia" pitchFamily="34" charset="-122"/>
+                <a:cs typeface="Georgia" pitchFamily="34" charset="-120"/>
+              </a:rPr>
+              <a:t> 2 | 7 | 6 6 | 7 | 2 --------- --------- 9 | 5 | 1 1 | 5 | 9 ← reflection (horizontal flip) --------- --------- 4 | 3 | 8 8 | 3 | 4</a:t>
+            </a:r>
+            <a:pPr algn="l" indent="0" marL="0">
+              <a:lnSpc>
+                <a:spcPts val="1820"/>
+              </a:lnSpc>
+              <a:spcBef>
+                <a:spcPts val="300"/>
+              </a:spcBef>
+              <a:spcAft>
+                <a:spcPts val="300"/>
+              </a:spcAft>
+              <a:buNone/>
+            </a:pPr>
+            <a:r>
+              <a:rPr lang="en-US" sz="1300" dirty="0">
+                <a:solidFill>
+                  <a:srgbClr val="1C2833"/>
+                </a:solidFill>
+                <a:latin typeface="Georgia" pitchFamily="34" charset="0"/>
+                <a:ea typeface="Georgia" pitchFamily="34" charset="-122"/>
+                <a:cs typeface="Georgia" pitchFamily="34" charset="-120"/>
+              </a:rPr>
+              <a:t>``</a:t>
+            </a:r>
+            <a:endParaRPr lang="en-US" sz="1300" dirty="0"/>
+          </a:p>
+        </p:txBody>
+      </p:sp>
+      <p:sp>
+        <p:nvSpPr>
+          <p:cNvPr id="12" name="Text 10"/>
+          <p:cNvSpPr/>
+          <p:nvPr/>
+        </p:nvSpPr>
+        <p:spPr>
+          <a:xfrm>
+            <a:off x="692051" y="3188643"/>
+            <a:ext cx="7973389" cy="230981"/>
+          </a:xfrm>
+          <a:prstGeom prst="rect">
+            <a:avLst/>
+          </a:prstGeom>
+          <a:noFill/>
+          <a:ln/>
+        </p:spPr>
+        <p:txBody>
+          <a:bodyPr wrap="square" lIns="0" tIns="0" rIns="0" bIns="0" rtlCol="0" anchor="t"/>
+          <a:lstStyle/>
+          <a:p>
+            <a:pPr algn="l" indent="0" marL="0">
+              <a:lnSpc>
+                <a:spcPts val="1820"/>
+              </a:lnSpc>
+              <a:spcBef>
+                <a:spcPts val="300"/>
+              </a:spcBef>
+              <a:spcAft>
+                <a:spcPts val="300"/>
+              </a:spcAft>
+              <a:buNone/>
+            </a:pPr>
+            <a:r>
+              <a:rPr lang="en-US" sz="1300" i="1" dirty="0">
+                <a:solidFill>
+                  <a:srgbClr val="1C2833"/>
+                </a:solidFill>
+                <a:latin typeface="Georgia" pitchFamily="34" charset="0"/>
+                <a:ea typeface="Georgia" pitchFamily="34" charset="-122"/>
+                <a:cs typeface="Georgia" pitchFamily="34" charset="-120"/>
+              </a:rPr>
+              <a:t>Eight arrangements; one square.</a:t>
+            </a:r>
+            <a:endParaRPr lang="en-US" sz="1300" dirty="0"/>
+          </a:p>
+        </p:txBody>
+      </p:sp>
+      <p:sp>
+        <p:nvSpPr>
+          <p:cNvPr id="13" name="Text 11"/>
+          <p:cNvSpPr/>
+          <p:nvPr/>
+        </p:nvSpPr>
+        <p:spPr>
+          <a:xfrm>
+            <a:off x="406301" y="4434929"/>
+            <a:ext cx="8498026" cy="213271"/>
+          </a:xfrm>
+          <a:prstGeom prst="rect">
+            <a:avLst/>
+          </a:prstGeom>
+          <a:noFill/>
+          <a:ln/>
+        </p:spPr>
+        <p:txBody>
+          <a:bodyPr wrap="square" lIns="0" tIns="0" rIns="0" bIns="0" rtlCol="0" anchor="t"/>
+          <a:lstStyle/>
+          <a:p>
+            <a:pPr algn="l" indent="0" marL="0">
+              <a:lnSpc>
+                <a:spcPts val="1680"/>
+              </a:lnSpc>
+              <a:spcBef>
+                <a:spcPts val="300"/>
+              </a:spcBef>
+              <a:spcAft>
+                <a:spcPts val="300"/>
+              </a:spcAft>
+              <a:buNone/>
+            </a:pPr>
+            <a:r>
+              <a:rPr lang="en-US" sz="1200" dirty="0">
+                <a:solidFill>
+                  <a:srgbClr val="1C2833"/>
+                </a:solidFill>
+                <a:latin typeface="Arial" pitchFamily="34" charset="0"/>
+                <a:ea typeface="Arial" pitchFamily="34" charset="-122"/>
+                <a:cs typeface="Arial" pitchFamily="34" charset="-120"/>
+              </a:rPr>
+              <a:t>Middle ·  · IKS Curriculum</a:t>
+            </a:r>
+            <a:endParaRPr lang="en-US" sz="1200" dirty="0"/>
+          </a:p>
+        </p:txBody>
+      </p:sp>
+    </p:spTree>
+  </p:cSld>
+  <p:clrMapOvr>
+    <a:masterClrMapping/>
+  </p:clrMapOvr>
+</p:sld>
+</file>
+
+<file path=ppt/slides/slide16.xml><?xml version="1.0" encoding="utf-8"?>
+<p:sld xmlns:a="http://schemas.openxmlformats.org/drawingml/2006/main" xmlns:r="http://schemas.openxmlformats.org/officeDocument/2006/relationships" xmlns:p="http://schemas.openxmlformats.org/presentationml/2006/main">
+  <p:cSld name="Slide 16">
+    <p:bg>
+      <p:bgPr>
+        <a:solidFill>
+          <a:srgbClr val="FFFFFF"/>
+        </a:solidFill>
+      </p:bgPr>
+    </p:bg>
+    <p:spTree>
+      <p:nvGrpSpPr>
+        <p:cNvPr id="1" name=""/>
+        <p:cNvGrpSpPr/>
+        <p:nvPr/>
+      </p:nvGrpSpPr>
+      <p:grpSpPr>
+        <a:xfrm>
+          <a:off x="0" y="0"/>
+          <a:ext cx="0" cy="0"/>
+          <a:chOff x="0" y="0"/>
+          <a:chExt cx="0" cy="0"/>
+        </a:xfrm>
+      </p:grpSpPr>
+      <p:sp>
+        <p:nvSpPr>
+          <p:cNvPr id="2" name="Text 0"/>
+          <p:cNvSpPr/>
+          <p:nvPr/>
+        </p:nvSpPr>
+        <p:spPr>
+          <a:xfrm>
+            <a:off x="0" y="0"/>
+            <a:ext cx="9144000" cy="101501"/>
+          </a:xfrm>
+          <a:prstGeom prst="rect">
+            <a:avLst/>
+          </a:prstGeom>
+          <a:solidFill>
+            <a:srgbClr val="277884"/>
+          </a:solidFill>
+          <a:ln/>
+        </p:spPr>
+        <p:txBody>
+          <a:bodyPr wrap="square" rtlCol="0" anchor="ctr"/>
+          <a:lstStyle/>
+          <a:p>
+            <a:pPr indent="0" marL="0">
+              <a:buNone/>
+            </a:pPr>
+            <a:endParaRPr lang="en-US" dirty="0"/>
+          </a:p>
+        </p:txBody>
+      </p:sp>
+      <p:sp>
+        <p:nvSpPr>
+          <p:cNvPr id="3" name="Text 1"/>
+          <p:cNvSpPr/>
+          <p:nvPr/>
+        </p:nvSpPr>
+        <p:spPr>
+          <a:xfrm>
+            <a:off x="406301" y="457051"/>
+            <a:ext cx="8498026" cy="274290"/>
+          </a:xfrm>
+          <a:prstGeom prst="rect">
+            <a:avLst/>
+          </a:prstGeom>
+          <a:noFill/>
+          <a:ln/>
+        </p:spPr>
+        <p:txBody>
+          <a:bodyPr wrap="square" lIns="0" tIns="0" rIns="0" bIns="0" rtlCol="0" anchor="t"/>
+          <a:lstStyle/>
+          <a:p>
+            <a:pPr algn="l" indent="0" marL="0">
+              <a:lnSpc>
+                <a:spcPts val="2160"/>
+              </a:lnSpc>
+              <a:spcBef>
+                <a:spcPts val="600"/>
+              </a:spcBef>
+              <a:spcAft>
+                <a:spcPts val="800"/>
+              </a:spcAft>
+              <a:buNone/>
+            </a:pPr>
+            <a:r>
+              <a:rPr lang="en-US" sz="1800" b="1" dirty="0">
+                <a:solidFill>
+                  <a:srgbClr val="FE4447"/>
+                </a:solidFill>
+                <a:latin typeface="Georgia" pitchFamily="34" charset="0"/>
+                <a:ea typeface="Georgia" pitchFamily="34" charset="-122"/>
+                <a:cs typeface="Georgia" pitchFamily="34" charset="-120"/>
+              </a:rPr>
+              <a:t>Homework</a:t>
+            </a:r>
+            <a:endParaRPr lang="en-US" sz="1800" dirty="0"/>
+          </a:p>
+        </p:txBody>
+      </p:sp>
+      <p:sp>
+        <p:nvSpPr>
+          <p:cNvPr id="4" name="Text 2"/>
+          <p:cNvSpPr/>
+          <p:nvPr/>
+        </p:nvSpPr>
+        <p:spPr>
+          <a:xfrm>
+            <a:off x="634901" y="883593"/>
+            <a:ext cx="8102798" cy="487561"/>
+          </a:xfrm>
+          <a:prstGeom prst="rect">
+            <a:avLst/>
+          </a:prstGeom>
+          <a:noFill/>
+          <a:ln/>
+        </p:spPr>
+        <p:txBody>
+          <a:bodyPr wrap="square" lIns="0" tIns="0" rIns="0" bIns="0" rtlCol="0" anchor="t"/>
+          <a:lstStyle/>
+          <a:p>
+            <a:pPr algn="l" marL="342900" indent="-342900">
+              <a:lnSpc>
+                <a:spcPts val="1620"/>
+              </a:lnSpc>
+              <a:spcAft>
+                <a:spcPts val="300"/>
+              </a:spcAft>
+              <a:buSzPct val="100000"/>
+              <a:buChar char="•"/>
+            </a:pPr>
+            <a:r>
+              <a:rPr lang="en-US" sz="1200" dirty="0">
+                <a:solidFill>
+                  <a:srgbClr val="1C2833"/>
+                </a:solidFill>
+                <a:latin typeface="Arial" pitchFamily="34" charset="0"/>
+                <a:ea typeface="Arial" pitchFamily="34" charset="-122"/>
+                <a:cs typeface="Arial" pitchFamily="34" charset="-120"/>
+              </a:rPr>
+              <a:t>Take the 3×3 magic square and ask: if I change every entry by adding 10 (so the square becomes 12, 17, 16, 19, 15, 11, 14, 13, 18), is it still a magic square? What's the new magic constant? Verify one row.</a:t>
+            </a:r>
+            <a:endParaRPr lang="en-US" sz="1200" dirty="0"/>
+          </a:p>
+        </p:txBody>
+      </p:sp>
+      <p:sp>
+        <p:nvSpPr>
+          <p:cNvPr id="5" name="Text 3"/>
+          <p:cNvSpPr/>
+          <p:nvPr/>
+        </p:nvSpPr>
+        <p:spPr>
+          <a:xfrm>
+            <a:off x="406301" y="4434929"/>
+            <a:ext cx="8498026" cy="213271"/>
+          </a:xfrm>
+          <a:prstGeom prst="rect">
+            <a:avLst/>
+          </a:prstGeom>
+          <a:noFill/>
+          <a:ln/>
+        </p:spPr>
+        <p:txBody>
+          <a:bodyPr wrap="square" lIns="0" tIns="0" rIns="0" bIns="0" rtlCol="0" anchor="t"/>
+          <a:lstStyle/>
+          <a:p>
+            <a:pPr algn="l" indent="0" marL="0">
+              <a:lnSpc>
+                <a:spcPts val="1680"/>
+              </a:lnSpc>
+              <a:spcBef>
+                <a:spcPts val="300"/>
+              </a:spcBef>
+              <a:spcAft>
+                <a:spcPts val="300"/>
+              </a:spcAft>
+              <a:buNone/>
+            </a:pPr>
+            <a:r>
+              <a:rPr lang="en-US" sz="1200" dirty="0">
+                <a:solidFill>
+                  <a:srgbClr val="1C2833"/>
+                </a:solidFill>
+                <a:latin typeface="Arial" pitchFamily="34" charset="0"/>
+                <a:ea typeface="Arial" pitchFamily="34" charset="-122"/>
+                <a:cs typeface="Arial" pitchFamily="34" charset="-120"/>
+              </a:rPr>
+              <a:t>Middle ·  · IKS Curriculum</a:t>
+            </a:r>
+            <a:endParaRPr lang="en-US" sz="1200" dirty="0"/>
+          </a:p>
+        </p:txBody>
+      </p:sp>
+    </p:spTree>
+  </p:cSld>
+  <p:clrMapOvr>
+    <a:masterClrMapping/>
+  </p:clrMapOvr>
+</p:sld>
+</file>
+
+<file path=ppt/slides/slide17.xml><?xml version="1.0" encoding="utf-8"?>
+<p:sld xmlns:a="http://schemas.openxmlformats.org/drawingml/2006/main" xmlns:r="http://schemas.openxmlformats.org/officeDocument/2006/relationships" xmlns:p="http://schemas.openxmlformats.org/presentationml/2006/main">
+  <p:cSld name="Slide 17">
+    <p:bg>
+      <p:bgPr>
+        <a:solidFill>
+          <a:srgbClr val="FFFFFF"/>
+        </a:solidFill>
+      </p:bgPr>
+    </p:bg>
+    <p:spTree>
+      <p:nvGrpSpPr>
+        <p:cNvPr id="1" name=""/>
+        <p:cNvGrpSpPr/>
+        <p:nvPr/>
+      </p:nvGrpSpPr>
+      <p:grpSpPr>
+        <a:xfrm>
+          <a:off x="0" y="0"/>
+          <a:ext cx="0" cy="0"/>
+          <a:chOff x="0" y="0"/>
+          <a:chExt cx="0" cy="0"/>
+        </a:xfrm>
+      </p:grpSpPr>
+      <p:sp>
+        <p:nvSpPr>
+          <p:cNvPr id="2" name="Text 0"/>
+          <p:cNvSpPr/>
+          <p:nvPr/>
+        </p:nvSpPr>
+        <p:spPr>
+          <a:xfrm>
+            <a:off x="0" y="0"/>
+            <a:ext cx="9144000" cy="101501"/>
+          </a:xfrm>
+          <a:prstGeom prst="rect">
+            <a:avLst/>
+          </a:prstGeom>
+          <a:solidFill>
+            <a:srgbClr val="277884"/>
+          </a:solidFill>
+          <a:ln/>
+        </p:spPr>
+        <p:txBody>
+          <a:bodyPr wrap="square" rtlCol="0" anchor="ctr"/>
+          <a:lstStyle/>
+          <a:p>
+            <a:pPr indent="0" marL="0">
+              <a:buNone/>
+            </a:pPr>
+            <a:endParaRPr lang="en-US" dirty="0"/>
+          </a:p>
+        </p:txBody>
+      </p:sp>
+      <p:sp>
+        <p:nvSpPr>
+          <p:cNvPr id="3" name="Text 1"/>
+          <p:cNvSpPr/>
+          <p:nvPr/>
+        </p:nvSpPr>
+        <p:spPr>
+          <a:xfrm>
+            <a:off x="406301" y="457051"/>
+            <a:ext cx="8498026" cy="274290"/>
+          </a:xfrm>
+          <a:prstGeom prst="rect">
+            <a:avLst/>
+          </a:prstGeom>
+          <a:noFill/>
+          <a:ln/>
+        </p:spPr>
+        <p:txBody>
+          <a:bodyPr wrap="square" lIns="0" tIns="0" rIns="0" bIns="0" rtlCol="0" anchor="t"/>
+          <a:lstStyle/>
+          <a:p>
+            <a:pPr algn="l" indent="0" marL="0">
+              <a:lnSpc>
+                <a:spcPts val="2160"/>
+              </a:lnSpc>
+              <a:spcBef>
+                <a:spcPts val="600"/>
+              </a:spcBef>
+              <a:spcAft>
+                <a:spcPts val="800"/>
+              </a:spcAft>
+              <a:buNone/>
+            </a:pPr>
+            <a:r>
+              <a:rPr lang="en-US" sz="1800" b="1" dirty="0">
+                <a:solidFill>
+                  <a:srgbClr val="FE4447"/>
+                </a:solidFill>
+                <a:latin typeface="Georgia" pitchFamily="34" charset="0"/>
+                <a:ea typeface="Georgia" pitchFamily="34" charset="-122"/>
+                <a:cs typeface="Georgia" pitchFamily="34" charset="-120"/>
+              </a:rPr>
+              <a:t>Differentiation</a:t>
+            </a:r>
+            <a:endParaRPr lang="en-US" sz="1800" dirty="0"/>
+          </a:p>
+        </p:txBody>
+      </p:sp>
+      <p:sp>
+        <p:nvSpPr>
+          <p:cNvPr id="4" name="Text 2"/>
+          <p:cNvSpPr/>
+          <p:nvPr/>
+        </p:nvSpPr>
+        <p:spPr>
+          <a:xfrm>
+            <a:off x="634901" y="883593"/>
+            <a:ext cx="8102798" cy="937022"/>
+          </a:xfrm>
+          <a:prstGeom prst="rect">
+            <a:avLst/>
+          </a:prstGeom>
+          <a:noFill/>
+          <a:ln/>
+        </p:spPr>
+        <p:txBody>
+          <a:bodyPr wrap="square" lIns="0" tIns="0" rIns="0" bIns="0" rtlCol="0" anchor="t"/>
+          <a:lstStyle/>
+          <a:p>
+            <a:pPr algn="l" marL="342900" indent="-342900">
+              <a:lnSpc>
+                <a:spcPts val="1620"/>
+              </a:lnSpc>
+              <a:spcAft>
+                <a:spcPts val="300"/>
+              </a:spcAft>
+              <a:buSzPct val="100000"/>
+              <a:buChar char="•"/>
+            </a:pPr>
+            <a:r>
+              <a:rPr lang="en-US" sz="1200" b="1" dirty="0">
+                <a:solidFill>
+                  <a:srgbClr val="1C2833"/>
+                </a:solidFill>
+                <a:latin typeface="Arial" pitchFamily="34" charset="0"/>
+                <a:ea typeface="Arial" pitchFamily="34" charset="-122"/>
+                <a:cs typeface="Arial" pitchFamily="34" charset="-120"/>
+              </a:rPr>
+              <a:t>One tier up:</a:t>
+            </a:r>
+            <a:pPr algn="l" indent="0" marL="0">
+              <a:lnSpc>
+                <a:spcPts val="1620"/>
+              </a:lnSpc>
+              <a:spcAft>
+                <a:spcPts val="300"/>
+              </a:spcAft>
+              <a:buNone/>
+            </a:pPr>
+            <a:r>
+              <a:rPr lang="en-US" sz="1200" dirty="0">
+                <a:solidFill>
+                  <a:srgbClr val="1C2833"/>
+                </a:solidFill>
+                <a:latin typeface="Arial" pitchFamily="34" charset="0"/>
+                <a:ea typeface="Arial" pitchFamily="34" charset="-122"/>
+                <a:cs typeface="Arial" pitchFamily="34" charset="-120"/>
+              </a:rPr>
+              <a:t> Try the same question for 4×4 magic squares — how many are there? Look it up (or estimate). The answer is 880 distinct 4×4 squares up to symmetry; that's a surprise.</a:t>
+            </a:r>
+            <a:endParaRPr lang="en-US" sz="1200" dirty="0"/>
+          </a:p>
+          <a:p>
+            <a:pPr algn="l" marL="342900" indent="-342900">
+              <a:lnSpc>
+                <a:spcPts val="1620"/>
+              </a:lnSpc>
+              <a:spcAft>
+                <a:spcPts val="300"/>
+              </a:spcAft>
+              <a:buSzPct val="100000"/>
+              <a:buChar char="•"/>
+            </a:pPr>
+            <a:r>
+              <a:rPr lang="en-US" sz="1200" b="1" dirty="0">
+                <a:solidFill>
+                  <a:srgbClr val="1C2833"/>
+                </a:solidFill>
+                <a:latin typeface="Arial" pitchFamily="34" charset="0"/>
+                <a:ea typeface="Arial" pitchFamily="34" charset="-122"/>
+                <a:cs typeface="Arial" pitchFamily="34" charset="-120"/>
+              </a:rPr>
+              <a:t>One tier down:</a:t>
+            </a:r>
+            <a:pPr algn="l" indent="0" marL="0">
+              <a:lnSpc>
+                <a:spcPts val="1620"/>
+              </a:lnSpc>
+              <a:spcAft>
+                <a:spcPts val="300"/>
+              </a:spcAft>
+              <a:buNone/>
+            </a:pPr>
+            <a:r>
+              <a:rPr lang="en-US" sz="1200" dirty="0">
+                <a:solidFill>
+                  <a:srgbClr val="1C2833"/>
+                </a:solidFill>
+                <a:latin typeface="Arial" pitchFamily="34" charset="0"/>
+                <a:ea typeface="Arial" pitchFamily="34" charset="-122"/>
+                <a:cs typeface="Arial" pitchFamily="34" charset="-120"/>
+              </a:rPr>
+              <a:t> Just memorise: 5 in the centre, even at corners. Use coloured pencils to highlight the pattern in the Day-1 square.</a:t>
+            </a:r>
+            <a:endParaRPr lang="en-US" sz="1200" dirty="0"/>
+          </a:p>
+        </p:txBody>
+      </p:sp>
+      <p:sp>
+        <p:nvSpPr>
+          <p:cNvPr id="5" name="Text 3"/>
+          <p:cNvSpPr/>
+          <p:nvPr/>
+        </p:nvSpPr>
+        <p:spPr>
+          <a:xfrm>
+            <a:off x="406301" y="4434929"/>
+            <a:ext cx="8498026" cy="213271"/>
+          </a:xfrm>
+          <a:prstGeom prst="rect">
+            <a:avLst/>
+          </a:prstGeom>
+          <a:noFill/>
+          <a:ln/>
+        </p:spPr>
+        <p:txBody>
+          <a:bodyPr wrap="square" lIns="0" tIns="0" rIns="0" bIns="0" rtlCol="0" anchor="t"/>
+          <a:lstStyle/>
+          <a:p>
+            <a:pPr algn="l" indent="0" marL="0">
+              <a:lnSpc>
+                <a:spcPts val="1680"/>
+              </a:lnSpc>
+              <a:spcBef>
+                <a:spcPts val="300"/>
+              </a:spcBef>
+              <a:spcAft>
+                <a:spcPts val="300"/>
+              </a:spcAft>
+              <a:buNone/>
+            </a:pPr>
+            <a:r>
+              <a:rPr lang="en-US" sz="1200" dirty="0">
+                <a:solidFill>
+                  <a:srgbClr val="1C2833"/>
+                </a:solidFill>
+                <a:latin typeface="Arial" pitchFamily="34" charset="0"/>
+                <a:ea typeface="Arial" pitchFamily="34" charset="-122"/>
+                <a:cs typeface="Arial" pitchFamily="34" charset="-120"/>
+              </a:rPr>
+              <a:t>Middle ·  · IKS Curriculum</a:t>
+            </a:r>
+            <a:endParaRPr lang="en-US" sz="1200" dirty="0"/>
+          </a:p>
+        </p:txBody>
+      </p:sp>
+    </p:spTree>
+  </p:cSld>
+  <p:clrMapOvr>
+    <a:masterClrMapping/>
+  </p:clrMapOvr>
+</p:sld>
+</file>
+
+<file path=ppt/slides/slide18.xml><?xml version="1.0" encoding="utf-8"?>
+<p:sld xmlns:a="http://schemas.openxmlformats.org/drawingml/2006/main" xmlns:r="http://schemas.openxmlformats.org/officeDocument/2006/relationships" xmlns:p="http://schemas.openxmlformats.org/presentationml/2006/main">
+  <p:cSld name="Slide 18">
+    <p:bg>
+      <p:bgPr>
+        <a:solidFill>
+          <a:srgbClr val="FFFFFF"/>
+        </a:solidFill>
+      </p:bgPr>
+    </p:bg>
+    <p:spTree>
+      <p:nvGrpSpPr>
+        <p:cNvPr id="1" name=""/>
+        <p:cNvGrpSpPr/>
+        <p:nvPr/>
+      </p:nvGrpSpPr>
+      <p:grpSpPr>
+        <a:xfrm>
+          <a:off x="0" y="0"/>
+          <a:ext cx="0" cy="0"/>
+          <a:chOff x="0" y="0"/>
+          <a:chExt cx="0" cy="0"/>
+        </a:xfrm>
+      </p:grpSpPr>
+      <p:sp>
+        <p:nvSpPr>
+          <p:cNvPr id="2" name="Text 0"/>
+          <p:cNvSpPr/>
+          <p:nvPr/>
+        </p:nvSpPr>
+        <p:spPr>
+          <a:xfrm>
+            <a:off x="0" y="0"/>
+            <a:ext cx="9144000" cy="101501"/>
+          </a:xfrm>
+          <a:prstGeom prst="rect">
+            <a:avLst/>
+          </a:prstGeom>
+          <a:solidFill>
+            <a:srgbClr val="277884"/>
+          </a:solidFill>
+          <a:ln/>
+        </p:spPr>
+        <p:txBody>
+          <a:bodyPr wrap="square" rtlCol="0" anchor="ctr"/>
+          <a:lstStyle/>
+          <a:p>
+            <a:pPr indent="0" marL="0">
+              <a:buNone/>
+            </a:pPr>
+            <a:endParaRPr lang="en-US" dirty="0"/>
+          </a:p>
+        </p:txBody>
+      </p:sp>
+      <p:sp>
+        <p:nvSpPr>
+          <p:cNvPr id="3" name="Text 1"/>
+          <p:cNvSpPr/>
+          <p:nvPr/>
+        </p:nvSpPr>
+        <p:spPr>
+          <a:xfrm>
+            <a:off x="406301" y="457051"/>
+            <a:ext cx="8498026" cy="274290"/>
+          </a:xfrm>
+          <a:prstGeom prst="rect">
+            <a:avLst/>
+          </a:prstGeom>
+          <a:noFill/>
+          <a:ln/>
+        </p:spPr>
+        <p:txBody>
+          <a:bodyPr wrap="square" lIns="0" tIns="0" rIns="0" bIns="0" rtlCol="0" anchor="t"/>
+          <a:lstStyle/>
+          <a:p>
+            <a:pPr algn="l" indent="0" marL="0">
+              <a:lnSpc>
+                <a:spcPts val="2160"/>
+              </a:lnSpc>
+              <a:spcBef>
+                <a:spcPts val="600"/>
+              </a:spcBef>
+              <a:spcAft>
+                <a:spcPts val="800"/>
+              </a:spcAft>
+              <a:buNone/>
+            </a:pPr>
+            <a:r>
+              <a:rPr lang="en-US" sz="1800" b="1" dirty="0">
+                <a:solidFill>
+                  <a:srgbClr val="FE4447"/>
+                </a:solidFill>
+                <a:latin typeface="Georgia" pitchFamily="34" charset="0"/>
+                <a:ea typeface="Georgia" pitchFamily="34" charset="-122"/>
+                <a:cs typeface="Georgia" pitchFamily="34" charset="-120"/>
+              </a:rPr>
+              <a:t>Teacher notes</a:t>
+            </a:r>
+            <a:endParaRPr lang="en-US" sz="1800" dirty="0"/>
+          </a:p>
+        </p:txBody>
+      </p:sp>
+      <p:sp>
+        <p:nvSpPr>
+          <p:cNvPr id="4" name="Text 2"/>
+          <p:cNvSpPr/>
+          <p:nvPr/>
+        </p:nvSpPr>
+        <p:spPr>
+          <a:xfrm>
+            <a:off x="634901" y="883593"/>
+            <a:ext cx="8102798" cy="1386483"/>
+          </a:xfrm>
+          <a:prstGeom prst="rect">
+            <a:avLst/>
+          </a:prstGeom>
+          <a:noFill/>
+          <a:ln/>
+        </p:spPr>
+        <p:txBody>
+          <a:bodyPr wrap="square" lIns="0" tIns="0" rIns="0" bIns="0" rtlCol="0" anchor="t"/>
+          <a:lstStyle/>
+          <a:p>
+            <a:pPr algn="l" marL="342900" indent="-342900">
+              <a:lnSpc>
+                <a:spcPts val="1620"/>
+              </a:lnSpc>
+              <a:spcAft>
+                <a:spcPts val="300"/>
+              </a:spcAft>
+              <a:buSzPct val="100000"/>
+              <a:buChar char="•"/>
+            </a:pPr>
+            <a:r>
+              <a:rPr lang="en-US" sz="1200" dirty="0">
+                <a:solidFill>
+                  <a:srgbClr val="1C2833"/>
+                </a:solidFill>
+                <a:latin typeface="Arial" pitchFamily="34" charset="0"/>
+                <a:ea typeface="Arial" pitchFamily="34" charset="-122"/>
+                <a:cs typeface="Arial" pitchFamily="34" charset="-120"/>
+              </a:rPr>
+              <a:t>The full proof that 5 must be central is a beautiful counting argument but takes 10 minutes if done thoroughly. Choose: either do it well, or do it briefly with hand-waves. Don't do it half-fast — that confuses more than it clarifies.</a:t>
+            </a:r>
+            <a:endParaRPr lang="en-US" sz="1200" dirty="0"/>
+          </a:p>
+          <a:p>
+            <a:pPr algn="l" marL="342900" indent="-342900">
+              <a:lnSpc>
+                <a:spcPts val="1620"/>
+              </a:lnSpc>
+              <a:spcAft>
+                <a:spcPts val="300"/>
+              </a:spcAft>
+              <a:buSzPct val="100000"/>
+              <a:buChar char="•"/>
+            </a:pPr>
+            <a:r>
+              <a:rPr lang="en-US" sz="1200" dirty="0">
+                <a:solidFill>
+                  <a:srgbClr val="1C2833"/>
+                </a:solidFill>
+                <a:latin typeface="Arial" pitchFamily="34" charset="0"/>
+                <a:ea typeface="Arial" pitchFamily="34" charset="-122"/>
+                <a:cs typeface="Arial" pitchFamily="34" charset="-120"/>
+              </a:rPr>
+              <a:t>The "eight symmetries form a group" idea is the </a:t>
+            </a:r>
+            <a:pPr algn="l" indent="0" marL="0">
+              <a:lnSpc>
+                <a:spcPts val="1620"/>
+              </a:lnSpc>
+              <a:spcAft>
+                <a:spcPts val="300"/>
+              </a:spcAft>
+              <a:buNone/>
+            </a:pPr>
+            <a:r>
               <a:rPr lang="en-US" sz="1200" i="1" dirty="0">
                 <a:solidFill>
                   <a:srgbClr val="1C2833"/>
@@ -3318,15 +5630,280 @@
                 <a:ea typeface="Arial" pitchFamily="34" charset="-122"/>
                 <a:cs typeface="Arial" pitchFamily="34" charset="-120"/>
               </a:rPr>
+              <a:t>dihedral group D₄</a:t>
+            </a:r>
+            <a:pPr algn="l" indent="0" marL="0">
+              <a:lnSpc>
+                <a:spcPts val="1620"/>
+              </a:lnSpc>
+              <a:spcAft>
+                <a:spcPts val="300"/>
+              </a:spcAft>
+              <a:buNone/>
+            </a:pPr>
+            <a:r>
+              <a:rPr lang="en-US" sz="1200" dirty="0">
+                <a:solidFill>
+                  <a:srgbClr val="1C2833"/>
+                </a:solidFill>
+                <a:latin typeface="Arial" pitchFamily="34" charset="0"/>
+                <a:ea typeface="Arial" pitchFamily="34" charset="-122"/>
+                <a:cs typeface="Arial" pitchFamily="34" charset="-120"/>
+              </a:rPr>
+              <a:t>. Don't introduce that name at Middle band — note it for yourself; it returns at Senior band.</a:t>
+            </a:r>
+            <a:endParaRPr lang="en-US" sz="1200" dirty="0"/>
+          </a:p>
+          <a:p>
+            <a:pPr algn="l" marL="342900" indent="-342900">
+              <a:lnSpc>
+                <a:spcPts val="1620"/>
+              </a:lnSpc>
+              <a:spcAft>
+                <a:spcPts val="300"/>
+              </a:spcAft>
+              <a:buSzPct val="100000"/>
+              <a:buChar char="•"/>
+            </a:pPr>
+            <a:r>
+              <a:rPr lang="en-US" sz="1200" dirty="0">
+                <a:solidFill>
+                  <a:srgbClr val="1C2833"/>
+                </a:solidFill>
+                <a:latin typeface="Arial" pitchFamily="34" charset="0"/>
+                <a:ea typeface="Arial" pitchFamily="34" charset="-122"/>
+                <a:cs typeface="Arial" pitchFamily="34" charset="-120"/>
+              </a:rPr>
+              <a:t>A few students will produce a "9th" square that turns out to be one of the 8 in disguise. Walk them through which symmetry transforms theirs into the original.</a:t>
+            </a:r>
+            <a:endParaRPr lang="en-US" sz="1200" dirty="0"/>
+          </a:p>
+        </p:txBody>
+      </p:sp>
+      <p:sp>
+        <p:nvSpPr>
+          <p:cNvPr id="5" name="Text 3"/>
+          <p:cNvSpPr/>
+          <p:nvPr/>
+        </p:nvSpPr>
+        <p:spPr>
+          <a:xfrm>
+            <a:off x="406301" y="4434929"/>
+            <a:ext cx="8498026" cy="213271"/>
+          </a:xfrm>
+          <a:prstGeom prst="rect">
+            <a:avLst/>
+          </a:prstGeom>
+          <a:noFill/>
+          <a:ln/>
+        </p:spPr>
+        <p:txBody>
+          <a:bodyPr wrap="square" lIns="0" tIns="0" rIns="0" bIns="0" rtlCol="0" anchor="t"/>
+          <a:lstStyle/>
+          <a:p>
+            <a:pPr algn="l" indent="0" marL="0">
+              <a:lnSpc>
+                <a:spcPts val="1680"/>
+              </a:lnSpc>
+              <a:spcBef>
+                <a:spcPts val="300"/>
+              </a:spcBef>
+              <a:spcAft>
+                <a:spcPts val="300"/>
+              </a:spcAft>
+              <a:buNone/>
+            </a:pPr>
+            <a:r>
+              <a:rPr lang="en-US" sz="1200" dirty="0">
+                <a:solidFill>
+                  <a:srgbClr val="1C2833"/>
+                </a:solidFill>
+                <a:latin typeface="Arial" pitchFamily="34" charset="0"/>
+                <a:ea typeface="Arial" pitchFamily="34" charset="-122"/>
+                <a:cs typeface="Arial" pitchFamily="34" charset="-120"/>
+              </a:rPr>
+              <a:t>Middle ·  · IKS Curriculum</a:t>
+            </a:r>
+            <a:endParaRPr lang="en-US" sz="1200" dirty="0"/>
+          </a:p>
+        </p:txBody>
+      </p:sp>
+    </p:spTree>
+  </p:cSld>
+  <p:clrMapOvr>
+    <a:masterClrMapping/>
+  </p:clrMapOvr>
+</p:sld>
+</file>
+
+<file path=ppt/slides/slide19.xml><?xml version="1.0" encoding="utf-8"?>
+<p:sld xmlns:a="http://schemas.openxmlformats.org/drawingml/2006/main" xmlns:r="http://schemas.openxmlformats.org/officeDocument/2006/relationships" xmlns:p="http://schemas.openxmlformats.org/presentationml/2006/main">
+  <p:cSld name="Slide 19">
+    <p:bg>
+      <p:bgPr>
+        <a:solidFill>
+          <a:srgbClr val="FFFFFF"/>
+        </a:solidFill>
+      </p:bgPr>
+    </p:bg>
+    <p:spTree>
+      <p:nvGrpSpPr>
+        <p:cNvPr id="1" name=""/>
+        <p:cNvGrpSpPr/>
+        <p:nvPr/>
+      </p:nvGrpSpPr>
+      <p:grpSpPr>
+        <a:xfrm>
+          <a:off x="0" y="0"/>
+          <a:ext cx="0" cy="0"/>
+          <a:chOff x="0" y="0"/>
+          <a:chExt cx="0" cy="0"/>
+        </a:xfrm>
+      </p:grpSpPr>
+      <p:sp>
+        <p:nvSpPr>
+          <p:cNvPr id="2" name="Text 0"/>
+          <p:cNvSpPr/>
+          <p:nvPr/>
+        </p:nvSpPr>
+        <p:spPr>
+          <a:xfrm>
+            <a:off x="0" y="0"/>
+            <a:ext cx="9144000" cy="101501"/>
+          </a:xfrm>
+          <a:prstGeom prst="rect">
+            <a:avLst/>
+          </a:prstGeom>
+          <a:solidFill>
+            <a:srgbClr val="277884"/>
+          </a:solidFill>
+          <a:ln/>
+        </p:spPr>
+        <p:txBody>
+          <a:bodyPr wrap="square" rtlCol="0" anchor="ctr"/>
+          <a:lstStyle/>
+          <a:p>
+            <a:pPr indent="0" marL="0">
+              <a:buNone/>
+            </a:pPr>
+            <a:endParaRPr lang="en-US" dirty="0"/>
+          </a:p>
+        </p:txBody>
+      </p:sp>
+      <p:sp>
+        <p:nvSpPr>
+          <p:cNvPr id="3" name="Text 1"/>
+          <p:cNvSpPr/>
+          <p:nvPr/>
+        </p:nvSpPr>
+        <p:spPr>
+          <a:xfrm>
+            <a:off x="406301" y="457051"/>
+            <a:ext cx="8498026" cy="274290"/>
+          </a:xfrm>
+          <a:prstGeom prst="rect">
+            <a:avLst/>
+          </a:prstGeom>
+          <a:noFill/>
+          <a:ln/>
+        </p:spPr>
+        <p:txBody>
+          <a:bodyPr wrap="square" lIns="0" tIns="0" rIns="0" bIns="0" rtlCol="0" anchor="t"/>
+          <a:lstStyle/>
+          <a:p>
+            <a:pPr algn="l" indent="0" marL="0">
+              <a:lnSpc>
+                <a:spcPts val="2160"/>
+              </a:lnSpc>
+              <a:spcBef>
+                <a:spcPts val="600"/>
+              </a:spcBef>
+              <a:spcAft>
+                <a:spcPts val="800"/>
+              </a:spcAft>
+              <a:buNone/>
+            </a:pPr>
+            <a:r>
+              <a:rPr lang="en-US" sz="1800" b="1" dirty="0">
+                <a:solidFill>
+                  <a:srgbClr val="FE4447"/>
+                </a:solidFill>
+                <a:latin typeface="Georgia" pitchFamily="34" charset="0"/>
+                <a:ea typeface="Georgia" pitchFamily="34" charset="-122"/>
+                <a:cs typeface="Georgia" pitchFamily="34" charset="-120"/>
+              </a:rPr>
+              <a:t>Citation(s) used in this lesson</a:t>
+            </a:r>
+            <a:endParaRPr lang="en-US" sz="1800" dirty="0"/>
+          </a:p>
+        </p:txBody>
+      </p:sp>
+      <p:sp>
+        <p:nvSpPr>
+          <p:cNvPr id="4" name="Text 2"/>
+          <p:cNvSpPr/>
+          <p:nvPr/>
+        </p:nvSpPr>
+        <p:spPr>
+          <a:xfrm>
+            <a:off x="634901" y="883593"/>
+            <a:ext cx="8102798" cy="487561"/>
+          </a:xfrm>
+          <a:prstGeom prst="rect">
+            <a:avLst/>
+          </a:prstGeom>
+          <a:noFill/>
+          <a:ln/>
+        </p:spPr>
+        <p:txBody>
+          <a:bodyPr wrap="square" lIns="0" tIns="0" rIns="0" bIns="0" rtlCol="0" anchor="t"/>
+          <a:lstStyle/>
+          <a:p>
+            <a:pPr algn="l" marL="342900" indent="-342900">
+              <a:lnSpc>
+                <a:spcPts val="1620"/>
+              </a:lnSpc>
+              <a:spcAft>
+                <a:spcPts val="300"/>
+              </a:spcAft>
+              <a:buSzPct val="100000"/>
+              <a:buChar char="•"/>
+            </a:pPr>
+            <a:r>
+              <a:rPr lang="en-US" sz="1200" dirty="0">
+                <a:solidFill>
+                  <a:srgbClr val="1C2833"/>
+                </a:solidFill>
+                <a:latin typeface="Arial" pitchFamily="34" charset="0"/>
+                <a:ea typeface="Arial" pitchFamily="34" charset="-122"/>
+                <a:cs typeface="Arial" pitchFamily="34" charset="-120"/>
+              </a:rPr>
+              <a:t>Nārāyaṇa Paṇḍita, </a:t>
+            </a:r>
+            <a:pPr algn="l" indent="0" marL="0">
+              <a:lnSpc>
+                <a:spcPts val="1620"/>
+              </a:lnSpc>
+              <a:spcAft>
+                <a:spcPts val="300"/>
+              </a:spcAft>
+              <a:buNone/>
+            </a:pPr>
+            <a:r>
+              <a:rPr lang="en-US" sz="1200" i="1" dirty="0">
+                <a:solidFill>
+                  <a:srgbClr val="1C2833"/>
+                </a:solidFill>
+                <a:latin typeface="Arial" pitchFamily="34" charset="0"/>
+                <a:ea typeface="Arial" pitchFamily="34" charset="-122"/>
+                <a:cs typeface="Arial" pitchFamily="34" charset="-120"/>
+              </a:rPr>
               <a:t>Gaṇita-kaumudī</a:t>
             </a:r>
             <a:pPr algn="l" indent="0" marL="0">
               <a:lnSpc>
-                <a:spcPts val="1680"/>
-              </a:lnSpc>
-              <a:spcBef>
-                <a:spcPts val="300"/>
-              </a:spcBef>
+                <a:spcPts val="1620"/>
+              </a:lnSpc>
               <a:spcAft>
                 <a:spcPts val="300"/>
               </a:spcAft>
@@ -3345,11 +5922,8 @@
             </a:r>
             <a:pPr algn="l" indent="0" marL="0">
               <a:lnSpc>
-                <a:spcPts val="1680"/>
-              </a:lnSpc>
-              <a:spcBef>
-                <a:spcPts val="300"/>
-              </a:spcBef>
+                <a:spcPts val="1620"/>
+              </a:lnSpc>
               <a:spcAft>
                 <a:spcPts val="300"/>
               </a:spcAft>
@@ -3368,11 +5942,8 @@
             </a:r>
             <a:pPr algn="l" indent="0" marL="0">
               <a:lnSpc>
-                <a:spcPts val="1680"/>
-              </a:lnSpc>
-              <a:spcBef>
-                <a:spcPts val="300"/>
-              </a:spcBef>
+                <a:spcPts val="1620"/>
+              </a:lnSpc>
               <a:spcAft>
                 <a:spcPts val="300"/>
               </a:spcAft>
@@ -3545,7 +6116,7 @@
                 <a:ea typeface="Georgia" pitchFamily="34" charset="-122"/>
                 <a:cs typeface="Georgia" pitchFamily="34" charset="-120"/>
               </a:rPr>
-              <a:t>Materials</a:t>
+              <a:t>Learning objective</a:t>
             </a:r>
             <a:endParaRPr lang="en-US" sz="1800" dirty="0"/>
           </a:p>
@@ -3593,7 +6164,53 @@
                 <a:ea typeface="Arial" pitchFamily="34" charset="-122"/>
                 <a:cs typeface="Arial" pitchFamily="34" charset="-120"/>
               </a:rPr>
-              <a:t>– Printed 3×3 grids (5 per pair) with the digits 1–9 listed – Coloured pencils (3 colours per student) – The Day-1 square visible on the board</a:t>
+              <a:t>By the end of this lesson, students will (a) discover that the 3×3 magic square with 1–9 is </a:t>
+            </a:r>
+            <a:pPr algn="l" indent="0" marL="0">
+              <a:lnSpc>
+                <a:spcPts val="1680"/>
+              </a:lnSpc>
+              <a:spcBef>
+                <a:spcPts val="300"/>
+              </a:spcBef>
+              <a:spcAft>
+                <a:spcPts val="300"/>
+              </a:spcAft>
+              <a:buNone/>
+            </a:pPr>
+            <a:r>
+              <a:rPr lang="en-US" sz="1200" b="1" dirty="0">
+                <a:solidFill>
+                  <a:srgbClr val="1C2833"/>
+                </a:solidFill>
+                <a:latin typeface="Arial" pitchFamily="34" charset="0"/>
+                <a:ea typeface="Arial" pitchFamily="34" charset="-122"/>
+                <a:cs typeface="Arial" pitchFamily="34" charset="-120"/>
+              </a:rPr>
+              <a:t>unique up to symmetry</a:t>
+            </a:r>
+            <a:pPr algn="l" indent="0" marL="0">
+              <a:lnSpc>
+                <a:spcPts val="1680"/>
+              </a:lnSpc>
+              <a:spcBef>
+                <a:spcPts val="300"/>
+              </a:spcBef>
+              <a:spcAft>
+                <a:spcPts val="300"/>
+              </a:spcAft>
+              <a:buNone/>
+            </a:pPr>
+            <a:r>
+              <a:rPr lang="en-US" sz="1200" dirty="0">
+                <a:solidFill>
+                  <a:srgbClr val="1C2833"/>
+                </a:solidFill>
+                <a:latin typeface="Arial" pitchFamily="34" charset="0"/>
+                <a:ea typeface="Arial" pitchFamily="34" charset="-122"/>
+                <a:cs typeface="Arial" pitchFamily="34" charset="-120"/>
+              </a:rPr>
+              <a:t>, (b) list the 8 symmetries (4 rotations + 4 reflections), and (c) explain why 5 must occupy the centre.</a:t>
             </a:r>
             <a:endParaRPr lang="en-US" sz="1200" dirty="0"/>
           </a:p>
@@ -3751,7 +6368,7 @@
                 <a:ea typeface="Georgia" pitchFamily="34" charset="-122"/>
                 <a:cs typeface="Georgia" pitchFamily="34" charset="-120"/>
               </a:rPr>
-              <a:t>Vocabulary introduced today</a:t>
+              <a:t>Materials</a:t>
             </a:r>
             <a:endParaRPr lang="en-US" sz="1800" dirty="0"/>
           </a:p>
@@ -3789,26 +6406,6 @@
               <a:buChar char="•"/>
             </a:pPr>
             <a:r>
-              <a:rPr lang="en-US" sz="1200" i="1" dirty="0">
-                <a:solidFill>
-                  <a:srgbClr val="1C2833"/>
-                </a:solidFill>
-                <a:latin typeface="Arial" pitchFamily="34" charset="0"/>
-                <a:ea typeface="Arial" pitchFamily="34" charset="-122"/>
-                <a:cs typeface="Arial" pitchFamily="34" charset="-120"/>
-              </a:rPr>
-              <a:t>symmetry</a:t>
-            </a:r>
-            <a:pPr algn="l" indent="0" marL="0">
-              <a:lnSpc>
-                <a:spcPts val="1620"/>
-              </a:lnSpc>
-              <a:spcAft>
-                <a:spcPts val="300"/>
-              </a:spcAft>
-              <a:buNone/>
-            </a:pPr>
-            <a:r>
               <a:rPr lang="en-US" sz="1200" dirty="0">
                 <a:solidFill>
                   <a:srgbClr val="1C2833"/>
@@ -3817,7 +6414,7 @@
                 <a:ea typeface="Arial" pitchFamily="34" charset="-122"/>
                 <a:cs typeface="Arial" pitchFamily="34" charset="-120"/>
               </a:rPr>
-              <a:t> — a way of moving or flipping a figure so that it looks the same in a different orientation.</a:t>
+              <a:t>Printed 3×3 grids (5 per pair) with the digits 1–9 listed</a:t>
             </a:r>
             <a:endParaRPr lang="en-US" sz="1200" dirty="0"/>
           </a:p>
@@ -3833,26 +6430,6 @@
               <a:buChar char="•"/>
             </a:pPr>
             <a:r>
-              <a:rPr lang="en-US" sz="1200" i="1" dirty="0">
-                <a:solidFill>
-                  <a:srgbClr val="1C2833"/>
-                </a:solidFill>
-                <a:latin typeface="Arial" pitchFamily="34" charset="0"/>
-                <a:ea typeface="Arial" pitchFamily="34" charset="-122"/>
-                <a:cs typeface="Arial" pitchFamily="34" charset="-120"/>
-              </a:rPr>
-              <a:t>rotation</a:t>
-            </a:r>
-            <a:pPr algn="l" indent="0" marL="0">
-              <a:lnSpc>
-                <a:spcPts val="1620"/>
-              </a:lnSpc>
-              <a:spcAft>
-                <a:spcPts val="300"/>
-              </a:spcAft>
-              <a:buNone/>
-            </a:pPr>
-            <a:r>
               <a:rPr lang="en-US" sz="1200" dirty="0">
                 <a:solidFill>
                   <a:srgbClr val="1C2833"/>
@@ -3861,7 +6438,7 @@
                 <a:ea typeface="Arial" pitchFamily="34" charset="-122"/>
                 <a:cs typeface="Arial" pitchFamily="34" charset="-120"/>
               </a:rPr>
-              <a:t> — turning around a centre by 90°, 180°, or 270°.</a:t>
+              <a:t>Coloured pencils (3 colours per student)</a:t>
             </a:r>
             <a:endParaRPr lang="en-US" sz="1200" dirty="0"/>
           </a:p>
@@ -3877,26 +6454,6 @@
               <a:buChar char="•"/>
             </a:pPr>
             <a:r>
-              <a:rPr lang="en-US" sz="1200" i="1" dirty="0">
-                <a:solidFill>
-                  <a:srgbClr val="1C2833"/>
-                </a:solidFill>
-                <a:latin typeface="Arial" pitchFamily="34" charset="0"/>
-                <a:ea typeface="Arial" pitchFamily="34" charset="-122"/>
-                <a:cs typeface="Arial" pitchFamily="34" charset="-120"/>
-              </a:rPr>
-              <a:t>reflection</a:t>
-            </a:r>
-            <a:pPr algn="l" indent="0" marL="0">
-              <a:lnSpc>
-                <a:spcPts val="1620"/>
-              </a:lnSpc>
-              <a:spcAft>
-                <a:spcPts val="300"/>
-              </a:spcAft>
-              <a:buNone/>
-            </a:pPr>
-            <a:r>
               <a:rPr lang="en-US" sz="1200" dirty="0">
                 <a:solidFill>
                   <a:srgbClr val="1C2833"/>
@@ -3905,7 +6462,7 @@
                 <a:ea typeface="Arial" pitchFamily="34" charset="-122"/>
                 <a:cs typeface="Arial" pitchFamily="34" charset="-120"/>
               </a:rPr>
-              <a:t> — flipping across a line (horizontal, vertical, or one of the diagonals).</a:t>
+              <a:t>The Day-1 square visible on the board</a:t>
             </a:r>
             <a:endParaRPr lang="en-US" sz="1200" dirty="0"/>
           </a:p>
@@ -4063,7 +6620,7 @@
                 <a:ea typeface="Georgia" pitchFamily="34" charset="-122"/>
                 <a:cs typeface="Georgia" pitchFamily="34" charset="-120"/>
               </a:rPr>
-              <a:t>Lesson flow</a:t>
+              <a:t>Vocabulary introduced today</a:t>
             </a:r>
             <a:endParaRPr lang="en-US" sz="1800" dirty="0"/>
           </a:p>
@@ -4072,6 +6629,160 @@
       <p:sp>
         <p:nvSpPr>
           <p:cNvPr id="4" name="Text 2"/>
+          <p:cNvSpPr/>
+          <p:nvPr/>
+        </p:nvSpPr>
+        <p:spPr>
+          <a:xfrm>
+            <a:off x="634901" y="883593"/>
+            <a:ext cx="8102798" cy="769441"/>
+          </a:xfrm>
+          <a:prstGeom prst="rect">
+            <a:avLst/>
+          </a:prstGeom>
+          <a:noFill/>
+          <a:ln/>
+        </p:spPr>
+        <p:txBody>
+          <a:bodyPr wrap="square" lIns="0" tIns="0" rIns="0" bIns="0" rtlCol="0" anchor="t"/>
+          <a:lstStyle/>
+          <a:p>
+            <a:pPr algn="l" marL="342900" indent="-342900">
+              <a:lnSpc>
+                <a:spcPts val="1620"/>
+              </a:lnSpc>
+              <a:spcAft>
+                <a:spcPts val="300"/>
+              </a:spcAft>
+              <a:buSzPct val="100000"/>
+              <a:buChar char="•"/>
+            </a:pPr>
+            <a:r>
+              <a:rPr lang="en-US" sz="1200" i="1" dirty="0">
+                <a:solidFill>
+                  <a:srgbClr val="1C2833"/>
+                </a:solidFill>
+                <a:latin typeface="Arial" pitchFamily="34" charset="0"/>
+                <a:ea typeface="Arial" pitchFamily="34" charset="-122"/>
+                <a:cs typeface="Arial" pitchFamily="34" charset="-120"/>
+              </a:rPr>
+              <a:t>symmetry</a:t>
+            </a:r>
+            <a:pPr algn="l" indent="0" marL="0">
+              <a:lnSpc>
+                <a:spcPts val="1620"/>
+              </a:lnSpc>
+              <a:spcAft>
+                <a:spcPts val="300"/>
+              </a:spcAft>
+              <a:buNone/>
+            </a:pPr>
+            <a:r>
+              <a:rPr lang="en-US" sz="1200" dirty="0">
+                <a:solidFill>
+                  <a:srgbClr val="1C2833"/>
+                </a:solidFill>
+                <a:latin typeface="Arial" pitchFamily="34" charset="0"/>
+                <a:ea typeface="Arial" pitchFamily="34" charset="-122"/>
+                <a:cs typeface="Arial" pitchFamily="34" charset="-120"/>
+              </a:rPr>
+              <a:t> — a way of moving or flipping a figure so that it looks the same in a different orientation.</a:t>
+            </a:r>
+            <a:endParaRPr lang="en-US" sz="1200" dirty="0"/>
+          </a:p>
+          <a:p>
+            <a:pPr algn="l" marL="342900" indent="-342900">
+              <a:lnSpc>
+                <a:spcPts val="1620"/>
+              </a:lnSpc>
+              <a:spcAft>
+                <a:spcPts val="300"/>
+              </a:spcAft>
+              <a:buSzPct val="100000"/>
+              <a:buChar char="•"/>
+            </a:pPr>
+            <a:r>
+              <a:rPr lang="en-US" sz="1200" i="1" dirty="0">
+                <a:solidFill>
+                  <a:srgbClr val="1C2833"/>
+                </a:solidFill>
+                <a:latin typeface="Arial" pitchFamily="34" charset="0"/>
+                <a:ea typeface="Arial" pitchFamily="34" charset="-122"/>
+                <a:cs typeface="Arial" pitchFamily="34" charset="-120"/>
+              </a:rPr>
+              <a:t>rotation</a:t>
+            </a:r>
+            <a:pPr algn="l" indent="0" marL="0">
+              <a:lnSpc>
+                <a:spcPts val="1620"/>
+              </a:lnSpc>
+              <a:spcAft>
+                <a:spcPts val="300"/>
+              </a:spcAft>
+              <a:buNone/>
+            </a:pPr>
+            <a:r>
+              <a:rPr lang="en-US" sz="1200" dirty="0">
+                <a:solidFill>
+                  <a:srgbClr val="1C2833"/>
+                </a:solidFill>
+                <a:latin typeface="Arial" pitchFamily="34" charset="0"/>
+                <a:ea typeface="Arial" pitchFamily="34" charset="-122"/>
+                <a:cs typeface="Arial" pitchFamily="34" charset="-120"/>
+              </a:rPr>
+              <a:t> — turning around a centre by 90°, 180°, or 270°.</a:t>
+            </a:r>
+            <a:endParaRPr lang="en-US" sz="1200" dirty="0"/>
+          </a:p>
+          <a:p>
+            <a:pPr algn="l" marL="342900" indent="-342900">
+              <a:lnSpc>
+                <a:spcPts val="1620"/>
+              </a:lnSpc>
+              <a:spcAft>
+                <a:spcPts val="300"/>
+              </a:spcAft>
+              <a:buSzPct val="100000"/>
+              <a:buChar char="•"/>
+            </a:pPr>
+            <a:r>
+              <a:rPr lang="en-US" sz="1200" i="1" dirty="0">
+                <a:solidFill>
+                  <a:srgbClr val="1C2833"/>
+                </a:solidFill>
+                <a:latin typeface="Arial" pitchFamily="34" charset="0"/>
+                <a:ea typeface="Arial" pitchFamily="34" charset="-122"/>
+                <a:cs typeface="Arial" pitchFamily="34" charset="-120"/>
+              </a:rPr>
+              <a:t>reflection</a:t>
+            </a:r>
+            <a:pPr algn="l" indent="0" marL="0">
+              <a:lnSpc>
+                <a:spcPts val="1620"/>
+              </a:lnSpc>
+              <a:spcAft>
+                <a:spcPts val="300"/>
+              </a:spcAft>
+              <a:buNone/>
+            </a:pPr>
+            <a:r>
+              <a:rPr lang="en-US" sz="1200" dirty="0">
+                <a:solidFill>
+                  <a:srgbClr val="1C2833"/>
+                </a:solidFill>
+                <a:latin typeface="Arial" pitchFamily="34" charset="0"/>
+                <a:ea typeface="Arial" pitchFamily="34" charset="-122"/>
+                <a:cs typeface="Arial" pitchFamily="34" charset="-120"/>
+              </a:rPr>
+              <a:t> — flipping across a line (horizontal, vertical, or one of the diagonals).</a:t>
+            </a:r>
+            <a:endParaRPr lang="en-US" sz="1200" dirty="0"/>
+          </a:p>
+        </p:txBody>
+      </p:sp>
+      <p:sp>
+        <p:nvSpPr>
+          <p:cNvPr id="5" name="Text 3"/>
           <p:cNvSpPr/>
           <p:nvPr/>
         </p:nvSpPr>
@@ -4221,7 +6932,7 @@
                 <a:ea typeface="Georgia" pitchFamily="34" charset="-122"/>
                 <a:cs typeface="Georgia" pitchFamily="34" charset="-120"/>
               </a:rPr>
-              <a:t>Warm-up (5 min)</a:t>
+              <a:t>Lesson flow</a:t>
             </a:r>
             <a:endParaRPr lang="en-US" sz="1800" dirty="0"/>
           </a:p>
@@ -4230,100 +6941,6 @@
       <p:sp>
         <p:nvSpPr>
           <p:cNvPr id="4" name="Text 2"/>
-          <p:cNvSpPr/>
-          <p:nvPr/>
-        </p:nvSpPr>
-        <p:spPr>
-          <a:xfrm>
-            <a:off x="406301" y="870942"/>
-            <a:ext cx="8498026" cy="639812"/>
-          </a:xfrm>
-          <a:prstGeom prst="rect">
-            <a:avLst/>
-          </a:prstGeom>
-          <a:noFill/>
-          <a:ln/>
-        </p:spPr>
-        <p:txBody>
-          <a:bodyPr wrap="square" lIns="0" tIns="0" rIns="0" bIns="0" rtlCol="0" anchor="t"/>
-          <a:lstStyle/>
-          <a:p>
-            <a:pPr algn="l" indent="0" marL="0">
-              <a:lnSpc>
-                <a:spcPts val="1680"/>
-              </a:lnSpc>
-              <a:spcBef>
-                <a:spcPts val="300"/>
-              </a:spcBef>
-              <a:spcAft>
-                <a:spcPts val="300"/>
-              </a:spcAft>
-              <a:buNone/>
-            </a:pPr>
-            <a:r>
-              <a:rPr lang="en-US" sz="1200" dirty="0">
-                <a:solidFill>
-                  <a:srgbClr val="1C2833"/>
-                </a:solidFill>
-                <a:latin typeface="Arial" pitchFamily="34" charset="0"/>
-                <a:ea typeface="Arial" pitchFamily="34" charset="-122"/>
-                <a:cs typeface="Arial" pitchFamily="34" charset="-120"/>
-              </a:rPr>
-              <a:t>– Daily fluency: "row sums to 15 — give me the missing number." Quick 5 rounds. – Recall: </a:t>
-            </a:r>
-            <a:pPr algn="l" indent="0" marL="0">
-              <a:lnSpc>
-                <a:spcPts val="1680"/>
-              </a:lnSpc>
-              <a:spcBef>
-                <a:spcPts val="300"/>
-              </a:spcBef>
-              <a:spcAft>
-                <a:spcPts val="300"/>
-              </a:spcAft>
-              <a:buNone/>
-            </a:pPr>
-            <a:r>
-              <a:rPr lang="en-US" sz="1200" i="1" dirty="0">
-                <a:solidFill>
-                  <a:srgbClr val="1C2833"/>
-                </a:solidFill>
-                <a:latin typeface="Arial" pitchFamily="34" charset="0"/>
-                <a:ea typeface="Arial" pitchFamily="34" charset="-122"/>
-                <a:cs typeface="Arial" pitchFamily="34" charset="-120"/>
-              </a:rPr>
-              <a:t>"Yesterday we proved the magic constant for a 3×3 is 15. Today's question: how many different 3×3 magic squares with 1–9 are there?"</a:t>
-            </a:r>
-            <a:pPr algn="l" indent="0" marL="0">
-              <a:lnSpc>
-                <a:spcPts val="1680"/>
-              </a:lnSpc>
-              <a:spcBef>
-                <a:spcPts val="300"/>
-              </a:spcBef>
-              <a:spcAft>
-                <a:spcPts val="300"/>
-              </a:spcAft>
-              <a:buNone/>
-            </a:pPr>
-            <a:r>
-              <a:rPr lang="en-US" sz="1200" dirty="0">
-                <a:solidFill>
-                  <a:srgbClr val="1C2833"/>
-                </a:solidFill>
-                <a:latin typeface="Arial" pitchFamily="34" charset="0"/>
-                <a:ea typeface="Arial" pitchFamily="34" charset="-122"/>
-                <a:cs typeface="Arial" pitchFamily="34" charset="-120"/>
-              </a:rPr>
-              <a:t> – Take 3 student guesses. Write the guesses on the board.</a:t>
-            </a:r>
-            <a:endParaRPr lang="en-US" sz="1200" dirty="0"/>
-          </a:p>
-        </p:txBody>
-      </p:sp>
-      <p:sp>
-        <p:nvSpPr>
-          <p:cNvPr id="5" name="Text 3"/>
           <p:cNvSpPr/>
           <p:nvPr/>
         </p:nvSpPr>
@@ -4473,7 +7090,7 @@
                 <a:ea typeface="Georgia" pitchFamily="34" charset="-122"/>
                 <a:cs typeface="Georgia" pitchFamily="34" charset="-120"/>
               </a:rPr>
-              <a:t>Core (20 min)</a:t>
+              <a:t>Warm-up (5 min)</a:t>
             </a:r>
             <a:endParaRPr lang="en-US" sz="1800" dirty="0"/>
           </a:p>
@@ -4488,7 +7105,7 @@
         <p:spPr>
           <a:xfrm>
             <a:off x="634901" y="883593"/>
-            <a:ext cx="8102798" cy="281880"/>
+            <a:ext cx="8102798" cy="975122"/>
           </a:xfrm>
           <a:prstGeom prst="rect">
             <a:avLst/>
@@ -4511,24 +7128,28 @@
               <a:buChar char="•"/>
             </a:pPr>
             <a:r>
-              <a:rPr lang="en-US" sz="1200" b="1" dirty="0">
-                <a:solidFill>
-                  <a:srgbClr val="1C2833"/>
-                </a:solidFill>
-                <a:latin typeface="Arial" pitchFamily="34" charset="0"/>
-                <a:ea typeface="Arial" pitchFamily="34" charset="-122"/>
-                <a:cs typeface="Arial" pitchFamily="34" charset="-120"/>
-              </a:rPr>
-              <a:t>Why 5 must be in the centre.</a:t>
-            </a:r>
-            <a:pPr algn="l" indent="0" marL="0">
+              <a:rPr lang="en-US" sz="1200" dirty="0">
+                <a:solidFill>
+                  <a:srgbClr val="1C2833"/>
+                </a:solidFill>
+                <a:latin typeface="Arial" pitchFamily="34" charset="0"/>
+                <a:ea typeface="Arial" pitchFamily="34" charset="-122"/>
+                <a:cs typeface="Arial" pitchFamily="34" charset="-120"/>
+              </a:rPr>
+              <a:t>Daily fluency: "row sums to 15 — give me the missing number." Quick 5 rounds.</a:t>
+            </a:r>
+            <a:endParaRPr lang="en-US" sz="1200" dirty="0"/>
+          </a:p>
+          <a:p>
+            <a:pPr algn="l" marL="342900" indent="-342900">
               <a:lnSpc>
                 <a:spcPts val="1620"/>
               </a:lnSpc>
               <a:spcAft>
                 <a:spcPts val="300"/>
               </a:spcAft>
-              <a:buNone/>
+              <a:buSzPct val="100000"/>
+              <a:buChar char="•"/>
             </a:pPr>
             <a:r>
               <a:rPr lang="en-US" sz="1200" dirty="0">
@@ -4539,7 +7160,51 @@
                 <a:ea typeface="Arial" pitchFamily="34" charset="-122"/>
                 <a:cs typeface="Arial" pitchFamily="34" charset="-120"/>
               </a:rPr>
-              <a:t> Argue together:</a:t>
+              <a:t>Recall: </a:t>
+            </a:r>
+            <a:pPr algn="l" indent="0" marL="0">
+              <a:lnSpc>
+                <a:spcPts val="1620"/>
+              </a:lnSpc>
+              <a:spcAft>
+                <a:spcPts val="300"/>
+              </a:spcAft>
+              <a:buNone/>
+            </a:pPr>
+            <a:r>
+              <a:rPr lang="en-US" sz="1200" i="1" dirty="0">
+                <a:solidFill>
+                  <a:srgbClr val="1C2833"/>
+                </a:solidFill>
+                <a:latin typeface="Arial" pitchFamily="34" charset="0"/>
+                <a:ea typeface="Arial" pitchFamily="34" charset="-122"/>
+                <a:cs typeface="Arial" pitchFamily="34" charset="-120"/>
+              </a:rPr>
+              <a:t>"Yesterday we proved the magic constant for a 3×3 is 15. Today's question: how many different 3×3 magic squares with 1–9 are there?"</a:t>
+            </a:r>
+            <a:endParaRPr lang="en-US" sz="1200" dirty="0"/>
+          </a:p>
+          <a:p>
+            <a:pPr algn="l" marL="342900" indent="-342900">
+              <a:lnSpc>
+                <a:spcPts val="1620"/>
+              </a:lnSpc>
+              <a:spcAft>
+                <a:spcPts val="300"/>
+              </a:spcAft>
+              <a:buSzPct val="100000"/>
+              <a:buChar char="•"/>
+            </a:pPr>
+            <a:r>
+              <a:rPr lang="en-US" sz="1200" dirty="0">
+                <a:solidFill>
+                  <a:srgbClr val="1C2833"/>
+                </a:solidFill>
+                <a:latin typeface="Arial" pitchFamily="34" charset="0"/>
+                <a:ea typeface="Arial" pitchFamily="34" charset="-122"/>
+                <a:cs typeface="Arial" pitchFamily="34" charset="-120"/>
+              </a:rPr>
+              <a:t>Take 3 student guesses. Write the guesses on the board.</a:t>
             </a:r>
             <a:endParaRPr lang="en-US" sz="1200" dirty="0"/>
           </a:p>
@@ -4553,923 +7218,7 @@
         </p:nvSpPr>
         <p:spPr>
           <a:xfrm>
-            <a:off x="406301" y="1254323"/>
-            <a:ext cx="8498026" cy="1492895"/>
-          </a:xfrm>
-          <a:prstGeom prst="rect">
-            <a:avLst/>
-          </a:prstGeom>
-          <a:noFill/>
-          <a:ln/>
-        </p:spPr>
-        <p:txBody>
-          <a:bodyPr wrap="square" lIns="0" tIns="0" rIns="0" bIns="0" rtlCol="0" anchor="t"/>
-          <a:lstStyle/>
-          <a:p>
-            <a:pPr algn="l" indent="0" marL="0">
-              <a:lnSpc>
-                <a:spcPts val="1680"/>
-              </a:lnSpc>
-              <a:spcBef>
-                <a:spcPts val="300"/>
-              </a:spcBef>
-              <a:spcAft>
-                <a:spcPts val="300"/>
-              </a:spcAft>
-              <a:buNone/>
-            </a:pPr>
-            <a:r>
-              <a:rPr lang="en-US" sz="1200" dirty="0">
-                <a:solidFill>
-                  <a:srgbClr val="1C2833"/>
-                </a:solidFill>
-                <a:latin typeface="Arial" pitchFamily="34" charset="0"/>
-                <a:ea typeface="Arial" pitchFamily="34" charset="-122"/>
-                <a:cs typeface="Arial" pitchFamily="34" charset="-120"/>
-              </a:rPr>
-              <a:t>– The centre cell sits on 4 lines: the middle row, the middle column, and both diagonals. – The four corner cells each sit on 3 lines (a row, a column, and one diagonal). – The four edge-middle cells each sit on 2 lines (a row and a column). – Sum of all lines = 4 × 15 = 60 (4 lines through the centre? — actually 8 lines total in a 3×3: 3 rows + 3 columns + 2 diagonals. Their sum is 8 × 15 = 120.) – In that sum of 120, each cell is counted as many times as the number of lines it sits on: centre counted 4 times, corners 3 times each, edges 2 times each. – Total: 4</a:t>
-            </a:r>
-            <a:pPr algn="l" indent="0" marL="0">
-              <a:lnSpc>
-                <a:spcPts val="1680"/>
-              </a:lnSpc>
-              <a:spcBef>
-                <a:spcPts val="300"/>
-              </a:spcBef>
-              <a:spcAft>
-                <a:spcPts val="300"/>
-              </a:spcAft>
-              <a:buNone/>
-            </a:pPr>
-            <a:r>
-              <a:rPr lang="en-US" sz="1200" i="1" dirty="0">
-                <a:solidFill>
-                  <a:srgbClr val="1C2833"/>
-                </a:solidFill>
-                <a:latin typeface="Arial" pitchFamily="34" charset="0"/>
-                <a:ea typeface="Arial" pitchFamily="34" charset="-122"/>
-                <a:cs typeface="Arial" pitchFamily="34" charset="-120"/>
-              </a:rPr>
-              <a:t>c</a:t>
-            </a:r>
-            <a:pPr algn="l" indent="0" marL="0">
-              <a:lnSpc>
-                <a:spcPts val="1680"/>
-              </a:lnSpc>
-              <a:spcBef>
-                <a:spcPts val="300"/>
-              </a:spcBef>
-              <a:spcAft>
-                <a:spcPts val="300"/>
-              </a:spcAft>
-              <a:buNone/>
-            </a:pPr>
-            <a:r>
-              <a:rPr lang="en-US" sz="1200" dirty="0">
-                <a:solidFill>
-                  <a:srgbClr val="1C2833"/>
-                </a:solidFill>
-                <a:latin typeface="Arial" pitchFamily="34" charset="0"/>
-                <a:ea typeface="Arial" pitchFamily="34" charset="-122"/>
-                <a:cs typeface="Arial" pitchFamily="34" charset="-120"/>
-              </a:rPr>
-              <a:t> + 3</a:t>
-            </a:r>
-            <a:pPr algn="l" indent="0" marL="0">
-              <a:lnSpc>
-                <a:spcPts val="1680"/>
-              </a:lnSpc>
-              <a:spcBef>
-                <a:spcPts val="300"/>
-              </a:spcBef>
-              <a:spcAft>
-                <a:spcPts val="300"/>
-              </a:spcAft>
-              <a:buNone/>
-            </a:pPr>
-            <a:r>
-              <a:rPr lang="en-US" sz="1200" i="1" dirty="0">
-                <a:solidFill>
-                  <a:srgbClr val="1C2833"/>
-                </a:solidFill>
-                <a:latin typeface="Arial" pitchFamily="34" charset="0"/>
-                <a:ea typeface="Arial" pitchFamily="34" charset="-122"/>
-                <a:cs typeface="Arial" pitchFamily="34" charset="-120"/>
-              </a:rPr>
-              <a:t>(corner sum)</a:t>
-            </a:r>
-            <a:pPr algn="l" indent="0" marL="0">
-              <a:lnSpc>
-                <a:spcPts val="1680"/>
-              </a:lnSpc>
-              <a:spcBef>
-                <a:spcPts val="300"/>
-              </a:spcBef>
-              <a:spcAft>
-                <a:spcPts val="300"/>
-              </a:spcAft>
-              <a:buNone/>
-            </a:pPr>
-            <a:r>
-              <a:rPr lang="en-US" sz="1200" dirty="0">
-                <a:solidFill>
-                  <a:srgbClr val="1C2833"/>
-                </a:solidFill>
-                <a:latin typeface="Arial" pitchFamily="34" charset="0"/>
-                <a:ea typeface="Arial" pitchFamily="34" charset="-122"/>
-                <a:cs typeface="Arial" pitchFamily="34" charset="-120"/>
-              </a:rPr>
-              <a:t> + 2</a:t>
-            </a:r>
-            <a:pPr algn="l" indent="0" marL="0">
-              <a:lnSpc>
-                <a:spcPts val="1680"/>
-              </a:lnSpc>
-              <a:spcBef>
-                <a:spcPts val="300"/>
-              </a:spcBef>
-              <a:spcAft>
-                <a:spcPts val="300"/>
-              </a:spcAft>
-              <a:buNone/>
-            </a:pPr>
-            <a:r>
-              <a:rPr lang="en-US" sz="1200" i="1" dirty="0">
-                <a:solidFill>
-                  <a:srgbClr val="1C2833"/>
-                </a:solidFill>
-                <a:latin typeface="Arial" pitchFamily="34" charset="0"/>
-                <a:ea typeface="Arial" pitchFamily="34" charset="-122"/>
-                <a:cs typeface="Arial" pitchFamily="34" charset="-120"/>
-              </a:rPr>
-              <a:t>(edge sum)</a:t>
-            </a:r>
-            <a:pPr algn="l" indent="0" marL="0">
-              <a:lnSpc>
-                <a:spcPts val="1680"/>
-              </a:lnSpc>
-              <a:spcBef>
-                <a:spcPts val="300"/>
-              </a:spcBef>
-              <a:spcAft>
-                <a:spcPts val="300"/>
-              </a:spcAft>
-              <a:buNone/>
-            </a:pPr>
-            <a:r>
-              <a:rPr lang="en-US" sz="1200" dirty="0">
-                <a:solidFill>
-                  <a:srgbClr val="1C2833"/>
-                </a:solidFill>
-                <a:latin typeface="Arial" pitchFamily="34" charset="0"/>
-                <a:ea typeface="Arial" pitchFamily="34" charset="-122"/>
-                <a:cs typeface="Arial" pitchFamily="34" charset="-120"/>
-              </a:rPr>
-              <a:t> = 120, where </a:t>
-            </a:r>
-            <a:pPr algn="l" indent="0" marL="0">
-              <a:lnSpc>
-                <a:spcPts val="1680"/>
-              </a:lnSpc>
-              <a:spcBef>
-                <a:spcPts val="300"/>
-              </a:spcBef>
-              <a:spcAft>
-                <a:spcPts val="300"/>
-              </a:spcAft>
-              <a:buNone/>
-            </a:pPr>
-            <a:r>
-              <a:rPr lang="en-US" sz="1200" i="1" dirty="0">
-                <a:solidFill>
-                  <a:srgbClr val="1C2833"/>
-                </a:solidFill>
-                <a:latin typeface="Arial" pitchFamily="34" charset="0"/>
-                <a:ea typeface="Arial" pitchFamily="34" charset="-122"/>
-                <a:cs typeface="Arial" pitchFamily="34" charset="-120"/>
-              </a:rPr>
-              <a:t>c</a:t>
-            </a:r>
-            <a:pPr algn="l" indent="0" marL="0">
-              <a:lnSpc>
-                <a:spcPts val="1680"/>
-              </a:lnSpc>
-              <a:spcBef>
-                <a:spcPts val="300"/>
-              </a:spcBef>
-              <a:spcAft>
-                <a:spcPts val="300"/>
-              </a:spcAft>
-              <a:buNone/>
-            </a:pPr>
-            <a:r>
-              <a:rPr lang="en-US" sz="1200" dirty="0">
-                <a:solidFill>
-                  <a:srgbClr val="1C2833"/>
-                </a:solidFill>
-                <a:latin typeface="Arial" pitchFamily="34" charset="0"/>
-                <a:ea typeface="Arial" pitchFamily="34" charset="-122"/>
-                <a:cs typeface="Arial" pitchFamily="34" charset="-120"/>
-              </a:rPr>
-              <a:t> is the centre value. – Corner sum + edge sum + </a:t>
-            </a:r>
-            <a:pPr algn="l" indent="0" marL="0">
-              <a:lnSpc>
-                <a:spcPts val="1680"/>
-              </a:lnSpc>
-              <a:spcBef>
-                <a:spcPts val="300"/>
-              </a:spcBef>
-              <a:spcAft>
-                <a:spcPts val="300"/>
-              </a:spcAft>
-              <a:buNone/>
-            </a:pPr>
-            <a:r>
-              <a:rPr lang="en-US" sz="1200" i="1" dirty="0">
-                <a:solidFill>
-                  <a:srgbClr val="1C2833"/>
-                </a:solidFill>
-                <a:latin typeface="Arial" pitchFamily="34" charset="0"/>
-                <a:ea typeface="Arial" pitchFamily="34" charset="-122"/>
-                <a:cs typeface="Arial" pitchFamily="34" charset="-120"/>
-              </a:rPr>
-              <a:t>c</a:t>
-            </a:r>
-            <a:pPr algn="l" indent="0" marL="0">
-              <a:lnSpc>
-                <a:spcPts val="1680"/>
-              </a:lnSpc>
-              <a:spcBef>
-                <a:spcPts val="300"/>
-              </a:spcBef>
-              <a:spcAft>
-                <a:spcPts val="300"/>
-              </a:spcAft>
-              <a:buNone/>
-            </a:pPr>
-            <a:r>
-              <a:rPr lang="en-US" sz="1200" dirty="0">
-                <a:solidFill>
-                  <a:srgbClr val="1C2833"/>
-                </a:solidFill>
-                <a:latin typeface="Arial" pitchFamily="34" charset="0"/>
-                <a:ea typeface="Arial" pitchFamily="34" charset="-122"/>
-                <a:cs typeface="Arial" pitchFamily="34" charset="-120"/>
-              </a:rPr>
-              <a:t> = 45 (the total of 1..9). So 3</a:t>
-            </a:r>
-            <a:pPr algn="l" indent="0" marL="0">
-              <a:lnSpc>
-                <a:spcPts val="1680"/>
-              </a:lnSpc>
-              <a:spcBef>
-                <a:spcPts val="300"/>
-              </a:spcBef>
-              <a:spcAft>
-                <a:spcPts val="300"/>
-              </a:spcAft>
-              <a:buNone/>
-            </a:pPr>
-            <a:r>
-              <a:rPr lang="en-US" sz="1200" i="1" dirty="0">
-                <a:solidFill>
-                  <a:srgbClr val="1C2833"/>
-                </a:solidFill>
-                <a:latin typeface="Arial" pitchFamily="34" charset="0"/>
-                <a:ea typeface="Arial" pitchFamily="34" charset="-122"/>
-                <a:cs typeface="Arial" pitchFamily="34" charset="-120"/>
-              </a:rPr>
-              <a:t>(corner+edge)</a:t>
-            </a:r>
-            <a:pPr algn="l" indent="0" marL="0">
-              <a:lnSpc>
-                <a:spcPts val="1680"/>
-              </a:lnSpc>
-              <a:spcBef>
-                <a:spcPts val="300"/>
-              </a:spcBef>
-              <a:spcAft>
-                <a:spcPts val="300"/>
-              </a:spcAft>
-              <a:buNone/>
-            </a:pPr>
-            <a:r>
-              <a:rPr lang="en-US" sz="1200" dirty="0">
-                <a:solidFill>
-                  <a:srgbClr val="1C2833"/>
-                </a:solidFill>
-                <a:latin typeface="Arial" pitchFamily="34" charset="0"/>
-                <a:ea typeface="Arial" pitchFamily="34" charset="-122"/>
-                <a:cs typeface="Arial" pitchFamily="34" charset="-120"/>
-              </a:rPr>
-              <a:t> + 4</a:t>
-            </a:r>
-            <a:pPr algn="l" indent="0" marL="0">
-              <a:lnSpc>
-                <a:spcPts val="1680"/>
-              </a:lnSpc>
-              <a:spcBef>
-                <a:spcPts val="300"/>
-              </a:spcBef>
-              <a:spcAft>
-                <a:spcPts val="300"/>
-              </a:spcAft>
-              <a:buNone/>
-            </a:pPr>
-            <a:r>
-              <a:rPr lang="en-US" sz="1200" i="1" dirty="0">
-                <a:solidFill>
-                  <a:srgbClr val="1C2833"/>
-                </a:solidFill>
-                <a:latin typeface="Arial" pitchFamily="34" charset="0"/>
-                <a:ea typeface="Arial" pitchFamily="34" charset="-122"/>
-                <a:cs typeface="Arial" pitchFamily="34" charset="-120"/>
-              </a:rPr>
-              <a:t>c</a:t>
-            </a:r>
-            <a:pPr algn="l" indent="0" marL="0">
-              <a:lnSpc>
-                <a:spcPts val="1680"/>
-              </a:lnSpc>
-              <a:spcBef>
-                <a:spcPts val="300"/>
-              </a:spcBef>
-              <a:spcAft>
-                <a:spcPts val="300"/>
-              </a:spcAft>
-              <a:buNone/>
-            </a:pPr>
-            <a:r>
-              <a:rPr lang="en-US" sz="1200" dirty="0">
-                <a:solidFill>
-                  <a:srgbClr val="1C2833"/>
-                </a:solidFill>
-                <a:latin typeface="Arial" pitchFamily="34" charset="0"/>
-                <a:ea typeface="Arial" pitchFamily="34" charset="-122"/>
-                <a:cs typeface="Arial" pitchFamily="34" charset="-120"/>
-              </a:rPr>
-              <a:t> + ... — work it out together. The cleanest answer: </a:t>
-            </a:r>
-            <a:pPr algn="l" indent="0" marL="0">
-              <a:lnSpc>
-                <a:spcPts val="1680"/>
-              </a:lnSpc>
-              <a:spcBef>
-                <a:spcPts val="300"/>
-              </a:spcBef>
-              <a:spcAft>
-                <a:spcPts val="300"/>
-              </a:spcAft>
-              <a:buNone/>
-            </a:pPr>
-            <a:r>
-              <a:rPr lang="en-US" sz="1200" i="1" dirty="0">
-                <a:solidFill>
-                  <a:srgbClr val="1C2833"/>
-                </a:solidFill>
-                <a:latin typeface="Arial" pitchFamily="34" charset="0"/>
-                <a:ea typeface="Arial" pitchFamily="34" charset="-122"/>
-                <a:cs typeface="Arial" pitchFamily="34" charset="-120"/>
-              </a:rPr>
-              <a:t>c</a:t>
-            </a:r>
-            <a:pPr algn="l" indent="0" marL="0">
-              <a:lnSpc>
-                <a:spcPts val="1680"/>
-              </a:lnSpc>
-              <a:spcBef>
-                <a:spcPts val="300"/>
-              </a:spcBef>
-              <a:spcAft>
-                <a:spcPts val="300"/>
-              </a:spcAft>
-              <a:buNone/>
-            </a:pPr>
-            <a:r>
-              <a:rPr lang="en-US" sz="1200" dirty="0">
-                <a:solidFill>
-                  <a:srgbClr val="1C2833"/>
-                </a:solidFill>
-                <a:latin typeface="Arial" pitchFamily="34" charset="0"/>
-                <a:ea typeface="Arial" pitchFamily="34" charset="-122"/>
-                <a:cs typeface="Arial" pitchFamily="34" charset="-120"/>
-              </a:rPr>
-              <a:t> = 5.</a:t>
-            </a:r>
-            <a:endParaRPr lang="en-US" sz="1200" dirty="0"/>
-          </a:p>
-        </p:txBody>
-      </p:sp>
-      <p:sp>
-        <p:nvSpPr>
-          <p:cNvPr id="6" name="Text 4"/>
-          <p:cNvSpPr/>
-          <p:nvPr/>
-        </p:nvSpPr>
-        <p:spPr>
-          <a:xfrm>
-            <a:off x="406301" y="2823418"/>
-            <a:ext cx="8498026" cy="213271"/>
-          </a:xfrm>
-          <a:prstGeom prst="rect">
-            <a:avLst/>
-          </a:prstGeom>
-          <a:noFill/>
-          <a:ln/>
-        </p:spPr>
-        <p:txBody>
-          <a:bodyPr wrap="square" lIns="0" tIns="0" rIns="0" bIns="0" rtlCol="0" anchor="t"/>
-          <a:lstStyle/>
-          <a:p>
-            <a:pPr algn="l" indent="0" marL="0">
-              <a:lnSpc>
-                <a:spcPts val="1680"/>
-              </a:lnSpc>
-              <a:spcBef>
-                <a:spcPts val="300"/>
-              </a:spcBef>
-              <a:spcAft>
-                <a:spcPts val="300"/>
-              </a:spcAft>
-              <a:buNone/>
-            </a:pPr>
-            <a:r>
-              <a:rPr lang="en-US" sz="1200" i="1" dirty="0">
-                <a:solidFill>
-                  <a:srgbClr val="1C2833"/>
-                </a:solidFill>
-                <a:latin typeface="Arial" pitchFamily="34" charset="0"/>
-                <a:ea typeface="Arial" pitchFamily="34" charset="-122"/>
-                <a:cs typeface="Arial" pitchFamily="34" charset="-120"/>
-              </a:rPr>
-              <a:t>(Don't make them complete the full algebra — show the structure, conclude 5 = centre.)</a:t>
-            </a:r>
-            <a:endParaRPr lang="en-US" sz="1200" dirty="0"/>
-          </a:p>
-        </p:txBody>
-      </p:sp>
-      <p:sp>
-        <p:nvSpPr>
-          <p:cNvPr id="7" name="Text 5"/>
-          <p:cNvSpPr/>
-          <p:nvPr/>
-        </p:nvSpPr>
-        <p:spPr>
-          <a:xfrm>
-            <a:off x="634901" y="3125539"/>
-            <a:ext cx="8102798" cy="1104602"/>
-          </a:xfrm>
-          <a:prstGeom prst="rect">
-            <a:avLst/>
-          </a:prstGeom>
-          <a:noFill/>
-          <a:ln/>
-        </p:spPr>
-        <p:txBody>
-          <a:bodyPr wrap="square" lIns="0" tIns="0" rIns="0" bIns="0" rtlCol="0" anchor="t"/>
-          <a:lstStyle/>
-          <a:p>
-            <a:pPr algn="l" marL="342900" indent="-342900">
-              <a:lnSpc>
-                <a:spcPts val="1620"/>
-              </a:lnSpc>
-              <a:spcAft>
-                <a:spcPts val="300"/>
-              </a:spcAft>
-              <a:buSzPct val="100000"/>
-              <a:buChar char="•"/>
-            </a:pPr>
-            <a:r>
-              <a:rPr lang="en-US" sz="1200" b="1" dirty="0">
-                <a:solidFill>
-                  <a:srgbClr val="1C2833"/>
-                </a:solidFill>
-                <a:latin typeface="Arial" pitchFamily="34" charset="0"/>
-                <a:ea typeface="Arial" pitchFamily="34" charset="-122"/>
-                <a:cs typeface="Arial" pitchFamily="34" charset="-120"/>
-              </a:rPr>
-              <a:t>Why 2, 4, 6, 8 must be at corners.</a:t>
-            </a:r>
-            <a:pPr algn="l" indent="0" marL="0">
-              <a:lnSpc>
-                <a:spcPts val="1620"/>
-              </a:lnSpc>
-              <a:spcAft>
-                <a:spcPts val="300"/>
-              </a:spcAft>
-              <a:buNone/>
-            </a:pPr>
-            <a:r>
-              <a:rPr lang="en-US" sz="1200" dirty="0">
-                <a:solidFill>
-                  <a:srgbClr val="1C2833"/>
-                </a:solidFill>
-                <a:latin typeface="Arial" pitchFamily="34" charset="0"/>
-                <a:ea typeface="Arial" pitchFamily="34" charset="-122"/>
-                <a:cs typeface="Arial" pitchFamily="34" charset="-120"/>
-              </a:rPr>
-              <a:t> The four corner cells must contain the four </a:t>
-            </a:r>
-            <a:pPr algn="l" indent="0" marL="0">
-              <a:lnSpc>
-                <a:spcPts val="1620"/>
-              </a:lnSpc>
-              <a:spcAft>
-                <a:spcPts val="300"/>
-              </a:spcAft>
-              <a:buNone/>
-            </a:pPr>
-            <a:r>
-              <a:rPr lang="en-US" sz="1200" i="1" dirty="0">
-                <a:solidFill>
-                  <a:srgbClr val="1C2833"/>
-                </a:solidFill>
-                <a:latin typeface="Arial" pitchFamily="34" charset="0"/>
-                <a:ea typeface="Arial" pitchFamily="34" charset="-122"/>
-                <a:cs typeface="Arial" pitchFamily="34" charset="-120"/>
-              </a:rPr>
-              <a:t>even</a:t>
-            </a:r>
-            <a:pPr algn="l" indent="0" marL="0">
-              <a:lnSpc>
-                <a:spcPts val="1620"/>
-              </a:lnSpc>
-              <a:spcAft>
-                <a:spcPts val="300"/>
-              </a:spcAft>
-              <a:buNone/>
-            </a:pPr>
-            <a:r>
-              <a:rPr lang="en-US" sz="1200" dirty="0">
-                <a:solidFill>
-                  <a:srgbClr val="1C2833"/>
-                </a:solidFill>
-                <a:latin typeface="Arial" pitchFamily="34" charset="0"/>
-                <a:ea typeface="Arial" pitchFamily="34" charset="-122"/>
-                <a:cs typeface="Arial" pitchFamily="34" charset="-120"/>
-              </a:rPr>
-              <a:t> numbers from 1–9 (which are 2, 4, 6, 8). Reason: corners sit on diagonals — and the diagonals also sum to 15. With 5 in the centre, each diagonal pair must sum to 10. Pairs from 1–9 (excluding 5) summing to 10 are (1,9), (2,8), (3,7), (4,6). The two diagonals use four of these — pick any two pairs. The remaining four numbers (the odd or even ones, depending on the pair choice) end up at the edges. Most cleanly: even numbers at corners.</a:t>
-            </a:r>
-            <a:endParaRPr lang="en-US" sz="1200" dirty="0"/>
-          </a:p>
-        </p:txBody>
-      </p:sp>
-      <p:sp>
-        <p:nvSpPr>
-          <p:cNvPr id="8" name="Text 6"/>
-          <p:cNvSpPr/>
-          <p:nvPr/>
-        </p:nvSpPr>
-        <p:spPr>
-          <a:xfrm>
-            <a:off x="634901" y="4331643"/>
-            <a:ext cx="8102798" cy="281880"/>
-          </a:xfrm>
-          <a:prstGeom prst="rect">
-            <a:avLst/>
-          </a:prstGeom>
-          <a:noFill/>
-          <a:ln/>
-        </p:spPr>
-        <p:txBody>
-          <a:bodyPr wrap="square" lIns="0" tIns="0" rIns="0" bIns="0" rtlCol="0" anchor="t"/>
-          <a:lstStyle/>
-          <a:p>
-            <a:pPr algn="l" marL="342900" indent="-342900">
-              <a:lnSpc>
-                <a:spcPts val="1620"/>
-              </a:lnSpc>
-              <a:spcAft>
-                <a:spcPts val="300"/>
-              </a:spcAft>
-              <a:buSzPct val="100000"/>
-              <a:buChar char="•"/>
-            </a:pPr>
-            <a:r>
-              <a:rPr lang="en-US" sz="1200" b="1" dirty="0">
-                <a:solidFill>
-                  <a:srgbClr val="1C2833"/>
-                </a:solidFill>
-                <a:latin typeface="Arial" pitchFamily="34" charset="0"/>
-                <a:ea typeface="Arial" pitchFamily="34" charset="-122"/>
-                <a:cs typeface="Arial" pitchFamily="34" charset="-120"/>
-              </a:rPr>
-              <a:t>The 8 symmetries.</a:t>
-            </a:r>
-            <a:pPr algn="l" indent="0" marL="0">
-              <a:lnSpc>
-                <a:spcPts val="1620"/>
-              </a:lnSpc>
-              <a:spcAft>
-                <a:spcPts val="300"/>
-              </a:spcAft>
-              <a:buNone/>
-            </a:pPr>
-            <a:r>
-              <a:rPr lang="en-US" sz="1200" dirty="0">
-                <a:solidFill>
-                  <a:srgbClr val="1C2833"/>
-                </a:solidFill>
-                <a:latin typeface="Arial" pitchFamily="34" charset="0"/>
-                <a:ea typeface="Arial" pitchFamily="34" charset="-122"/>
-                <a:cs typeface="Arial" pitchFamily="34" charset="-120"/>
-              </a:rPr>
-              <a:t> Demonstrate on the board. Take the Day-1 square and:</a:t>
-            </a:r>
-            <a:endParaRPr lang="en-US" sz="1200" dirty="0"/>
-          </a:p>
-        </p:txBody>
-      </p:sp>
-      <p:sp>
-        <p:nvSpPr>
-          <p:cNvPr id="9" name="Text 7"/>
-          <p:cNvSpPr/>
-          <p:nvPr/>
-        </p:nvSpPr>
-        <p:spPr>
-          <a:xfrm>
-            <a:off x="406301" y="4702373"/>
-            <a:ext cx="8498026" cy="426541"/>
-          </a:xfrm>
-          <a:prstGeom prst="rect">
-            <a:avLst/>
-          </a:prstGeom>
-          <a:noFill/>
-          <a:ln/>
-        </p:spPr>
-        <p:txBody>
-          <a:bodyPr wrap="square" lIns="0" tIns="0" rIns="0" bIns="0" rtlCol="0" anchor="t"/>
-          <a:lstStyle/>
-          <a:p>
-            <a:pPr algn="l" indent="0" marL="0">
-              <a:lnSpc>
-                <a:spcPts val="1680"/>
-              </a:lnSpc>
-              <a:spcBef>
-                <a:spcPts val="300"/>
-              </a:spcBef>
-              <a:spcAft>
-                <a:spcPts val="300"/>
-              </a:spcAft>
-              <a:buNone/>
-            </a:pPr>
-            <a:r>
-              <a:rPr lang="en-US" sz="1200" dirty="0">
-                <a:solidFill>
-                  <a:srgbClr val="1C2833"/>
-                </a:solidFill>
-                <a:latin typeface="Arial" pitchFamily="34" charset="0"/>
-                <a:ea typeface="Arial" pitchFamily="34" charset="-122"/>
-                <a:cs typeface="Arial" pitchFamily="34" charset="-120"/>
-              </a:rPr>
-              <a:t>– Rotate 90°, 180°, 270° — three new arrangements. – Reflect horizontally, vertically, and across each diagonal — four more. – Total: 8 different-looking arrangements, all the </a:t>
-            </a:r>
-            <a:pPr algn="l" indent="0" marL="0">
-              <a:lnSpc>
-                <a:spcPts val="1680"/>
-              </a:lnSpc>
-              <a:spcBef>
-                <a:spcPts val="300"/>
-              </a:spcBef>
-              <a:spcAft>
-                <a:spcPts val="300"/>
-              </a:spcAft>
-              <a:buNone/>
-            </a:pPr>
-            <a:r>
-              <a:rPr lang="en-US" sz="1200" i="1" dirty="0">
-                <a:solidFill>
-                  <a:srgbClr val="1C2833"/>
-                </a:solidFill>
-                <a:latin typeface="Arial" pitchFamily="34" charset="0"/>
-                <a:ea typeface="Arial" pitchFamily="34" charset="-122"/>
-                <a:cs typeface="Arial" pitchFamily="34" charset="-120"/>
-              </a:rPr>
-              <a:t>same</a:t>
-            </a:r>
-            <a:pPr algn="l" indent="0" marL="0">
-              <a:lnSpc>
-                <a:spcPts val="1680"/>
-              </a:lnSpc>
-              <a:spcBef>
-                <a:spcPts val="300"/>
-              </a:spcBef>
-              <a:spcAft>
-                <a:spcPts val="300"/>
-              </a:spcAft>
-              <a:buNone/>
-            </a:pPr>
-            <a:r>
-              <a:rPr lang="en-US" sz="1200" dirty="0">
-                <a:solidFill>
-                  <a:srgbClr val="1C2833"/>
-                </a:solidFill>
-                <a:latin typeface="Arial" pitchFamily="34" charset="0"/>
-                <a:ea typeface="Arial" pitchFamily="34" charset="-122"/>
-                <a:cs typeface="Arial" pitchFamily="34" charset="-120"/>
-              </a:rPr>
-              <a:t> magic square up to symmetry.</a:t>
-            </a:r>
-            <a:endParaRPr lang="en-US" sz="1200" dirty="0"/>
-          </a:p>
-        </p:txBody>
-      </p:sp>
-      <p:sp>
-        <p:nvSpPr>
-          <p:cNvPr id="10" name="Text 8"/>
-          <p:cNvSpPr/>
-          <p:nvPr/>
-        </p:nvSpPr>
-        <p:spPr>
-          <a:xfrm>
-            <a:off x="406301" y="5205115"/>
-            <a:ext cx="8498026" cy="426541"/>
-          </a:xfrm>
-          <a:prstGeom prst="rect">
-            <a:avLst/>
-          </a:prstGeom>
-          <a:noFill/>
-          <a:ln/>
-        </p:spPr>
-        <p:txBody>
-          <a:bodyPr wrap="square" lIns="0" tIns="0" rIns="0" bIns="0" rtlCol="0" anchor="t"/>
-          <a:lstStyle/>
-          <a:p>
-            <a:pPr algn="l" indent="0" marL="0">
-              <a:lnSpc>
-                <a:spcPts val="1680"/>
-              </a:lnSpc>
-              <a:spcBef>
-                <a:spcPts val="300"/>
-              </a:spcBef>
-              <a:spcAft>
-                <a:spcPts val="300"/>
-              </a:spcAft>
-              <a:buNone/>
-            </a:pPr>
-            <a:r>
-              <a:rPr lang="en-US" sz="1200" dirty="0">
-                <a:solidFill>
-                  <a:srgbClr val="1C2833"/>
-                </a:solidFill>
-                <a:latin typeface="Arial" pitchFamily="34" charset="0"/>
-                <a:ea typeface="Arial" pitchFamily="34" charset="-122"/>
-                <a:cs typeface="Arial" pitchFamily="34" charset="-120"/>
-              </a:rPr>
-              <a:t>&gt; </a:t>
-            </a:r>
-            <a:pPr algn="l" indent="0" marL="0">
-              <a:lnSpc>
-                <a:spcPts val="1680"/>
-              </a:lnSpc>
-              <a:spcBef>
-                <a:spcPts val="300"/>
-              </a:spcBef>
-              <a:spcAft>
-                <a:spcPts val="300"/>
-              </a:spcAft>
-              <a:buNone/>
-            </a:pPr>
-            <a:r>
-              <a:rPr lang="en-US" sz="1200" b="1" dirty="0">
-                <a:solidFill>
-                  <a:srgbClr val="1C2833"/>
-                </a:solidFill>
-                <a:latin typeface="Arial" pitchFamily="34" charset="0"/>
-                <a:ea typeface="Arial" pitchFamily="34" charset="-122"/>
-                <a:cs typeface="Arial" pitchFamily="34" charset="-120"/>
-              </a:rPr>
-              <a:t>Theorem (state, don't prove):</a:t>
-            </a:r>
-            <a:pPr algn="l" indent="0" marL="0">
-              <a:lnSpc>
-                <a:spcPts val="1680"/>
-              </a:lnSpc>
-              <a:spcBef>
-                <a:spcPts val="300"/>
-              </a:spcBef>
-              <a:spcAft>
-                <a:spcPts val="300"/>
-              </a:spcAft>
-              <a:buNone/>
-            </a:pPr>
-            <a:r>
-              <a:rPr lang="en-US" sz="1200" dirty="0">
-                <a:solidFill>
-                  <a:srgbClr val="1C2833"/>
-                </a:solidFill>
-                <a:latin typeface="Arial" pitchFamily="34" charset="0"/>
-                <a:ea typeface="Arial" pitchFamily="34" charset="-122"/>
-                <a:cs typeface="Arial" pitchFamily="34" charset="-120"/>
-              </a:rPr>
-              <a:t> There is exactly </a:t>
-            </a:r>
-            <a:pPr algn="l" indent="0" marL="0">
-              <a:lnSpc>
-                <a:spcPts val="1680"/>
-              </a:lnSpc>
-              <a:spcBef>
-                <a:spcPts val="300"/>
-              </a:spcBef>
-              <a:spcAft>
-                <a:spcPts val="300"/>
-              </a:spcAft>
-              <a:buNone/>
-            </a:pPr>
-            <a:r>
-              <a:rPr lang="en-US" sz="1200" b="1" dirty="0">
-                <a:solidFill>
-                  <a:srgbClr val="1C2833"/>
-                </a:solidFill>
-                <a:latin typeface="Arial" pitchFamily="34" charset="0"/>
-                <a:ea typeface="Arial" pitchFamily="34" charset="-122"/>
-                <a:cs typeface="Arial" pitchFamily="34" charset="-120"/>
-              </a:rPr>
-              <a:t>ONE</a:t>
-            </a:r>
-            <a:pPr algn="l" indent="0" marL="0">
-              <a:lnSpc>
-                <a:spcPts val="1680"/>
-              </a:lnSpc>
-              <a:spcBef>
-                <a:spcPts val="300"/>
-              </a:spcBef>
-              <a:spcAft>
-                <a:spcPts val="300"/>
-              </a:spcAft>
-              <a:buNone/>
-            </a:pPr>
-            <a:r>
-              <a:rPr lang="en-US" sz="1200" dirty="0">
-                <a:solidFill>
-                  <a:srgbClr val="1C2833"/>
-                </a:solidFill>
-                <a:latin typeface="Arial" pitchFamily="34" charset="0"/>
-                <a:ea typeface="Arial" pitchFamily="34" charset="-122"/>
-                <a:cs typeface="Arial" pitchFamily="34" charset="-120"/>
-              </a:rPr>
-              <a:t> 3×3 magic square with 1–9, </a:t>
-            </a:r>
-            <a:pPr algn="l" indent="0" marL="0">
-              <a:lnSpc>
-                <a:spcPts val="1680"/>
-              </a:lnSpc>
-              <a:spcBef>
-                <a:spcPts val="300"/>
-              </a:spcBef>
-              <a:spcAft>
-                <a:spcPts val="300"/>
-              </a:spcAft>
-              <a:buNone/>
-            </a:pPr>
-            <a:r>
-              <a:rPr lang="en-US" sz="1200" i="1" dirty="0">
-                <a:solidFill>
-                  <a:srgbClr val="1C2833"/>
-                </a:solidFill>
-                <a:latin typeface="Arial" pitchFamily="34" charset="0"/>
-                <a:ea typeface="Arial" pitchFamily="34" charset="-122"/>
-                <a:cs typeface="Arial" pitchFamily="34" charset="-120"/>
-              </a:rPr>
-              <a:t>up to symmetry</a:t>
-            </a:r>
-            <a:pPr algn="l" indent="0" marL="0">
-              <a:lnSpc>
-                <a:spcPts val="1680"/>
-              </a:lnSpc>
-              <a:spcBef>
-                <a:spcPts val="300"/>
-              </a:spcBef>
-              <a:spcAft>
-                <a:spcPts val="300"/>
-              </a:spcAft>
-              <a:buNone/>
-            </a:pPr>
-            <a:r>
-              <a:rPr lang="en-US" sz="1200" dirty="0">
-                <a:solidFill>
-                  <a:srgbClr val="1C2833"/>
-                </a:solidFill>
-                <a:latin typeface="Arial" pitchFamily="34" charset="0"/>
-                <a:ea typeface="Arial" pitchFamily="34" charset="-122"/>
-                <a:cs typeface="Arial" pitchFamily="34" charset="-120"/>
-              </a:rPr>
-              <a:t>. Counting all 8 rotated/reflected versions, you get 8 grids that all share the same essential structure.</a:t>
-            </a:r>
-            <a:endParaRPr lang="en-US" sz="1200" dirty="0"/>
-          </a:p>
-        </p:txBody>
-      </p:sp>
-      <p:sp>
-        <p:nvSpPr>
-          <p:cNvPr id="11" name="Text 9"/>
-          <p:cNvSpPr/>
-          <p:nvPr/>
-        </p:nvSpPr>
-        <p:spPr>
-          <a:xfrm>
-            <a:off x="406301" y="5784056"/>
+            <a:off x="406301" y="4434929"/>
             <a:ext cx="8498026" cy="213271"/>
           </a:xfrm>
           <a:prstGeom prst="rect">
@@ -5613,7 +7362,7 @@
                 <a:ea typeface="Georgia" pitchFamily="34" charset="-122"/>
                 <a:cs typeface="Georgia" pitchFamily="34" charset="-120"/>
               </a:rPr>
-              <a:t>Activity (15 min) — Find all 8</a:t>
+              <a:t>Core (20 min)</a:t>
             </a:r>
             <a:endParaRPr lang="en-US" sz="1800" dirty="0"/>
           </a:p>
@@ -5627,8 +7376,8 @@
         </p:nvSpPr>
         <p:spPr>
           <a:xfrm>
-            <a:off x="406301" y="870942"/>
-            <a:ext cx="8498026" cy="426541"/>
+            <a:off x="634901" y="883593"/>
+            <a:ext cx="8102798" cy="281880"/>
           </a:xfrm>
           <a:prstGeom prst="rect">
             <a:avLst/>
@@ -5640,13 +7389,31 @@
           <a:bodyPr wrap="square" lIns="0" tIns="0" rIns="0" bIns="0" rtlCol="0" anchor="t"/>
           <a:lstStyle/>
           <a:p>
-            <a:pPr algn="l" indent="0" marL="0">
-              <a:lnSpc>
-                <a:spcPts val="1680"/>
-              </a:lnSpc>
-              <a:spcBef>
-                <a:spcPts val="300"/>
-              </a:spcBef>
+            <a:pPr algn="l" marL="342900" indent="-342900">
+              <a:lnSpc>
+                <a:spcPts val="1620"/>
+              </a:lnSpc>
+              <a:spcAft>
+                <a:spcPts val="300"/>
+              </a:spcAft>
+              <a:buSzPct val="100000"/>
+              <a:buChar char="•"/>
+            </a:pPr>
+            <a:r>
+              <a:rPr lang="en-US" sz="1200" b="1" dirty="0">
+                <a:solidFill>
+                  <a:srgbClr val="1C2833"/>
+                </a:solidFill>
+                <a:latin typeface="Arial" pitchFamily="34" charset="0"/>
+                <a:ea typeface="Arial" pitchFamily="34" charset="-122"/>
+                <a:cs typeface="Arial" pitchFamily="34" charset="-120"/>
+              </a:rPr>
+              <a:t>Why 5 must be in the centre.</a:t>
+            </a:r>
+            <a:pPr algn="l" indent="0" marL="0">
+              <a:lnSpc>
+                <a:spcPts val="1620"/>
+              </a:lnSpc>
               <a:spcAft>
                 <a:spcPts val="300"/>
               </a:spcAft>
@@ -5661,7 +7428,7 @@
                 <a:ea typeface="Arial" pitchFamily="34" charset="-122"/>
                 <a:cs typeface="Arial" pitchFamily="34" charset="-120"/>
               </a:rPr>
-              <a:t>– Each pair starts with the Day-1 square. They must produce all 8 rotated/reflected versions on their own paper. – Verify each by checking one row sums to 15. – Pair share: any two pairs swap, and compare — did they get the same 8?</a:t>
+              <a:t> Argue together:</a:t>
             </a:r>
             <a:endParaRPr lang="en-US" sz="1200" dirty="0"/>
           </a:p>
@@ -5819,7 +7586,7 @@
                 <a:ea typeface="Georgia" pitchFamily="34" charset="-122"/>
                 <a:cs typeface="Georgia" pitchFamily="34" charset="-120"/>
               </a:rPr>
-              <a:t>Wrap-up (5 min)</a:t>
+              <a:t>Core (20 min) (cont.)</a:t>
             </a:r>
             <a:endParaRPr lang="en-US" sz="1800" dirty="0"/>
           </a:p>
@@ -5834,7 +7601,7 @@
         <p:spPr>
           <a:xfrm>
             <a:off x="634901" y="883593"/>
-            <a:ext cx="8102798" cy="487561"/>
+            <a:ext cx="8102798" cy="1668363"/>
           </a:xfrm>
           <a:prstGeom prst="rect">
             <a:avLst/>
@@ -5857,24 +7624,28 @@
               <a:buChar char="•"/>
             </a:pPr>
             <a:r>
-              <a:rPr lang="en-US" sz="1200" i="1" dirty="0">
-                <a:solidFill>
-                  <a:srgbClr val="1C2833"/>
-                </a:solidFill>
-                <a:latin typeface="Arial" pitchFamily="34" charset="0"/>
-                <a:ea typeface="Arial" pitchFamily="34" charset="-122"/>
-                <a:cs typeface="Arial" pitchFamily="34" charset="-120"/>
-              </a:rPr>
-              <a:t>"There is essentially ONE 3×3 magic square with 1–9. Eight different orientations of the same square. Tomorrow we ask: is there a</a:t>
-            </a:r>
-            <a:pPr algn="l" indent="0" marL="0">
+              <a:rPr lang="en-US" sz="1200" dirty="0">
+                <a:solidFill>
+                  <a:srgbClr val="1C2833"/>
+                </a:solidFill>
+                <a:latin typeface="Arial" pitchFamily="34" charset="0"/>
+                <a:ea typeface="Arial" pitchFamily="34" charset="-122"/>
+                <a:cs typeface="Arial" pitchFamily="34" charset="-120"/>
+              </a:rPr>
+              <a:t>The centre cell sits on 4 lines: the middle row, the middle column, and both diagonals.</a:t>
+            </a:r>
+            <a:endParaRPr lang="en-US" sz="1200" dirty="0"/>
+          </a:p>
+          <a:p>
+            <a:pPr algn="l" marL="342900" indent="-342900">
               <a:lnSpc>
                 <a:spcPts val="1620"/>
               </a:lnSpc>
               <a:spcAft>
                 <a:spcPts val="300"/>
               </a:spcAft>
-              <a:buNone/>
+              <a:buSzPct val="100000"/>
+              <a:buChar char="•"/>
             </a:pPr>
             <a:r>
               <a:rPr lang="en-US" sz="1200" dirty="0">
@@ -5885,83 +7656,87 @@
                 <a:ea typeface="Arial" pitchFamily="34" charset="-122"/>
                 <a:cs typeface="Arial" pitchFamily="34" charset="-120"/>
               </a:rPr>
-              <a:t>method</a:t>
-            </a:r>
-            <a:pPr algn="l" indent="0" marL="0">
+              <a:t>The four corner cells each sit on 3 lines (a row, a column, and one diagonal).</a:t>
+            </a:r>
+            <a:endParaRPr lang="en-US" sz="1200" dirty="0"/>
+          </a:p>
+          <a:p>
+            <a:pPr algn="l" marL="342900" indent="-342900">
               <a:lnSpc>
                 <a:spcPts val="1620"/>
               </a:lnSpc>
               <a:spcAft>
                 <a:spcPts val="300"/>
               </a:spcAft>
-              <a:buNone/>
-            </a:pPr>
-            <a:r>
-              <a:rPr lang="en-US" sz="1200" i="1" dirty="0">
-                <a:solidFill>
-                  <a:srgbClr val="1C2833"/>
-                </a:solidFill>
-                <a:latin typeface="Arial" pitchFamily="34" charset="0"/>
-                <a:ea typeface="Arial" pitchFamily="34" charset="-122"/>
-                <a:cs typeface="Arial" pitchFamily="34" charset="-120"/>
-              </a:rPr>
-              <a:t> to construct magic squares of any size — not just 3×3?"</a:t>
+              <a:buSzPct val="100000"/>
+              <a:buChar char="•"/>
+            </a:pPr>
+            <a:r>
+              <a:rPr lang="en-US" sz="1200" dirty="0">
+                <a:solidFill>
+                  <a:srgbClr val="1C2833"/>
+                </a:solidFill>
+                <a:latin typeface="Arial" pitchFamily="34" charset="0"/>
+                <a:ea typeface="Arial" pitchFamily="34" charset="-122"/>
+                <a:cs typeface="Arial" pitchFamily="34" charset="-120"/>
+              </a:rPr>
+              <a:t>The four edge-middle cells each sit on 2 lines (a row and a column).</a:t>
             </a:r>
             <a:endParaRPr lang="en-US" sz="1200" dirty="0"/>
           </a:p>
+          <a:p>
+            <a:pPr algn="l" marL="342900" indent="-342900">
+              <a:lnSpc>
+                <a:spcPts val="1620"/>
+              </a:lnSpc>
+              <a:spcAft>
+                <a:spcPts val="300"/>
+              </a:spcAft>
+              <a:buSzPct val="100000"/>
+              <a:buChar char="•"/>
+            </a:pPr>
+            <a:r>
+              <a:rPr lang="en-US" sz="1200" dirty="0">
+                <a:solidFill>
+                  <a:srgbClr val="1C2833"/>
+                </a:solidFill>
+                <a:latin typeface="Arial" pitchFamily="34" charset="0"/>
+                <a:ea typeface="Arial" pitchFamily="34" charset="-122"/>
+                <a:cs typeface="Arial" pitchFamily="34" charset="-120"/>
+              </a:rPr>
+              <a:t>Sum of all lines = 4 × 15 = 60 (4 lines through the centre? — actually 8 lines total in a 3×3: 3 rows + 3 columns + 2 diagonals. Their sum is 8 × 15 = 120.)</a:t>
+            </a:r>
+            <a:endParaRPr lang="en-US" sz="1200" dirty="0"/>
+          </a:p>
+          <a:p>
+            <a:pPr algn="l" marL="342900" indent="-342900">
+              <a:lnSpc>
+                <a:spcPts val="1620"/>
+              </a:lnSpc>
+              <a:spcAft>
+                <a:spcPts val="300"/>
+              </a:spcAft>
+              <a:buSzPct val="100000"/>
+              <a:buChar char="•"/>
+            </a:pPr>
+            <a:r>
+              <a:rPr lang="en-US" sz="1200" dirty="0">
+                <a:solidFill>
+                  <a:srgbClr val="1C2833"/>
+                </a:solidFill>
+                <a:latin typeface="Arial" pitchFamily="34" charset="0"/>
+                <a:ea typeface="Arial" pitchFamily="34" charset="-122"/>
+                <a:cs typeface="Arial" pitchFamily="34" charset="-120"/>
+              </a:rPr>
+              <a:t>In that sum of 120, each cell is counted as many times as the number of lines it sits on: centre counted 4 times, corners 3 times each, edges 2 times each.</a:t>
+            </a:r>
+            <a:endParaRPr lang="en-US" sz="1200" dirty="0"/>
+          </a:p>
         </p:txBody>
       </p:sp>
       <p:sp>
         <p:nvSpPr>
           <p:cNvPr id="5" name="Text 3"/>
-          <p:cNvSpPr/>
-          <p:nvPr/>
-        </p:nvSpPr>
-        <p:spPr>
-          <a:xfrm>
-            <a:off x="406301" y="1460004"/>
-            <a:ext cx="8498026" cy="213271"/>
-          </a:xfrm>
-          <a:prstGeom prst="rect">
-            <a:avLst/>
-          </a:prstGeom>
-          <a:noFill/>
-          <a:ln/>
-        </p:spPr>
-        <p:txBody>
-          <a:bodyPr wrap="square" lIns="0" tIns="0" rIns="0" bIns="0" rtlCol="0" anchor="t"/>
-          <a:lstStyle/>
-          <a:p>
-            <a:pPr algn="l" indent="0" marL="0">
-              <a:lnSpc>
-                <a:spcPts val="1680"/>
-              </a:lnSpc>
-              <a:spcBef>
-                <a:spcPts val="300"/>
-              </a:spcBef>
-              <a:spcAft>
-                <a:spcPts val="300"/>
-              </a:spcAft>
-              <a:buNone/>
-            </a:pPr>
-            <a:r>
-              <a:rPr lang="en-US" sz="1200" dirty="0">
-                <a:solidFill>
-                  <a:srgbClr val="1C2833"/>
-                </a:solidFill>
-                <a:latin typeface="Arial" pitchFamily="34" charset="0"/>
-                <a:ea typeface="Arial" pitchFamily="34" charset="-122"/>
-                <a:cs typeface="Arial" pitchFamily="34" charset="-120"/>
-              </a:rPr>
-              <a:t>– Preview Day 4: Nārāyaṇa's stair-step method.</a:t>
-            </a:r>
-            <a:endParaRPr lang="en-US" sz="1200" dirty="0"/>
-          </a:p>
-        </p:txBody>
-      </p:sp>
-      <p:sp>
-        <p:nvSpPr>
-          <p:cNvPr id="6" name="Text 4"/>
           <p:cNvSpPr/>
           <p:nvPr/>
         </p:nvSpPr>
@@ -6111,7 +7886,7 @@
                 <a:ea typeface="Georgia" pitchFamily="34" charset="-122"/>
                 <a:cs typeface="Georgia" pitchFamily="34" charset="-120"/>
               </a:rPr>
-              <a:t>Student-facing content</a:t>
+              <a:t>Core (20 min) (cont.)</a:t>
             </a:r>
             <a:endParaRPr lang="en-US" sz="1800" dirty="0"/>
           </a:p>
@@ -6125,61 +7900,398 @@
         </p:nvSpPr>
         <p:spPr>
           <a:xfrm>
-            <a:off x="406301" y="883593"/>
-            <a:ext cx="8331398" cy="2150269"/>
-          </a:xfrm>
-          <a:prstGeom prst="rect">
-            <a:avLst/>
-          </a:prstGeom>
-          <a:solidFill>
-            <a:srgbClr val="F4F8F9"/>
-          </a:solidFill>
+            <a:off x="634901" y="883593"/>
+            <a:ext cx="8102798" cy="731341"/>
+          </a:xfrm>
+          <a:prstGeom prst="rect">
+            <a:avLst/>
+          </a:prstGeom>
+          <a:noFill/>
           <a:ln/>
         </p:spPr>
         <p:txBody>
-          <a:bodyPr wrap="square" rtlCol="0" anchor="ctr"/>
-          <a:lstStyle/>
-          <a:p>
-            <a:pPr indent="0" marL="0">
-              <a:buNone/>
-            </a:pPr>
-            <a:endParaRPr lang="en-US" dirty="0"/>
-          </a:p>
-        </p:txBody>
-      </p:sp>
-      <p:sp>
-        <p:nvSpPr>
-          <p:cNvPr id="5" name="Shape 3"/>
+          <a:bodyPr wrap="square" lIns="0" tIns="0" rIns="0" bIns="0" rtlCol="0" anchor="t"/>
+          <a:lstStyle/>
+          <a:p>
+            <a:pPr algn="l" marL="342900" indent="-342900">
+              <a:lnSpc>
+                <a:spcPts val="1620"/>
+              </a:lnSpc>
+              <a:spcAft>
+                <a:spcPts val="300"/>
+              </a:spcAft>
+              <a:buSzPct val="100000"/>
+              <a:buChar char="•"/>
+            </a:pPr>
+            <a:r>
+              <a:rPr lang="en-US" sz="1200" dirty="0">
+                <a:solidFill>
+                  <a:srgbClr val="1C2833"/>
+                </a:solidFill>
+                <a:latin typeface="Arial" pitchFamily="34" charset="0"/>
+                <a:ea typeface="Arial" pitchFamily="34" charset="-122"/>
+                <a:cs typeface="Arial" pitchFamily="34" charset="-120"/>
+              </a:rPr>
+              <a:t>Total: 4</a:t>
+            </a:r>
+            <a:pPr algn="l" indent="0" marL="0">
+              <a:lnSpc>
+                <a:spcPts val="1620"/>
+              </a:lnSpc>
+              <a:spcAft>
+                <a:spcPts val="300"/>
+              </a:spcAft>
+              <a:buNone/>
+            </a:pPr>
+            <a:r>
+              <a:rPr lang="en-US" sz="1200" i="1" dirty="0">
+                <a:solidFill>
+                  <a:srgbClr val="1C2833"/>
+                </a:solidFill>
+                <a:latin typeface="Arial" pitchFamily="34" charset="0"/>
+                <a:ea typeface="Arial" pitchFamily="34" charset="-122"/>
+                <a:cs typeface="Arial" pitchFamily="34" charset="-120"/>
+              </a:rPr>
+              <a:t>c</a:t>
+            </a:r>
+            <a:pPr algn="l" indent="0" marL="0">
+              <a:lnSpc>
+                <a:spcPts val="1620"/>
+              </a:lnSpc>
+              <a:spcAft>
+                <a:spcPts val="300"/>
+              </a:spcAft>
+              <a:buNone/>
+            </a:pPr>
+            <a:r>
+              <a:rPr lang="en-US" sz="1200" dirty="0">
+                <a:solidFill>
+                  <a:srgbClr val="1C2833"/>
+                </a:solidFill>
+                <a:latin typeface="Arial" pitchFamily="34" charset="0"/>
+                <a:ea typeface="Arial" pitchFamily="34" charset="-122"/>
+                <a:cs typeface="Arial" pitchFamily="34" charset="-120"/>
+              </a:rPr>
+              <a:t> + 3</a:t>
+            </a:r>
+            <a:pPr algn="l" indent="0" marL="0">
+              <a:lnSpc>
+                <a:spcPts val="1620"/>
+              </a:lnSpc>
+              <a:spcAft>
+                <a:spcPts val="300"/>
+              </a:spcAft>
+              <a:buNone/>
+            </a:pPr>
+            <a:r>
+              <a:rPr lang="en-US" sz="1200" i="1" dirty="0">
+                <a:solidFill>
+                  <a:srgbClr val="1C2833"/>
+                </a:solidFill>
+                <a:latin typeface="Arial" pitchFamily="34" charset="0"/>
+                <a:ea typeface="Arial" pitchFamily="34" charset="-122"/>
+                <a:cs typeface="Arial" pitchFamily="34" charset="-120"/>
+              </a:rPr>
+              <a:t>(corner sum)</a:t>
+            </a:r>
+            <a:pPr algn="l" indent="0" marL="0">
+              <a:lnSpc>
+                <a:spcPts val="1620"/>
+              </a:lnSpc>
+              <a:spcAft>
+                <a:spcPts val="300"/>
+              </a:spcAft>
+              <a:buNone/>
+            </a:pPr>
+            <a:r>
+              <a:rPr lang="en-US" sz="1200" dirty="0">
+                <a:solidFill>
+                  <a:srgbClr val="1C2833"/>
+                </a:solidFill>
+                <a:latin typeface="Arial" pitchFamily="34" charset="0"/>
+                <a:ea typeface="Arial" pitchFamily="34" charset="-122"/>
+                <a:cs typeface="Arial" pitchFamily="34" charset="-120"/>
+              </a:rPr>
+              <a:t> + 2</a:t>
+            </a:r>
+            <a:pPr algn="l" indent="0" marL="0">
+              <a:lnSpc>
+                <a:spcPts val="1620"/>
+              </a:lnSpc>
+              <a:spcAft>
+                <a:spcPts val="300"/>
+              </a:spcAft>
+              <a:buNone/>
+            </a:pPr>
+            <a:r>
+              <a:rPr lang="en-US" sz="1200" i="1" dirty="0">
+                <a:solidFill>
+                  <a:srgbClr val="1C2833"/>
+                </a:solidFill>
+                <a:latin typeface="Arial" pitchFamily="34" charset="0"/>
+                <a:ea typeface="Arial" pitchFamily="34" charset="-122"/>
+                <a:cs typeface="Arial" pitchFamily="34" charset="-120"/>
+              </a:rPr>
+              <a:t>(edge sum)</a:t>
+            </a:r>
+            <a:pPr algn="l" indent="0" marL="0">
+              <a:lnSpc>
+                <a:spcPts val="1620"/>
+              </a:lnSpc>
+              <a:spcAft>
+                <a:spcPts val="300"/>
+              </a:spcAft>
+              <a:buNone/>
+            </a:pPr>
+            <a:r>
+              <a:rPr lang="en-US" sz="1200" dirty="0">
+                <a:solidFill>
+                  <a:srgbClr val="1C2833"/>
+                </a:solidFill>
+                <a:latin typeface="Arial" pitchFamily="34" charset="0"/>
+                <a:ea typeface="Arial" pitchFamily="34" charset="-122"/>
+                <a:cs typeface="Arial" pitchFamily="34" charset="-120"/>
+              </a:rPr>
+              <a:t> = 120, where </a:t>
+            </a:r>
+            <a:pPr algn="l" indent="0" marL="0">
+              <a:lnSpc>
+                <a:spcPts val="1620"/>
+              </a:lnSpc>
+              <a:spcAft>
+                <a:spcPts val="300"/>
+              </a:spcAft>
+              <a:buNone/>
+            </a:pPr>
+            <a:r>
+              <a:rPr lang="en-US" sz="1200" i="1" dirty="0">
+                <a:solidFill>
+                  <a:srgbClr val="1C2833"/>
+                </a:solidFill>
+                <a:latin typeface="Arial" pitchFamily="34" charset="0"/>
+                <a:ea typeface="Arial" pitchFamily="34" charset="-122"/>
+                <a:cs typeface="Arial" pitchFamily="34" charset="-120"/>
+              </a:rPr>
+              <a:t>c</a:t>
+            </a:r>
+            <a:pPr algn="l" indent="0" marL="0">
+              <a:lnSpc>
+                <a:spcPts val="1620"/>
+              </a:lnSpc>
+              <a:spcAft>
+                <a:spcPts val="300"/>
+              </a:spcAft>
+              <a:buNone/>
+            </a:pPr>
+            <a:r>
+              <a:rPr lang="en-US" sz="1200" dirty="0">
+                <a:solidFill>
+                  <a:srgbClr val="1C2833"/>
+                </a:solidFill>
+                <a:latin typeface="Arial" pitchFamily="34" charset="0"/>
+                <a:ea typeface="Arial" pitchFamily="34" charset="-122"/>
+                <a:cs typeface="Arial" pitchFamily="34" charset="-120"/>
+              </a:rPr>
+              <a:t> is the centre value.</a:t>
+            </a:r>
+            <a:endParaRPr lang="en-US" sz="1200" dirty="0"/>
+          </a:p>
+          <a:p>
+            <a:pPr algn="l" marL="342900" indent="-342900">
+              <a:lnSpc>
+                <a:spcPts val="1620"/>
+              </a:lnSpc>
+              <a:spcAft>
+                <a:spcPts val="300"/>
+              </a:spcAft>
+              <a:buSzPct val="100000"/>
+              <a:buChar char="•"/>
+            </a:pPr>
+            <a:r>
+              <a:rPr lang="en-US" sz="1200" dirty="0">
+                <a:solidFill>
+                  <a:srgbClr val="1C2833"/>
+                </a:solidFill>
+                <a:latin typeface="Arial" pitchFamily="34" charset="0"/>
+                <a:ea typeface="Arial" pitchFamily="34" charset="-122"/>
+                <a:cs typeface="Arial" pitchFamily="34" charset="-120"/>
+              </a:rPr>
+              <a:t>Corner sum + edge sum + </a:t>
+            </a:r>
+            <a:pPr algn="l" indent="0" marL="0">
+              <a:lnSpc>
+                <a:spcPts val="1620"/>
+              </a:lnSpc>
+              <a:spcAft>
+                <a:spcPts val="300"/>
+              </a:spcAft>
+              <a:buNone/>
+            </a:pPr>
+            <a:r>
+              <a:rPr lang="en-US" sz="1200" i="1" dirty="0">
+                <a:solidFill>
+                  <a:srgbClr val="1C2833"/>
+                </a:solidFill>
+                <a:latin typeface="Arial" pitchFamily="34" charset="0"/>
+                <a:ea typeface="Arial" pitchFamily="34" charset="-122"/>
+                <a:cs typeface="Arial" pitchFamily="34" charset="-120"/>
+              </a:rPr>
+              <a:t>c</a:t>
+            </a:r>
+            <a:pPr algn="l" indent="0" marL="0">
+              <a:lnSpc>
+                <a:spcPts val="1620"/>
+              </a:lnSpc>
+              <a:spcAft>
+                <a:spcPts val="300"/>
+              </a:spcAft>
+              <a:buNone/>
+            </a:pPr>
+            <a:r>
+              <a:rPr lang="en-US" sz="1200" dirty="0">
+                <a:solidFill>
+                  <a:srgbClr val="1C2833"/>
+                </a:solidFill>
+                <a:latin typeface="Arial" pitchFamily="34" charset="0"/>
+                <a:ea typeface="Arial" pitchFamily="34" charset="-122"/>
+                <a:cs typeface="Arial" pitchFamily="34" charset="-120"/>
+              </a:rPr>
+              <a:t> = 45 (the total of 1..9). So 3</a:t>
+            </a:r>
+            <a:pPr algn="l" indent="0" marL="0">
+              <a:lnSpc>
+                <a:spcPts val="1620"/>
+              </a:lnSpc>
+              <a:spcAft>
+                <a:spcPts val="300"/>
+              </a:spcAft>
+              <a:buNone/>
+            </a:pPr>
+            <a:r>
+              <a:rPr lang="en-US" sz="1200" i="1" dirty="0">
+                <a:solidFill>
+                  <a:srgbClr val="1C2833"/>
+                </a:solidFill>
+                <a:latin typeface="Arial" pitchFamily="34" charset="0"/>
+                <a:ea typeface="Arial" pitchFamily="34" charset="-122"/>
+                <a:cs typeface="Arial" pitchFamily="34" charset="-120"/>
+              </a:rPr>
+              <a:t>(corner+edge)</a:t>
+            </a:r>
+            <a:pPr algn="l" indent="0" marL="0">
+              <a:lnSpc>
+                <a:spcPts val="1620"/>
+              </a:lnSpc>
+              <a:spcAft>
+                <a:spcPts val="300"/>
+              </a:spcAft>
+              <a:buNone/>
+            </a:pPr>
+            <a:r>
+              <a:rPr lang="en-US" sz="1200" dirty="0">
+                <a:solidFill>
+                  <a:srgbClr val="1C2833"/>
+                </a:solidFill>
+                <a:latin typeface="Arial" pitchFamily="34" charset="0"/>
+                <a:ea typeface="Arial" pitchFamily="34" charset="-122"/>
+                <a:cs typeface="Arial" pitchFamily="34" charset="-120"/>
+              </a:rPr>
+              <a:t> + 4</a:t>
+            </a:r>
+            <a:pPr algn="l" indent="0" marL="0">
+              <a:lnSpc>
+                <a:spcPts val="1620"/>
+              </a:lnSpc>
+              <a:spcAft>
+                <a:spcPts val="300"/>
+              </a:spcAft>
+              <a:buNone/>
+            </a:pPr>
+            <a:r>
+              <a:rPr lang="en-US" sz="1200" i="1" dirty="0">
+                <a:solidFill>
+                  <a:srgbClr val="1C2833"/>
+                </a:solidFill>
+                <a:latin typeface="Arial" pitchFamily="34" charset="0"/>
+                <a:ea typeface="Arial" pitchFamily="34" charset="-122"/>
+                <a:cs typeface="Arial" pitchFamily="34" charset="-120"/>
+              </a:rPr>
+              <a:t>c</a:t>
+            </a:r>
+            <a:pPr algn="l" indent="0" marL="0">
+              <a:lnSpc>
+                <a:spcPts val="1620"/>
+              </a:lnSpc>
+              <a:spcAft>
+                <a:spcPts val="300"/>
+              </a:spcAft>
+              <a:buNone/>
+            </a:pPr>
+            <a:r>
+              <a:rPr lang="en-US" sz="1200" dirty="0">
+                <a:solidFill>
+                  <a:srgbClr val="1C2833"/>
+                </a:solidFill>
+                <a:latin typeface="Arial" pitchFamily="34" charset="0"/>
+                <a:ea typeface="Arial" pitchFamily="34" charset="-122"/>
+                <a:cs typeface="Arial" pitchFamily="34" charset="-120"/>
+              </a:rPr>
+              <a:t> + ... — work it out together. The cleanest answer: </a:t>
+            </a:r>
+            <a:pPr algn="l" indent="0" marL="0">
+              <a:lnSpc>
+                <a:spcPts val="1620"/>
+              </a:lnSpc>
+              <a:spcAft>
+                <a:spcPts val="300"/>
+              </a:spcAft>
+              <a:buNone/>
+            </a:pPr>
+            <a:r>
+              <a:rPr lang="en-US" sz="1200" i="1" dirty="0">
+                <a:solidFill>
+                  <a:srgbClr val="1C2833"/>
+                </a:solidFill>
+                <a:latin typeface="Arial" pitchFamily="34" charset="0"/>
+                <a:ea typeface="Arial" pitchFamily="34" charset="-122"/>
+                <a:cs typeface="Arial" pitchFamily="34" charset="-120"/>
+              </a:rPr>
+              <a:t>c</a:t>
+            </a:r>
+            <a:pPr algn="l" indent="0" marL="0">
+              <a:lnSpc>
+                <a:spcPts val="1620"/>
+              </a:lnSpc>
+              <a:spcAft>
+                <a:spcPts val="300"/>
+              </a:spcAft>
+              <a:buNone/>
+            </a:pPr>
+            <a:r>
+              <a:rPr lang="en-US" sz="1200" dirty="0">
+                <a:solidFill>
+                  <a:srgbClr val="1C2833"/>
+                </a:solidFill>
+                <a:latin typeface="Arial" pitchFamily="34" charset="0"/>
+                <a:ea typeface="Arial" pitchFamily="34" charset="-122"/>
+                <a:cs typeface="Arial" pitchFamily="34" charset="-120"/>
+              </a:rPr>
+              <a:t> = 5.</a:t>
+            </a:r>
+            <a:endParaRPr lang="en-US" sz="1200" dirty="0"/>
+          </a:p>
+        </p:txBody>
+      </p:sp>
+      <p:sp>
+        <p:nvSpPr>
+          <p:cNvPr id="5" name="Text 3"/>
           <p:cNvSpPr/>
           <p:nvPr/>
         </p:nvSpPr>
         <p:spPr>
           <a:xfrm>
-            <a:off x="434876" y="883593"/>
-            <a:ext cx="0" cy="2150269"/>
-          </a:xfrm>
-          <a:prstGeom prst="line">
-            <a:avLst/>
-          </a:prstGeom>
-          <a:noFill/>
-          <a:ln w="57150">
-            <a:solidFill>
-              <a:srgbClr val="FE4447"/>
-            </a:solidFill>
-            <a:prstDash val="solid"/>
-          </a:ln>
-        </p:spPr>
-      </p:sp>
-      <p:sp>
-        <p:nvSpPr>
-          <p:cNvPr id="6" name="Text 4"/>
-          <p:cNvSpPr/>
-          <p:nvPr/>
-        </p:nvSpPr>
-        <p:spPr>
-          <a:xfrm>
-            <a:off x="692051" y="1074093"/>
-            <a:ext cx="7973389" cy="230981"/>
+            <a:off x="406301" y="1703784"/>
+            <a:ext cx="8498026" cy="213271"/>
           </a:xfrm>
           <a:prstGeom prst="rect">
             <a:avLst/>
@@ -6193,7 +8305,7 @@
           <a:p>
             <a:pPr algn="l" indent="0" marL="0">
               <a:lnSpc>
-                <a:spcPts val="1820"/>
+                <a:spcPts val="1680"/>
               </a:lnSpc>
               <a:spcBef>
                 <a:spcPts val="300"/>
@@ -6204,282 +8316,23 @@
               <a:buNone/>
             </a:pPr>
             <a:r>
-              <a:rPr lang="en-US" sz="1300" b="1" i="1" dirty="0">
-                <a:solidFill>
-                  <a:srgbClr val="1C2833"/>
-                </a:solidFill>
-                <a:latin typeface="Georgia" pitchFamily="34" charset="0"/>
-                <a:ea typeface="Georgia" pitchFamily="34" charset="-122"/>
-                <a:cs typeface="Georgia" pitchFamily="34" charset="-120"/>
-              </a:rPr>
-              <a:t>There is only ONE 3×3 magic square with 1–9</a:t>
-            </a:r>
-            <a:pPr algn="l" indent="0" marL="0">
-              <a:lnSpc>
-                <a:spcPts val="1820"/>
-              </a:lnSpc>
-              <a:spcBef>
-                <a:spcPts val="300"/>
-              </a:spcBef>
-              <a:spcAft>
-                <a:spcPts val="300"/>
-              </a:spcAft>
-              <a:buNone/>
-            </a:pPr>
-            <a:r>
-              <a:rPr lang="en-US" sz="1300" dirty="0">
-                <a:solidFill>
-                  <a:srgbClr val="1C2833"/>
-                </a:solidFill>
-                <a:latin typeface="Georgia" pitchFamily="34" charset="0"/>
-                <a:ea typeface="Georgia" pitchFamily="34" charset="-122"/>
-                <a:cs typeface="Georgia" pitchFamily="34" charset="-120"/>
-              </a:rPr>
-              <a:t> — up to symmetry.</a:t>
-            </a:r>
-            <a:endParaRPr lang="en-US" sz="1300" dirty="0"/>
-          </a:p>
-        </p:txBody>
-      </p:sp>
-      <p:sp>
-        <p:nvSpPr>
-          <p:cNvPr id="7" name="Text 5"/>
-          <p:cNvSpPr/>
-          <p:nvPr/>
-        </p:nvSpPr>
-        <p:spPr>
-          <a:xfrm>
-            <a:off x="692051" y="1343174"/>
-            <a:ext cx="7973389" cy="692944"/>
-          </a:xfrm>
-          <a:prstGeom prst="rect">
-            <a:avLst/>
-          </a:prstGeom>
-          <a:noFill/>
-          <a:ln/>
-        </p:spPr>
-        <p:txBody>
-          <a:bodyPr wrap="square" lIns="0" tIns="0" rIns="0" bIns="0" rtlCol="0" anchor="t"/>
-          <a:lstStyle/>
-          <a:p>
-            <a:pPr algn="l" indent="0" marL="0">
-              <a:lnSpc>
-                <a:spcPts val="1820"/>
-              </a:lnSpc>
-              <a:spcBef>
-                <a:spcPts val="300"/>
-              </a:spcBef>
-              <a:spcAft>
-                <a:spcPts val="300"/>
-              </a:spcAft>
-              <a:buNone/>
-            </a:pPr>
-            <a:r>
-              <a:rPr lang="en-US" sz="1300" dirty="0">
-                <a:solidFill>
-                  <a:srgbClr val="1C2833"/>
-                </a:solidFill>
-                <a:latin typeface="Georgia" pitchFamily="34" charset="0"/>
-                <a:ea typeface="Georgia" pitchFamily="34" charset="-122"/>
-                <a:cs typeface="Georgia" pitchFamily="34" charset="-120"/>
-              </a:rPr>
-              <a:t>The 4 rotations and 4 reflections together produce 8 grid arrangements. They all share the same structure: - </a:t>
-            </a:r>
-            <a:pPr algn="l" indent="0" marL="0">
-              <a:lnSpc>
-                <a:spcPts val="1820"/>
-              </a:lnSpc>
-              <a:spcBef>
-                <a:spcPts val="300"/>
-              </a:spcBef>
-              <a:spcAft>
-                <a:spcPts val="300"/>
-              </a:spcAft>
-              <a:buNone/>
-            </a:pPr>
-            <a:r>
-              <a:rPr lang="en-US" sz="1300" b="1" i="1" dirty="0">
-                <a:solidFill>
-                  <a:srgbClr val="1C2833"/>
-                </a:solidFill>
-                <a:latin typeface="Georgia" pitchFamily="34" charset="0"/>
-                <a:ea typeface="Georgia" pitchFamily="34" charset="-122"/>
-                <a:cs typeface="Georgia" pitchFamily="34" charset="-120"/>
-              </a:rPr>
-              <a:t>5</a:t>
-            </a:r>
-            <a:pPr algn="l" indent="0" marL="0">
-              <a:lnSpc>
-                <a:spcPts val="1820"/>
-              </a:lnSpc>
-              <a:spcBef>
-                <a:spcPts val="300"/>
-              </a:spcBef>
-              <a:spcAft>
-                <a:spcPts val="300"/>
-              </a:spcAft>
-              <a:buNone/>
-            </a:pPr>
-            <a:r>
-              <a:rPr lang="en-US" sz="1300" dirty="0">
-                <a:solidFill>
-                  <a:srgbClr val="1C2833"/>
-                </a:solidFill>
-                <a:latin typeface="Georgia" pitchFamily="34" charset="0"/>
-                <a:ea typeface="Georgia" pitchFamily="34" charset="-122"/>
-                <a:cs typeface="Georgia" pitchFamily="34" charset="-120"/>
-              </a:rPr>
-              <a:t> is in the centre. - The four even numbers (2, 4, 6, 8) are at the four corners. - The four odd numbers other than 5 (1, 3, 7, 9) are at the four edge-middles.</a:t>
-            </a:r>
-            <a:endParaRPr lang="en-US" sz="1300" dirty="0"/>
-          </a:p>
-        </p:txBody>
-      </p:sp>
-      <p:sp>
-        <p:nvSpPr>
-          <p:cNvPr id="8" name="Text 6"/>
-          <p:cNvSpPr/>
-          <p:nvPr/>
-        </p:nvSpPr>
-        <p:spPr>
-          <a:xfrm>
-            <a:off x="692051" y="2074218"/>
-            <a:ext cx="7973389" cy="500063"/>
-          </a:xfrm>
-          <a:prstGeom prst="rect">
-            <a:avLst/>
-          </a:prstGeom>
-          <a:noFill/>
-          <a:ln/>
-        </p:spPr>
-        <p:txBody>
-          <a:bodyPr wrap="square" lIns="0" tIns="0" rIns="0" bIns="0" rtlCol="0" anchor="t"/>
-          <a:lstStyle/>
-          <a:p>
-            <a:pPr algn="l" indent="0" marL="0">
-              <a:lnSpc>
-                <a:spcPts val="1820"/>
-              </a:lnSpc>
-              <a:spcBef>
-                <a:spcPts val="300"/>
-              </a:spcBef>
-              <a:spcAft>
-                <a:spcPts val="300"/>
-              </a:spcAft>
-              <a:buNone/>
-            </a:pPr>
-            <a:r>
-              <a:rPr lang="en-US" sz="1300" dirty="0">
-                <a:solidFill>
-                  <a:srgbClr val="1C2833"/>
-                </a:solidFill>
-                <a:latin typeface="Georgia" pitchFamily="34" charset="0"/>
-                <a:ea typeface="Georgia" pitchFamily="34" charset="-122"/>
-                <a:cs typeface="Georgia" pitchFamily="34" charset="-120"/>
-              </a:rPr>
-              <a:t>``</a:t>
-            </a:r>
-            <a:pPr algn="l" indent="0" marL="0">
-              <a:lnSpc>
-                <a:spcPts val="1820"/>
-              </a:lnSpc>
-              <a:spcBef>
-                <a:spcPts val="300"/>
-              </a:spcBef>
-              <a:spcAft>
-                <a:spcPts val="300"/>
-              </a:spcAft>
-              <a:buNone/>
-            </a:pPr>
-            <a:r>
-              <a:rPr lang="en-US" sz="1300" i="1" dirty="0">
-                <a:solidFill>
-                  <a:srgbClr val="1C2833"/>
-                </a:solidFill>
-                <a:latin typeface="Georgia" pitchFamily="34" charset="0"/>
-                <a:ea typeface="Georgia" pitchFamily="34" charset="-122"/>
-                <a:cs typeface="Georgia" pitchFamily="34" charset="-120"/>
-              </a:rPr>
-              <a:t> 2 | 7 | 6 6 | 7 | 2 --------- --------- 9 | 5 | 1 1 | 5 | 9 ← reflection (horizontal flip) --------- --------- 4 | 3 | 8 8 | 3 | 4</a:t>
-            </a:r>
-            <a:pPr algn="l" indent="0" marL="0">
-              <a:lnSpc>
-                <a:spcPts val="1820"/>
-              </a:lnSpc>
-              <a:spcBef>
-                <a:spcPts val="300"/>
-              </a:spcBef>
-              <a:spcAft>
-                <a:spcPts val="300"/>
-              </a:spcAft>
-              <a:buNone/>
-            </a:pPr>
-            <a:r>
-              <a:rPr lang="en-US" sz="1300" dirty="0">
-                <a:solidFill>
-                  <a:srgbClr val="1C2833"/>
-                </a:solidFill>
-                <a:latin typeface="Georgia" pitchFamily="34" charset="0"/>
-                <a:ea typeface="Georgia" pitchFamily="34" charset="-122"/>
-                <a:cs typeface="Georgia" pitchFamily="34" charset="-120"/>
-              </a:rPr>
-              <a:t>``</a:t>
-            </a:r>
-            <a:endParaRPr lang="en-US" sz="1300" dirty="0"/>
-          </a:p>
-        </p:txBody>
-      </p:sp>
-      <p:sp>
-        <p:nvSpPr>
-          <p:cNvPr id="9" name="Text 7"/>
-          <p:cNvSpPr/>
-          <p:nvPr/>
-        </p:nvSpPr>
-        <p:spPr>
-          <a:xfrm>
-            <a:off x="692051" y="2612380"/>
-            <a:ext cx="7973389" cy="230981"/>
-          </a:xfrm>
-          <a:prstGeom prst="rect">
-            <a:avLst/>
-          </a:prstGeom>
-          <a:noFill/>
-          <a:ln/>
-        </p:spPr>
-        <p:txBody>
-          <a:bodyPr wrap="square" lIns="0" tIns="0" rIns="0" bIns="0" rtlCol="0" anchor="t"/>
-          <a:lstStyle/>
-          <a:p>
-            <a:pPr algn="l" indent="0" marL="0">
-              <a:lnSpc>
-                <a:spcPts val="1820"/>
-              </a:lnSpc>
-              <a:spcBef>
-                <a:spcPts val="300"/>
-              </a:spcBef>
-              <a:spcAft>
-                <a:spcPts val="300"/>
-              </a:spcAft>
-              <a:buNone/>
-            </a:pPr>
-            <a:r>
-              <a:rPr lang="en-US" sz="1300" i="1" dirty="0">
-                <a:solidFill>
-                  <a:srgbClr val="1C2833"/>
-                </a:solidFill>
-                <a:latin typeface="Georgia" pitchFamily="34" charset="0"/>
-                <a:ea typeface="Georgia" pitchFamily="34" charset="-122"/>
-                <a:cs typeface="Georgia" pitchFamily="34" charset="-120"/>
-              </a:rPr>
-              <a:t>Eight arrangements; one square.</a:t>
-            </a:r>
-            <a:endParaRPr lang="en-US" sz="1300" dirty="0"/>
-          </a:p>
-        </p:txBody>
-      </p:sp>
-      <p:sp>
-        <p:nvSpPr>
-          <p:cNvPr id="10" name="Text 8"/>
+              <a:rPr lang="en-US" sz="1200" i="1" dirty="0">
+                <a:solidFill>
+                  <a:srgbClr val="1C2833"/>
+                </a:solidFill>
+                <a:latin typeface="Arial" pitchFamily="34" charset="0"/>
+                <a:ea typeface="Arial" pitchFamily="34" charset="-122"/>
+                <a:cs typeface="Arial" pitchFamily="34" charset="-120"/>
+              </a:rPr>
+              <a:t>(Don't make them complete the full algebra — show the structure, conclude 5 = centre.)</a:t>
+            </a:r>
+            <a:endParaRPr lang="en-US" sz="1200" dirty="0"/>
+          </a:p>
+        </p:txBody>
+      </p:sp>
+      <p:sp>
+        <p:nvSpPr>
+          <p:cNvPr id="6" name="Text 4"/>
           <p:cNvSpPr/>
           <p:nvPr/>
         </p:nvSpPr>
